--- a/RTR15호기개발 고려사항.pptx
+++ b/RTR15호기개발 고려사항.pptx
@@ -8,39 +8,40 @@
     <p:sldId id="256" r:id="rId2"/>
     <p:sldId id="257" r:id="rId3"/>
     <p:sldId id="272" r:id="rId4"/>
-    <p:sldId id="258" r:id="rId5"/>
-    <p:sldId id="259" r:id="rId6"/>
-    <p:sldId id="278" r:id="rId7"/>
-    <p:sldId id="287" r:id="rId8"/>
-    <p:sldId id="288" r:id="rId9"/>
-    <p:sldId id="279" r:id="rId10"/>
-    <p:sldId id="280" r:id="rId11"/>
-    <p:sldId id="282" r:id="rId12"/>
-    <p:sldId id="281" r:id="rId13"/>
-    <p:sldId id="283" r:id="rId14"/>
-    <p:sldId id="284" r:id="rId15"/>
-    <p:sldId id="285" r:id="rId16"/>
-    <p:sldId id="286" r:id="rId17"/>
-    <p:sldId id="269" r:id="rId18"/>
-    <p:sldId id="270" r:id="rId19"/>
-    <p:sldId id="271" r:id="rId20"/>
-    <p:sldId id="260" r:id="rId21"/>
-    <p:sldId id="268" r:id="rId22"/>
-    <p:sldId id="266" r:id="rId23"/>
-    <p:sldId id="262" r:id="rId24"/>
-    <p:sldId id="267" r:id="rId25"/>
-    <p:sldId id="263" r:id="rId26"/>
-    <p:sldId id="264" r:id="rId27"/>
-    <p:sldId id="261" r:id="rId28"/>
-    <p:sldId id="265" r:id="rId29"/>
-    <p:sldId id="273" r:id="rId30"/>
-    <p:sldId id="274" r:id="rId31"/>
-    <p:sldId id="275" r:id="rId32"/>
-    <p:sldId id="276" r:id="rId33"/>
-    <p:sldId id="289" r:id="rId34"/>
+    <p:sldId id="291" r:id="rId5"/>
+    <p:sldId id="258" r:id="rId6"/>
+    <p:sldId id="259" r:id="rId7"/>
+    <p:sldId id="278" r:id="rId8"/>
+    <p:sldId id="287" r:id="rId9"/>
+    <p:sldId id="288" r:id="rId10"/>
+    <p:sldId id="279" r:id="rId11"/>
+    <p:sldId id="280" r:id="rId12"/>
+    <p:sldId id="282" r:id="rId13"/>
+    <p:sldId id="281" r:id="rId14"/>
+    <p:sldId id="283" r:id="rId15"/>
+    <p:sldId id="284" r:id="rId16"/>
+    <p:sldId id="285" r:id="rId17"/>
+    <p:sldId id="286" r:id="rId18"/>
+    <p:sldId id="269" r:id="rId19"/>
+    <p:sldId id="270" r:id="rId20"/>
+    <p:sldId id="271" r:id="rId21"/>
+    <p:sldId id="260" r:id="rId22"/>
+    <p:sldId id="268" r:id="rId23"/>
+    <p:sldId id="266" r:id="rId24"/>
+    <p:sldId id="262" r:id="rId25"/>
+    <p:sldId id="267" r:id="rId26"/>
+    <p:sldId id="263" r:id="rId27"/>
+    <p:sldId id="264" r:id="rId28"/>
+    <p:sldId id="261" r:id="rId29"/>
+    <p:sldId id="265" r:id="rId30"/>
+    <p:sldId id="273" r:id="rId31"/>
+    <p:sldId id="274" r:id="rId32"/>
+    <p:sldId id="275" r:id="rId33"/>
+    <p:sldId id="276" r:id="rId34"/>
+    <p:sldId id="289" r:id="rId35"/>
   </p:sldIdLst>
   <p:sldSz cx="12192000" cy="6858000"/>
-  <p:notesSz cx="6858000" cy="9144000"/>
+  <p:notesSz cx="6797675" cy="9874250"/>
   <p:defaultTextStyle>
     <a:defPPr>
       <a:defRPr lang="ko-KR"/>
@@ -275,7 +276,7 @@
           <a:p>
             <a:fld id="{B039A892-1411-41F3-BAFD-7FAB748E604C}" type="datetimeFigureOut">
               <a:rPr lang="ko-KR" altLang="en-US" smtClean="0"/>
-              <a:t>2025-05-16</a:t>
+              <a:t>2026-01-13</a:t>
             </a:fld>
             <a:endParaRPr lang="ko-KR" altLang="en-US"/>
           </a:p>
@@ -445,7 +446,7 @@
           <a:p>
             <a:fld id="{B039A892-1411-41F3-BAFD-7FAB748E604C}" type="datetimeFigureOut">
               <a:rPr lang="ko-KR" altLang="en-US" smtClean="0"/>
-              <a:t>2025-05-16</a:t>
+              <a:t>2026-01-13</a:t>
             </a:fld>
             <a:endParaRPr lang="ko-KR" altLang="en-US"/>
           </a:p>
@@ -625,7 +626,7 @@
           <a:p>
             <a:fld id="{B039A892-1411-41F3-BAFD-7FAB748E604C}" type="datetimeFigureOut">
               <a:rPr lang="ko-KR" altLang="en-US" smtClean="0"/>
-              <a:t>2025-05-16</a:t>
+              <a:t>2026-01-13</a:t>
             </a:fld>
             <a:endParaRPr lang="ko-KR" altLang="en-US"/>
           </a:p>
@@ -795,7 +796,7 @@
           <a:p>
             <a:fld id="{B039A892-1411-41F3-BAFD-7FAB748E604C}" type="datetimeFigureOut">
               <a:rPr lang="ko-KR" altLang="en-US" smtClean="0"/>
-              <a:t>2025-05-16</a:t>
+              <a:t>2026-01-13</a:t>
             </a:fld>
             <a:endParaRPr lang="ko-KR" altLang="en-US"/>
           </a:p>
@@ -1041,7 +1042,7 @@
           <a:p>
             <a:fld id="{B039A892-1411-41F3-BAFD-7FAB748E604C}" type="datetimeFigureOut">
               <a:rPr lang="ko-KR" altLang="en-US" smtClean="0"/>
-              <a:t>2025-05-16</a:t>
+              <a:t>2026-01-13</a:t>
             </a:fld>
             <a:endParaRPr lang="ko-KR" altLang="en-US"/>
           </a:p>
@@ -1273,7 +1274,7 @@
           <a:p>
             <a:fld id="{B039A892-1411-41F3-BAFD-7FAB748E604C}" type="datetimeFigureOut">
               <a:rPr lang="ko-KR" altLang="en-US" smtClean="0"/>
-              <a:t>2025-05-16</a:t>
+              <a:t>2026-01-13</a:t>
             </a:fld>
             <a:endParaRPr lang="ko-KR" altLang="en-US"/>
           </a:p>
@@ -1640,7 +1641,7 @@
           <a:p>
             <a:fld id="{B039A892-1411-41F3-BAFD-7FAB748E604C}" type="datetimeFigureOut">
               <a:rPr lang="ko-KR" altLang="en-US" smtClean="0"/>
-              <a:t>2025-05-16</a:t>
+              <a:t>2026-01-13</a:t>
             </a:fld>
             <a:endParaRPr lang="ko-KR" altLang="en-US"/>
           </a:p>
@@ -1758,7 +1759,7 @@
           <a:p>
             <a:fld id="{B039A892-1411-41F3-BAFD-7FAB748E604C}" type="datetimeFigureOut">
               <a:rPr lang="ko-KR" altLang="en-US" smtClean="0"/>
-              <a:t>2025-05-16</a:t>
+              <a:t>2026-01-13</a:t>
             </a:fld>
             <a:endParaRPr lang="ko-KR" altLang="en-US"/>
           </a:p>
@@ -1853,7 +1854,7 @@
           <a:p>
             <a:fld id="{B039A892-1411-41F3-BAFD-7FAB748E604C}" type="datetimeFigureOut">
               <a:rPr lang="ko-KR" altLang="en-US" smtClean="0"/>
-              <a:t>2025-05-16</a:t>
+              <a:t>2026-01-13</a:t>
             </a:fld>
             <a:endParaRPr lang="ko-KR" altLang="en-US"/>
           </a:p>
@@ -2130,7 +2131,7 @@
           <a:p>
             <a:fld id="{B039A892-1411-41F3-BAFD-7FAB748E604C}" type="datetimeFigureOut">
               <a:rPr lang="ko-KR" altLang="en-US" smtClean="0"/>
-              <a:t>2025-05-16</a:t>
+              <a:t>2026-01-13</a:t>
             </a:fld>
             <a:endParaRPr lang="ko-KR" altLang="en-US"/>
           </a:p>
@@ -2383,7 +2384,7 @@
           <a:p>
             <a:fld id="{B039A892-1411-41F3-BAFD-7FAB748E604C}" type="datetimeFigureOut">
               <a:rPr lang="ko-KR" altLang="en-US" smtClean="0"/>
-              <a:t>2025-05-16</a:t>
+              <a:t>2026-01-13</a:t>
             </a:fld>
             <a:endParaRPr lang="ko-KR" altLang="en-US"/>
           </a:p>
@@ -2596,7 +2597,7 @@
           <a:p>
             <a:fld id="{B039A892-1411-41F3-BAFD-7FAB748E604C}" type="datetimeFigureOut">
               <a:rPr lang="ko-KR" altLang="en-US" smtClean="0"/>
-              <a:t>2025-05-16</a:t>
+              <a:t>2026-01-13</a:t>
             </a:fld>
             <a:endParaRPr lang="ko-KR" altLang="en-US"/>
           </a:p>
@@ -3109,25 +3110,22 @@
           <a:lstStyle/>
           <a:p>
             <a:r>
-              <a:rPr lang="ko-KR" altLang="en-US" b="1" dirty="0"/>
-              <a:t>파이프</a:t>
-            </a:r>
-            <a:r>
-              <a:rPr lang="en-US" altLang="ko-KR" b="1" dirty="0"/>
-              <a:t>(Pipe</a:t>
-            </a:r>
-            <a:r>
-              <a:rPr lang="en-US" altLang="ko-KR" b="1" dirty="0" smtClean="0"/>
-              <a:t>)</a:t>
-            </a:r>
-            <a:r>
-              <a:rPr lang="en-US" altLang="ko-KR" dirty="0"/>
-              <a:t> </a:t>
-            </a:r>
-            <a:r>
-              <a:rPr lang="ko-KR" altLang="en-US" dirty="0"/>
-              <a:t>통신</a:t>
-            </a:r>
+              <a:rPr lang="en-US" altLang="ko-KR" dirty="0" smtClean="0"/>
+              <a:t>IPC </a:t>
+            </a:r>
+            <a:r>
+              <a:rPr lang="en-US" altLang="ko-KR" sz="2400" dirty="0"/>
+              <a:t>(Inter Process </a:t>
+            </a:r>
+            <a:r>
+              <a:rPr lang="en-US" altLang="ko-KR" sz="2400" dirty="0" smtClean="0"/>
+              <a:t>Communication) </a:t>
+            </a:r>
+            <a:r>
+              <a:rPr lang="ko-KR" altLang="en-US" dirty="0" smtClean="0"/>
+              <a:t>검토</a:t>
+            </a:r>
+            <a:endParaRPr lang="ko-KR" altLang="en-US" dirty="0"/>
           </a:p>
         </p:txBody>
       </p:sp>
@@ -3143,221 +3141,206 @@
         </p:nvSpPr>
         <p:spPr/>
         <p:txBody>
-          <a:bodyPr>
-            <a:normAutofit fontScale="92500" lnSpcReduction="10000"/>
-          </a:bodyPr>
+          <a:bodyPr/>
           <a:lstStyle/>
           <a:p>
             <a:r>
-              <a:rPr lang="ko-KR" altLang="en-US" b="1" dirty="0" err="1"/>
-              <a:t>단방향</a:t>
-            </a:r>
-            <a:r>
               <a:rPr lang="ko-KR" altLang="en-US" b="1" dirty="0"/>
-              <a:t> 통신</a:t>
-            </a:r>
-            <a:endParaRPr lang="en-US" altLang="ko-KR" dirty="0" smtClean="0"/>
-          </a:p>
-          <a:p>
-            <a:pPr lvl="1"/>
-            <a:r>
-              <a:rPr lang="ko-KR" altLang="en-US" dirty="0" smtClean="0"/>
-              <a:t>프로세스</a:t>
+              <a:t>파이프</a:t>
+            </a:r>
+            <a:r>
+              <a:rPr lang="en-US" altLang="ko-KR" b="1" dirty="0"/>
+              <a:t>(Pipes</a:t>
+            </a:r>
+            <a:r>
+              <a:rPr lang="en-US" altLang="ko-KR" b="1" dirty="0" smtClean="0"/>
+              <a:t>) </a:t>
             </a:r>
             <a:r>
               <a:rPr lang="ko-KR" altLang="en-US" dirty="0"/>
-              <a:t> 간에 </a:t>
-            </a:r>
-            <a:r>
-              <a:rPr lang="ko-KR" altLang="en-US" b="1" dirty="0" err="1"/>
-              <a:t>단방향</a:t>
-            </a:r>
-            <a:r>
-              <a:rPr lang="ko-KR" altLang="en-US" dirty="0" err="1"/>
-              <a:t>으로</a:t>
+              <a:t>통신</a:t>
+            </a:r>
+            <a:endParaRPr lang="en-US" altLang="ko-KR" b="1" dirty="0" smtClean="0"/>
+          </a:p>
+          <a:p>
+            <a:r>
+              <a:rPr lang="ko-KR" altLang="en-US" b="1" dirty="0"/>
+              <a:t>명명된 파이프</a:t>
+            </a:r>
+            <a:r>
+              <a:rPr lang="en-US" altLang="ko-KR" b="1" dirty="0"/>
+              <a:t>(Named Pipes</a:t>
+            </a:r>
+            <a:r>
+              <a:rPr lang="en-US" altLang="ko-KR" b="1" dirty="0" smtClean="0"/>
+              <a:t>) </a:t>
             </a:r>
             <a:r>
               <a:rPr lang="ko-KR" altLang="en-US" dirty="0"/>
-              <a:t> 데이터를 </a:t>
-            </a:r>
-            <a:r>
-              <a:rPr lang="ko-KR" altLang="en-US" dirty="0" smtClean="0"/>
-              <a:t>전달</a:t>
-            </a:r>
-            <a:endParaRPr lang="en-US" altLang="ko-KR" dirty="0" smtClean="0"/>
+              <a:t>통신</a:t>
+            </a:r>
+            <a:endParaRPr lang="en-US" altLang="ko-KR" b="1" dirty="0" smtClean="0"/>
           </a:p>
           <a:p>
             <a:r>
               <a:rPr lang="ko-KR" altLang="en-US" b="1" dirty="0" smtClean="0"/>
-              <a:t>부모</a:t>
+              <a:t>메시지</a:t>
+            </a:r>
+            <a:r>
+              <a:rPr lang="ko-KR" altLang="en-US" b="1" dirty="0"/>
+              <a:t> 큐</a:t>
             </a:r>
             <a:r>
               <a:rPr lang="en-US" altLang="ko-KR" b="1" dirty="0"/>
-              <a:t>-</a:t>
-            </a:r>
+              <a:t>(Message Queues</a:t>
+            </a:r>
+            <a:r>
+              <a:rPr lang="en-US" altLang="ko-KR" b="1" dirty="0" smtClean="0"/>
+              <a:t>)</a:t>
+            </a:r>
+            <a:r>
+              <a:rPr lang="ko-KR" altLang="en-US" dirty="0"/>
+              <a:t> 통신</a:t>
+            </a:r>
+            <a:endParaRPr lang="en-US" altLang="ko-KR" b="1" dirty="0" smtClean="0"/>
+          </a:p>
+          <a:p>
             <a:r>
               <a:rPr lang="ko-KR" altLang="en-US" b="1" dirty="0"/>
-              <a:t>자식 프로세스 간 </a:t>
-            </a:r>
-            <a:r>
-              <a:rPr lang="ko-KR" altLang="en-US" b="1" dirty="0" smtClean="0"/>
-              <a:t>통신</a:t>
-            </a:r>
-            <a:endParaRPr lang="en-US" altLang="ko-KR" b="1" dirty="0"/>
-          </a:p>
-          <a:p>
-            <a:pPr lvl="1"/>
+              <a:t>공유 메모리</a:t>
+            </a:r>
+            <a:r>
+              <a:rPr lang="en-US" altLang="ko-KR" b="1" dirty="0"/>
+              <a:t>(Shared Memory</a:t>
+            </a:r>
+            <a:r>
+              <a:rPr lang="en-US" altLang="ko-KR" b="1" dirty="0" smtClean="0"/>
+              <a:t>)</a:t>
+            </a:r>
             <a:r>
               <a:rPr lang="ko-KR" altLang="en-US" dirty="0"/>
-              <a:t>운영체제에서 제공하는 특별한 파일 </a:t>
-            </a:r>
-            <a:r>
-              <a:rPr lang="ko-KR" altLang="en-US" dirty="0" smtClean="0"/>
-              <a:t>기반의</a:t>
+              <a:t> 통신</a:t>
+            </a:r>
+            <a:endParaRPr lang="en-US" altLang="ko-KR" b="1" dirty="0" smtClean="0"/>
+          </a:p>
+          <a:p>
+            <a:r>
+              <a:rPr lang="ko-KR" altLang="en-US" b="1" dirty="0"/>
+              <a:t>소켓</a:t>
+            </a:r>
+            <a:r>
+              <a:rPr lang="en-US" altLang="ko-KR" b="1" dirty="0"/>
+              <a:t>(</a:t>
+            </a:r>
+            <a:r>
+              <a:rPr lang="en-US" altLang="ko-KR" b="1" dirty="0">
+                <a:solidFill>
+                  <a:srgbClr val="FF0000"/>
+                </a:solidFill>
+              </a:rPr>
+              <a:t>Socket</a:t>
+            </a:r>
+            <a:r>
+              <a:rPr lang="en-US" altLang="ko-KR" b="1" dirty="0"/>
+              <a:t>s</a:t>
+            </a:r>
+            <a:r>
+              <a:rPr lang="en-US" altLang="ko-KR" b="1" dirty="0" smtClean="0"/>
+              <a:t>)</a:t>
             </a:r>
             <a:r>
               <a:rPr lang="ko-KR" altLang="en-US" dirty="0"/>
-              <a:t> </a:t>
-            </a:r>
-            <a:r>
-              <a:rPr lang="ko-KR" altLang="en-US" dirty="0" smtClean="0"/>
-              <a:t>통신</a:t>
-            </a:r>
-            <a:endParaRPr lang="en-US" altLang="ko-KR" dirty="0" smtClean="0"/>
-          </a:p>
-          <a:p>
-            <a:pPr lvl="1"/>
-            <a:r>
-              <a:rPr lang="ko-KR" altLang="en-US" dirty="0"/>
-              <a:t>부모 프로세스가 파이프를 </a:t>
-            </a:r>
-            <a:r>
-              <a:rPr lang="ko-KR" altLang="en-US" dirty="0" smtClean="0"/>
-              <a:t>생성</a:t>
-            </a:r>
-            <a:endParaRPr lang="en-US" altLang="ko-KR" dirty="0" smtClean="0"/>
-          </a:p>
-          <a:p>
-            <a:pPr lvl="1"/>
-            <a:r>
-              <a:rPr lang="ko-KR" altLang="en-US" dirty="0" smtClean="0"/>
-              <a:t>자식</a:t>
-            </a:r>
-            <a:r>
-              <a:rPr lang="ko-KR" altLang="en-US" dirty="0"/>
-              <a:t> 프로세스에서 이를 통해 데이터를 읽거나 </a:t>
-            </a:r>
-            <a:r>
-              <a:rPr lang="ko-KR" altLang="en-US" dirty="0" smtClean="0"/>
-              <a:t>씀</a:t>
-            </a:r>
-            <a:endParaRPr lang="en-US" altLang="ko-KR" dirty="0" smtClean="0"/>
-          </a:p>
-          <a:p>
-            <a:r>
-              <a:rPr lang="ko-KR" altLang="en-US" b="1" dirty="0"/>
-              <a:t>파일 기반 </a:t>
-            </a:r>
-            <a:r>
-              <a:rPr lang="ko-KR" altLang="en-US" b="1" dirty="0" smtClean="0"/>
-              <a:t>통신</a:t>
+              <a:t> 통신</a:t>
             </a:r>
             <a:endParaRPr lang="en-US" altLang="ko-KR" b="1" dirty="0" smtClean="0"/>
           </a:p>
           <a:p>
-            <a:pPr lvl="1"/>
-            <a:r>
-              <a:rPr lang="ko-KR" altLang="en-US" dirty="0"/>
-              <a:t>파일처럼 </a:t>
-            </a:r>
-            <a:r>
-              <a:rPr lang="ko-KR" altLang="en-US" dirty="0" smtClean="0"/>
-              <a:t>취급</a:t>
-            </a:r>
-            <a:endParaRPr lang="en-US" altLang="ko-KR" dirty="0" smtClean="0"/>
-          </a:p>
-          <a:p>
-            <a:pPr lvl="2"/>
-            <a:r>
-              <a:rPr lang="ko-KR" altLang="ko-KR" dirty="0" err="1">
-                <a:latin typeface="Arial Unicode MS" panose="020B0604020202020204" pitchFamily="50" charset="-127"/>
+            <a:r>
+              <a:rPr lang="en-US" altLang="ko-KR" b="1" dirty="0">
+                <a:solidFill>
+                  <a:schemeClr val="tx1">
+                    <a:lumMod val="50000"/>
+                    <a:lumOff val="50000"/>
+                  </a:schemeClr>
+                </a:solidFill>
               </a:rPr>
-              <a:t>디스크립터</a:t>
-            </a:r>
-            <a:r>
-              <a:rPr lang="ko-KR" altLang="ko-KR" dirty="0">
-                <a:latin typeface="Arial Unicode MS" panose="020B0604020202020204" pitchFamily="50" charset="-127"/>
+              <a:t>RPC(Remote Procedure Call</a:t>
+            </a:r>
+            <a:r>
+              <a:rPr lang="en-US" altLang="ko-KR" b="1" dirty="0" smtClean="0">
+                <a:solidFill>
+                  <a:schemeClr val="tx1">
+                    <a:lumMod val="50000"/>
+                    <a:lumOff val="50000"/>
+                  </a:schemeClr>
+                </a:solidFill>
               </a:rPr>
-              <a:t>(File Descriptor)</a:t>
-            </a:r>
-            <a:r>
-              <a:rPr lang="ko-KR" altLang="ko-KR" dirty="0" err="1">
-                <a:latin typeface="Arial Unicode MS" panose="020B0604020202020204" pitchFamily="50" charset="-127"/>
+              <a:t>)</a:t>
+            </a:r>
+            <a:r>
+              <a:rPr lang="ko-KR" altLang="en-US" dirty="0">
+                <a:solidFill>
+                  <a:schemeClr val="tx1">
+                    <a:lumMod val="50000"/>
+                    <a:lumOff val="50000"/>
+                  </a:schemeClr>
+                </a:solidFill>
               </a:rPr>
-              <a:t>를</a:t>
-            </a:r>
-            <a:r>
-              <a:rPr lang="ko-KR" altLang="ko-KR" dirty="0">
-                <a:latin typeface="Arial Unicode MS" panose="020B0604020202020204" pitchFamily="50" charset="-127"/>
+              <a:t> 통신</a:t>
+            </a:r>
+            <a:endParaRPr lang="en-US" altLang="ko-KR" b="1" dirty="0" smtClean="0">
+              <a:solidFill>
+                <a:schemeClr val="tx1">
+                  <a:lumMod val="50000"/>
+                  <a:lumOff val="50000"/>
+                </a:schemeClr>
+              </a:solidFill>
+            </a:endParaRPr>
+          </a:p>
+          <a:p>
+            <a:r>
+              <a:rPr lang="ko-KR" altLang="en-US" b="1" dirty="0">
+                <a:solidFill>
+                  <a:schemeClr val="tx1">
+                    <a:lumMod val="50000"/>
+                    <a:lumOff val="50000"/>
+                  </a:schemeClr>
+                </a:solidFill>
               </a:rPr>
-              <a:t> 통해 열고 </a:t>
-            </a:r>
-            <a:r>
-              <a:rPr lang="ko-KR" altLang="en-US" dirty="0" smtClean="0">
-                <a:latin typeface="Arial Unicode MS" panose="020B0604020202020204" pitchFamily="50" charset="-127"/>
+              <a:t>파일</a:t>
+            </a:r>
+            <a:r>
+              <a:rPr lang="en-US" altLang="ko-KR" b="1" dirty="0">
+                <a:solidFill>
+                  <a:schemeClr val="tx1">
+                    <a:lumMod val="50000"/>
+                    <a:lumOff val="50000"/>
+                  </a:schemeClr>
+                </a:solidFill>
               </a:rPr>
-              <a:t>닫음</a:t>
-            </a:r>
-            <a:endParaRPr lang="en-US" altLang="ko-KR" dirty="0" smtClean="0">
-              <a:latin typeface="Arial Unicode MS" panose="020B0604020202020204" pitchFamily="50" charset="-127"/>
-            </a:endParaRPr>
-          </a:p>
-          <a:p>
-            <a:pPr lvl="2"/>
-            <a:r>
-              <a:rPr lang="ko-KR" altLang="ko-KR" dirty="0">
-                <a:latin typeface="Arial Unicode MS" panose="020B0604020202020204" pitchFamily="50" charset="-127"/>
+              <a:t>(Files</a:t>
+            </a:r>
+            <a:r>
+              <a:rPr lang="en-US" altLang="ko-KR" b="1" dirty="0" smtClean="0">
+                <a:solidFill>
+                  <a:schemeClr val="tx1">
+                    <a:lumMod val="50000"/>
+                    <a:lumOff val="50000"/>
+                  </a:schemeClr>
+                </a:solidFill>
               </a:rPr>
-              <a:t>파이프의 읽기 측과 쓰기 측 각각에 대한 파일 </a:t>
-            </a:r>
-            <a:r>
-              <a:rPr lang="ko-KR" altLang="ko-KR" dirty="0" err="1">
-                <a:latin typeface="Arial Unicode MS" panose="020B0604020202020204" pitchFamily="50" charset="-127"/>
+              <a:t>)</a:t>
+            </a:r>
+            <a:r>
+              <a:rPr lang="ko-KR" altLang="en-US" dirty="0">
+                <a:solidFill>
+                  <a:schemeClr val="tx1">
+                    <a:lumMod val="50000"/>
+                    <a:lumOff val="50000"/>
+                  </a:schemeClr>
+                </a:solidFill>
               </a:rPr>
-              <a:t>디스크립터가</a:t>
-            </a:r>
-            <a:r>
-              <a:rPr lang="ko-KR" altLang="ko-KR" dirty="0">
-                <a:latin typeface="Arial Unicode MS" panose="020B0604020202020204" pitchFamily="50" charset="-127"/>
-              </a:rPr>
-              <a:t> </a:t>
-            </a:r>
-            <a:r>
-              <a:rPr lang="ko-KR" altLang="ko-KR" dirty="0" smtClean="0">
-                <a:latin typeface="Arial Unicode MS" panose="020B0604020202020204" pitchFamily="50" charset="-127"/>
-              </a:rPr>
-              <a:t>필요</a:t>
-            </a:r>
-            <a:endParaRPr lang="en-US" altLang="ko-KR" dirty="0" smtClean="0">
-              <a:latin typeface="Arial Unicode MS" panose="020B0604020202020204" pitchFamily="50" charset="-127"/>
-            </a:endParaRPr>
-          </a:p>
-          <a:p>
-            <a:r>
-              <a:rPr lang="ko-KR" altLang="en-US" b="1" dirty="0"/>
-              <a:t>단순한 데이터 </a:t>
-            </a:r>
-            <a:r>
-              <a:rPr lang="ko-KR" altLang="en-US" b="1" dirty="0" smtClean="0"/>
-              <a:t>전달</a:t>
-            </a:r>
-            <a:endParaRPr lang="en-US" altLang="ko-KR" b="1" dirty="0" smtClean="0"/>
-          </a:p>
-          <a:p>
-            <a:pPr lvl="1"/>
-            <a:r>
-              <a:rPr lang="ko-KR" altLang="en-US" dirty="0"/>
-              <a:t>단순히 데이터를 전달하기 위한 용도</a:t>
+              <a:t> 통신</a:t>
             </a:r>
           </a:p>
         </p:txBody>
@@ -3365,7 +3348,7 @@
     </p:spTree>
     <p:extLst>
       <p:ext uri="{BB962C8B-B14F-4D97-AF65-F5344CB8AC3E}">
-        <p14:creationId xmlns:p14="http://schemas.microsoft.com/office/powerpoint/2010/main" val="804201425"/>
+        <p14:creationId xmlns:p14="http://schemas.microsoft.com/office/powerpoint/2010/main" val="513040891"/>
       </p:ext>
     </p:extLst>
   </p:cSld>
@@ -3413,7 +3396,11 @@
             </a:r>
             <a:r>
               <a:rPr lang="en-US" altLang="ko-KR" b="1" dirty="0"/>
-              <a:t>(Pipe)</a:t>
+              <a:t>(Pipe</a:t>
+            </a:r>
+            <a:r>
+              <a:rPr lang="en-US" altLang="ko-KR" b="1" dirty="0" smtClean="0"/>
+              <a:t>)</a:t>
             </a:r>
             <a:r>
               <a:rPr lang="en-US" altLang="ko-KR" dirty="0"/>
@@ -3438,12 +3425,93 @@
         </p:nvSpPr>
         <p:spPr/>
         <p:txBody>
-          <a:bodyPr/>
+          <a:bodyPr>
+            <a:normAutofit fontScale="92500" lnSpcReduction="10000"/>
+          </a:bodyPr>
           <a:lstStyle/>
           <a:p>
             <a:r>
+              <a:rPr lang="ko-KR" altLang="en-US" b="1" dirty="0" err="1"/>
+              <a:t>단방향</a:t>
+            </a:r>
+            <a:r>
+              <a:rPr lang="ko-KR" altLang="en-US" b="1" dirty="0"/>
+              <a:t> 통신</a:t>
+            </a:r>
+            <a:endParaRPr lang="en-US" altLang="ko-KR" dirty="0" smtClean="0"/>
+          </a:p>
+          <a:p>
+            <a:pPr lvl="1"/>
+            <a:r>
+              <a:rPr lang="ko-KR" altLang="en-US" dirty="0" smtClean="0"/>
+              <a:t>프로세스</a:t>
+            </a:r>
+            <a:r>
               <a:rPr lang="ko-KR" altLang="en-US" dirty="0"/>
-              <a:t>파이프 </a:t>
+              <a:t> 간에 </a:t>
+            </a:r>
+            <a:r>
+              <a:rPr lang="ko-KR" altLang="en-US" b="1" dirty="0" err="1"/>
+              <a:t>단방향</a:t>
+            </a:r>
+            <a:r>
+              <a:rPr lang="ko-KR" altLang="en-US" dirty="0" err="1"/>
+              <a:t>으로</a:t>
+            </a:r>
+            <a:r>
+              <a:rPr lang="ko-KR" altLang="en-US" dirty="0"/>
+              <a:t> 데이터를 </a:t>
+            </a:r>
+            <a:r>
+              <a:rPr lang="ko-KR" altLang="en-US" dirty="0" smtClean="0"/>
+              <a:t>전달</a:t>
+            </a:r>
+            <a:endParaRPr lang="en-US" altLang="ko-KR" dirty="0" smtClean="0"/>
+          </a:p>
+          <a:p>
+            <a:r>
+              <a:rPr lang="ko-KR" altLang="en-US" b="1" dirty="0" smtClean="0"/>
+              <a:t>부모</a:t>
+            </a:r>
+            <a:r>
+              <a:rPr lang="en-US" altLang="ko-KR" b="1" dirty="0"/>
+              <a:t>-</a:t>
+            </a:r>
+            <a:r>
+              <a:rPr lang="ko-KR" altLang="en-US" b="1" dirty="0"/>
+              <a:t>자식 프로세스 간 </a:t>
+            </a:r>
+            <a:r>
+              <a:rPr lang="ko-KR" altLang="en-US" b="1" dirty="0" smtClean="0"/>
+              <a:t>통신</a:t>
+            </a:r>
+            <a:endParaRPr lang="en-US" altLang="ko-KR" b="1" dirty="0"/>
+          </a:p>
+          <a:p>
+            <a:pPr lvl="1"/>
+            <a:r>
+              <a:rPr lang="ko-KR" altLang="en-US" dirty="0"/>
+              <a:t>운영체제에서 제공하는 특별한 파일 </a:t>
+            </a:r>
+            <a:r>
+              <a:rPr lang="ko-KR" altLang="en-US" dirty="0" smtClean="0"/>
+              <a:t>기반의</a:t>
+            </a:r>
+            <a:r>
+              <a:rPr lang="ko-KR" altLang="en-US" dirty="0"/>
+              <a:t> </a:t>
+            </a:r>
+            <a:r>
+              <a:rPr lang="ko-KR" altLang="en-US" dirty="0" smtClean="0"/>
+              <a:t>통신</a:t>
+            </a:r>
+            <a:endParaRPr lang="en-US" altLang="ko-KR" dirty="0" smtClean="0"/>
+          </a:p>
+          <a:p>
+            <a:pPr lvl="1"/>
+            <a:r>
+              <a:rPr lang="ko-KR" altLang="en-US" dirty="0"/>
+              <a:t>부모 프로세스가 파이프를 </a:t>
             </a:r>
             <a:r>
               <a:rPr lang="ko-KR" altLang="en-US" dirty="0" smtClean="0"/>
@@ -3454,146 +3522,91 @@
           <a:p>
             <a:pPr lvl="1"/>
             <a:r>
+              <a:rPr lang="ko-KR" altLang="en-US" dirty="0" smtClean="0"/>
+              <a:t>자식</a:t>
+            </a:r>
+            <a:r>
               <a:rPr lang="ko-KR" altLang="en-US" dirty="0"/>
-              <a:t>부모 프로세스는 운영체제에게 파이프를 생성하도록 </a:t>
+              <a:t> 프로세스에서 이를 통해 데이터를 읽거나 </a:t>
             </a:r>
             <a:r>
               <a:rPr lang="ko-KR" altLang="en-US" dirty="0" smtClean="0"/>
-              <a:t>요청</a:t>
+              <a:t>씀</a:t>
             </a:r>
             <a:endParaRPr lang="en-US" altLang="ko-KR" dirty="0" smtClean="0"/>
           </a:p>
           <a:p>
             <a:r>
+              <a:rPr lang="ko-KR" altLang="en-US" b="1" dirty="0"/>
+              <a:t>파일 기반 </a:t>
+            </a:r>
+            <a:r>
+              <a:rPr lang="ko-KR" altLang="en-US" b="1" dirty="0" smtClean="0"/>
+              <a:t>통신</a:t>
+            </a:r>
+            <a:endParaRPr lang="en-US" altLang="ko-KR" b="1" dirty="0" smtClean="0"/>
+          </a:p>
+          <a:p>
+            <a:pPr lvl="1"/>
+            <a:r>
               <a:rPr lang="ko-KR" altLang="en-US" dirty="0"/>
-              <a:t>데이터 </a:t>
+              <a:t>파일처럼 </a:t>
             </a:r>
             <a:r>
               <a:rPr lang="ko-KR" altLang="en-US" dirty="0" smtClean="0"/>
-              <a:t>쓰기</a:t>
+              <a:t>취급</a:t>
             </a:r>
             <a:endParaRPr lang="en-US" altLang="ko-KR" dirty="0" smtClean="0"/>
           </a:p>
           <a:p>
-            <a:pPr lvl="1"/>
+            <a:pPr lvl="2"/>
+            <a:r>
+              <a:rPr lang="ko-KR" altLang="ko-KR" dirty="0" err="1">
+                <a:latin typeface="Arial Unicode MS" panose="020B0604020202020204" pitchFamily="50" charset="-127"/>
+              </a:rPr>
+              <a:t>디스크립터</a:t>
+            </a:r>
             <a:r>
               <a:rPr lang="ko-KR" altLang="ko-KR" dirty="0">
                 <a:latin typeface="Arial Unicode MS" panose="020B0604020202020204" pitchFamily="50" charset="-127"/>
               </a:rPr>
-              <a:t>부모 프로세스는 생성된 파이프의 </a:t>
-            </a:r>
-            <a:r>
-              <a:rPr lang="ko-KR" altLang="ko-KR" dirty="0" smtClean="0">
+              <a:t>(File Descriptor)</a:t>
+            </a:r>
+            <a:r>
+              <a:rPr lang="ko-KR" altLang="ko-KR" dirty="0" err="1">
                 <a:latin typeface="Arial Unicode MS" panose="020B0604020202020204" pitchFamily="50" charset="-127"/>
               </a:rPr>
-              <a:t>쓰기</a:t>
-            </a:r>
-            <a:r>
-              <a:rPr lang="en-US" altLang="ko-KR" sz="1600" dirty="0" smtClean="0">
-                <a:latin typeface="Arial Unicode MS" panose="020B0604020202020204" pitchFamily="50" charset="-127"/>
-              </a:rPr>
-              <a:t>(</a:t>
-            </a:r>
-            <a:r>
-              <a:rPr lang="ko-KR" altLang="ko-KR" sz="1600" dirty="0" smtClean="0">
-                <a:latin typeface="Arial Unicode MS" panose="020B0604020202020204" pitchFamily="50" charset="-127"/>
-              </a:rPr>
-              <a:t>파일 </a:t>
-            </a:r>
-            <a:r>
-              <a:rPr lang="ko-KR" altLang="ko-KR" sz="1600" dirty="0" err="1" smtClean="0">
-                <a:latin typeface="Arial Unicode MS" panose="020B0604020202020204" pitchFamily="50" charset="-127"/>
-              </a:rPr>
-              <a:t>디스크립터</a:t>
-            </a:r>
-            <a:r>
-              <a:rPr lang="en-US" altLang="ko-KR" sz="1600" dirty="0" smtClean="0">
-                <a:latin typeface="Arial Unicode MS" panose="020B0604020202020204" pitchFamily="50" charset="-127"/>
-              </a:rPr>
-              <a:t>)</a:t>
-            </a:r>
-            <a:r>
-              <a:rPr lang="ko-KR" altLang="ko-KR" dirty="0" smtClean="0">
-                <a:latin typeface="Arial Unicode MS" panose="020B0604020202020204" pitchFamily="50" charset="-127"/>
-              </a:rPr>
-              <a:t>를 사용 </a:t>
+              <a:t>를</a:t>
             </a:r>
             <a:r>
               <a:rPr lang="ko-KR" altLang="ko-KR" dirty="0">
                 <a:latin typeface="Arial Unicode MS" panose="020B0604020202020204" pitchFamily="50" charset="-127"/>
               </a:rPr>
-              <a:t>데이터를 </a:t>
+              <a:t> 통해 열고 </a:t>
             </a:r>
             <a:r>
               <a:rPr lang="ko-KR" altLang="en-US" dirty="0" smtClean="0">
                 <a:latin typeface="Arial Unicode MS" panose="020B0604020202020204" pitchFamily="50" charset="-127"/>
               </a:rPr>
-              <a:t>씀</a:t>
+              <a:t>닫음</a:t>
             </a:r>
             <a:endParaRPr lang="en-US" altLang="ko-KR" dirty="0" smtClean="0">
               <a:latin typeface="Arial Unicode MS" panose="020B0604020202020204" pitchFamily="50" charset="-127"/>
             </a:endParaRPr>
           </a:p>
           <a:p>
-            <a:r>
-              <a:rPr lang="ko-KR" altLang="en-US" dirty="0"/>
-              <a:t>데이터 </a:t>
-            </a:r>
-            <a:r>
-              <a:rPr lang="ko-KR" altLang="en-US" dirty="0" smtClean="0"/>
-              <a:t>읽기</a:t>
-            </a:r>
-            <a:endParaRPr lang="en-US" altLang="ko-KR" dirty="0" smtClean="0"/>
-          </a:p>
-          <a:p>
-            <a:pPr lvl="1"/>
+            <a:pPr lvl="2"/>
             <a:r>
               <a:rPr lang="ko-KR" altLang="ko-KR" dirty="0">
                 <a:latin typeface="Arial Unicode MS" panose="020B0604020202020204" pitchFamily="50" charset="-127"/>
               </a:rPr>
-              <a:t>자식 프로세스는 생성된 파이프의 </a:t>
-            </a:r>
-            <a:r>
-              <a:rPr lang="ko-KR" altLang="ko-KR" dirty="0" smtClean="0">
+              <a:t>파이프의 읽기 측과 쓰기 측 각각에 대한 파일 </a:t>
+            </a:r>
+            <a:r>
+              <a:rPr lang="ko-KR" altLang="ko-KR" dirty="0" err="1">
                 <a:latin typeface="Arial Unicode MS" panose="020B0604020202020204" pitchFamily="50" charset="-127"/>
               </a:rPr>
-              <a:t>읽기</a:t>
-            </a:r>
-            <a:r>
-              <a:rPr lang="en-US" altLang="ko-KR" sz="1600" dirty="0" smtClean="0">
-                <a:latin typeface="Arial Unicode MS" panose="020B0604020202020204" pitchFamily="50" charset="-127"/>
-              </a:rPr>
-              <a:t>(</a:t>
-            </a:r>
-            <a:r>
-              <a:rPr lang="ko-KR" altLang="ko-KR" sz="1600" dirty="0" smtClean="0">
-                <a:latin typeface="Arial Unicode MS" panose="020B0604020202020204" pitchFamily="50" charset="-127"/>
-              </a:rPr>
-              <a:t>파일</a:t>
-            </a:r>
-            <a:r>
-              <a:rPr lang="ko-KR" altLang="ko-KR" sz="1600" dirty="0">
-                <a:latin typeface="Arial Unicode MS" panose="020B0604020202020204" pitchFamily="50" charset="-127"/>
-              </a:rPr>
-              <a:t> </a:t>
-            </a:r>
-            <a:r>
-              <a:rPr lang="ko-KR" altLang="ko-KR" sz="1600" dirty="0" err="1" smtClean="0">
-                <a:latin typeface="Arial Unicode MS" panose="020B0604020202020204" pitchFamily="50" charset="-127"/>
-              </a:rPr>
-              <a:t>디스크립터</a:t>
-            </a:r>
-            <a:r>
-              <a:rPr lang="en-US" altLang="ko-KR" sz="1600" dirty="0" smtClean="0">
-                <a:latin typeface="Arial Unicode MS" panose="020B0604020202020204" pitchFamily="50" charset="-127"/>
-              </a:rPr>
-              <a:t>)</a:t>
-            </a:r>
-            <a:r>
-              <a:rPr lang="ko-KR" altLang="ko-KR" dirty="0" smtClean="0">
-                <a:latin typeface="Arial Unicode MS" panose="020B0604020202020204" pitchFamily="50" charset="-127"/>
-              </a:rPr>
-              <a:t>를</a:t>
+              <a:t>디스크립터가</a:t>
             </a:r>
             <a:r>
               <a:rPr lang="ko-KR" altLang="ko-KR" dirty="0">
@@ -3605,52 +3618,36 @@
               <a:rPr lang="ko-KR" altLang="ko-KR" dirty="0" smtClean="0">
                 <a:latin typeface="Arial Unicode MS" panose="020B0604020202020204" pitchFamily="50" charset="-127"/>
               </a:rPr>
-              <a:t>사용</a:t>
-            </a:r>
-            <a:r>
-              <a:rPr lang="ko-KR" altLang="ko-KR" dirty="0">
-                <a:latin typeface="Arial Unicode MS" panose="020B0604020202020204" pitchFamily="50" charset="-127"/>
-              </a:rPr>
-              <a:t> </a:t>
+              <a:t>필요</a:t>
             </a:r>
             <a:endParaRPr lang="en-US" altLang="ko-KR" dirty="0" smtClean="0">
               <a:latin typeface="Arial Unicode MS" panose="020B0604020202020204" pitchFamily="50" charset="-127"/>
             </a:endParaRPr>
           </a:p>
           <a:p>
+            <a:r>
+              <a:rPr lang="ko-KR" altLang="en-US" b="1" dirty="0"/>
+              <a:t>단순한 데이터 </a:t>
+            </a:r>
+            <a:r>
+              <a:rPr lang="ko-KR" altLang="en-US" b="1" dirty="0" smtClean="0"/>
+              <a:t>전달</a:t>
+            </a:r>
+            <a:endParaRPr lang="en-US" altLang="ko-KR" b="1" dirty="0" smtClean="0"/>
+          </a:p>
+          <a:p>
             <a:pPr lvl="1"/>
             <a:r>
-              <a:rPr lang="ko-KR" altLang="ko-KR" dirty="0" smtClean="0">
-                <a:latin typeface="Arial Unicode MS" panose="020B0604020202020204" pitchFamily="50" charset="-127"/>
-              </a:rPr>
-              <a:t>부모</a:t>
-            </a:r>
-            <a:r>
-              <a:rPr lang="ko-KR" altLang="ko-KR" dirty="0">
-                <a:latin typeface="Arial Unicode MS" panose="020B0604020202020204" pitchFamily="50" charset="-127"/>
-              </a:rPr>
-              <a:t> 프로세스가 보낸 데이터를 </a:t>
-            </a:r>
-            <a:r>
-              <a:rPr lang="ko-KR" altLang="ko-KR" dirty="0" smtClean="0">
-                <a:latin typeface="Arial Unicode MS" panose="020B0604020202020204" pitchFamily="50" charset="-127"/>
-              </a:rPr>
-              <a:t>읽</a:t>
-            </a:r>
-            <a:r>
-              <a:rPr lang="ko-KR" altLang="en-US" dirty="0" smtClean="0">
-                <a:latin typeface="Arial Unicode MS" panose="020B0604020202020204" pitchFamily="50" charset="-127"/>
-              </a:rPr>
-              <a:t>음</a:t>
-            </a:r>
-            <a:endParaRPr lang="ko-KR" altLang="en-US" dirty="0"/>
+              <a:rPr lang="ko-KR" altLang="en-US" dirty="0"/>
+              <a:t>단순히 데이터를 전달하기 위한 용도</a:t>
+            </a:r>
           </a:p>
         </p:txBody>
       </p:sp>
     </p:spTree>
     <p:extLst>
       <p:ext uri="{BB962C8B-B14F-4D97-AF65-F5344CB8AC3E}">
-        <p14:creationId xmlns:p14="http://schemas.microsoft.com/office/powerpoint/2010/main" val="507290081"/>
+        <p14:creationId xmlns:p14="http://schemas.microsoft.com/office/powerpoint/2010/main" val="804201425"/>
       </p:ext>
     </p:extLst>
   </p:cSld>
@@ -3694,6 +3691,291 @@
           <a:p>
             <a:r>
               <a:rPr lang="ko-KR" altLang="en-US" b="1" dirty="0"/>
+              <a:t>파이프</a:t>
+            </a:r>
+            <a:r>
+              <a:rPr lang="en-US" altLang="ko-KR" b="1" dirty="0"/>
+              <a:t>(Pipe)</a:t>
+            </a:r>
+            <a:r>
+              <a:rPr lang="en-US" altLang="ko-KR" dirty="0"/>
+              <a:t> </a:t>
+            </a:r>
+            <a:r>
+              <a:rPr lang="ko-KR" altLang="en-US" dirty="0"/>
+              <a:t>통신</a:t>
+            </a:r>
+          </a:p>
+        </p:txBody>
+      </p:sp>
+      <p:sp>
+        <p:nvSpPr>
+          <p:cNvPr id="3" name="내용 개체 틀 2"/>
+          <p:cNvSpPr>
+            <a:spLocks noGrp="1"/>
+          </p:cNvSpPr>
+          <p:nvPr>
+            <p:ph idx="1"/>
+          </p:nvPr>
+        </p:nvSpPr>
+        <p:spPr/>
+        <p:txBody>
+          <a:bodyPr/>
+          <a:lstStyle/>
+          <a:p>
+            <a:r>
+              <a:rPr lang="ko-KR" altLang="en-US" dirty="0"/>
+              <a:t>파이프 </a:t>
+            </a:r>
+            <a:r>
+              <a:rPr lang="ko-KR" altLang="en-US" dirty="0" smtClean="0"/>
+              <a:t>생성</a:t>
+            </a:r>
+            <a:endParaRPr lang="en-US" altLang="ko-KR" dirty="0" smtClean="0"/>
+          </a:p>
+          <a:p>
+            <a:pPr lvl="1"/>
+            <a:r>
+              <a:rPr lang="ko-KR" altLang="en-US" dirty="0"/>
+              <a:t>부모 프로세스는 운영체제에게 파이프를 생성하도록 </a:t>
+            </a:r>
+            <a:r>
+              <a:rPr lang="ko-KR" altLang="en-US" dirty="0" smtClean="0"/>
+              <a:t>요청</a:t>
+            </a:r>
+            <a:endParaRPr lang="en-US" altLang="ko-KR" dirty="0" smtClean="0"/>
+          </a:p>
+          <a:p>
+            <a:r>
+              <a:rPr lang="ko-KR" altLang="en-US" dirty="0"/>
+              <a:t>데이터 </a:t>
+            </a:r>
+            <a:r>
+              <a:rPr lang="ko-KR" altLang="en-US" dirty="0" smtClean="0"/>
+              <a:t>쓰기</a:t>
+            </a:r>
+            <a:endParaRPr lang="en-US" altLang="ko-KR" dirty="0" smtClean="0"/>
+          </a:p>
+          <a:p>
+            <a:pPr lvl="1"/>
+            <a:r>
+              <a:rPr lang="ko-KR" altLang="ko-KR" dirty="0">
+                <a:latin typeface="Arial Unicode MS" panose="020B0604020202020204" pitchFamily="50" charset="-127"/>
+              </a:rPr>
+              <a:t>부모 프로세스는 생성된 파이프의 </a:t>
+            </a:r>
+            <a:r>
+              <a:rPr lang="ko-KR" altLang="ko-KR" dirty="0" smtClean="0">
+                <a:latin typeface="Arial Unicode MS" panose="020B0604020202020204" pitchFamily="50" charset="-127"/>
+              </a:rPr>
+              <a:t>쓰기</a:t>
+            </a:r>
+            <a:r>
+              <a:rPr lang="en-US" altLang="ko-KR" sz="1600" dirty="0" smtClean="0">
+                <a:latin typeface="Arial Unicode MS" panose="020B0604020202020204" pitchFamily="50" charset="-127"/>
+              </a:rPr>
+              <a:t>(</a:t>
+            </a:r>
+            <a:r>
+              <a:rPr lang="ko-KR" altLang="ko-KR" sz="1600" dirty="0" smtClean="0">
+                <a:latin typeface="Arial Unicode MS" panose="020B0604020202020204" pitchFamily="50" charset="-127"/>
+              </a:rPr>
+              <a:t>파일 </a:t>
+            </a:r>
+            <a:r>
+              <a:rPr lang="ko-KR" altLang="ko-KR" sz="1600" dirty="0" err="1" smtClean="0">
+                <a:latin typeface="Arial Unicode MS" panose="020B0604020202020204" pitchFamily="50" charset="-127"/>
+              </a:rPr>
+              <a:t>디스크립터</a:t>
+            </a:r>
+            <a:r>
+              <a:rPr lang="en-US" altLang="ko-KR" sz="1600" dirty="0" smtClean="0">
+                <a:latin typeface="Arial Unicode MS" panose="020B0604020202020204" pitchFamily="50" charset="-127"/>
+              </a:rPr>
+              <a:t>)</a:t>
+            </a:r>
+            <a:r>
+              <a:rPr lang="ko-KR" altLang="ko-KR" dirty="0" smtClean="0">
+                <a:latin typeface="Arial Unicode MS" panose="020B0604020202020204" pitchFamily="50" charset="-127"/>
+              </a:rPr>
+              <a:t>를 사용 </a:t>
+            </a:r>
+            <a:r>
+              <a:rPr lang="ko-KR" altLang="ko-KR" dirty="0">
+                <a:latin typeface="Arial Unicode MS" panose="020B0604020202020204" pitchFamily="50" charset="-127"/>
+              </a:rPr>
+              <a:t>데이터를 </a:t>
+            </a:r>
+            <a:r>
+              <a:rPr lang="ko-KR" altLang="en-US" dirty="0" smtClean="0">
+                <a:latin typeface="Arial Unicode MS" panose="020B0604020202020204" pitchFamily="50" charset="-127"/>
+              </a:rPr>
+              <a:t>씀</a:t>
+            </a:r>
+            <a:endParaRPr lang="en-US" altLang="ko-KR" dirty="0" smtClean="0">
+              <a:latin typeface="Arial Unicode MS" panose="020B0604020202020204" pitchFamily="50" charset="-127"/>
+            </a:endParaRPr>
+          </a:p>
+          <a:p>
+            <a:r>
+              <a:rPr lang="ko-KR" altLang="en-US" dirty="0"/>
+              <a:t>데이터 </a:t>
+            </a:r>
+            <a:r>
+              <a:rPr lang="ko-KR" altLang="en-US" dirty="0" smtClean="0"/>
+              <a:t>읽기</a:t>
+            </a:r>
+            <a:endParaRPr lang="en-US" altLang="ko-KR" dirty="0" smtClean="0"/>
+          </a:p>
+          <a:p>
+            <a:pPr lvl="1"/>
+            <a:r>
+              <a:rPr lang="ko-KR" altLang="ko-KR" dirty="0">
+                <a:latin typeface="Arial Unicode MS" panose="020B0604020202020204" pitchFamily="50" charset="-127"/>
+              </a:rPr>
+              <a:t>자식 프로세스는 생성된 파이프의 </a:t>
+            </a:r>
+            <a:r>
+              <a:rPr lang="ko-KR" altLang="ko-KR" dirty="0" smtClean="0">
+                <a:latin typeface="Arial Unicode MS" panose="020B0604020202020204" pitchFamily="50" charset="-127"/>
+              </a:rPr>
+              <a:t>읽기</a:t>
+            </a:r>
+            <a:r>
+              <a:rPr lang="en-US" altLang="ko-KR" sz="1600" dirty="0" smtClean="0">
+                <a:latin typeface="Arial Unicode MS" panose="020B0604020202020204" pitchFamily="50" charset="-127"/>
+              </a:rPr>
+              <a:t>(</a:t>
+            </a:r>
+            <a:r>
+              <a:rPr lang="ko-KR" altLang="ko-KR" sz="1600" dirty="0" smtClean="0">
+                <a:latin typeface="Arial Unicode MS" panose="020B0604020202020204" pitchFamily="50" charset="-127"/>
+              </a:rPr>
+              <a:t>파일</a:t>
+            </a:r>
+            <a:r>
+              <a:rPr lang="ko-KR" altLang="ko-KR" sz="1600" dirty="0">
+                <a:latin typeface="Arial Unicode MS" panose="020B0604020202020204" pitchFamily="50" charset="-127"/>
+              </a:rPr>
+              <a:t> </a:t>
+            </a:r>
+            <a:r>
+              <a:rPr lang="ko-KR" altLang="ko-KR" sz="1600" dirty="0" err="1" smtClean="0">
+                <a:latin typeface="Arial Unicode MS" panose="020B0604020202020204" pitchFamily="50" charset="-127"/>
+              </a:rPr>
+              <a:t>디스크립터</a:t>
+            </a:r>
+            <a:r>
+              <a:rPr lang="en-US" altLang="ko-KR" sz="1600" dirty="0" smtClean="0">
+                <a:latin typeface="Arial Unicode MS" panose="020B0604020202020204" pitchFamily="50" charset="-127"/>
+              </a:rPr>
+              <a:t>)</a:t>
+            </a:r>
+            <a:r>
+              <a:rPr lang="ko-KR" altLang="ko-KR" dirty="0" smtClean="0">
+                <a:latin typeface="Arial Unicode MS" panose="020B0604020202020204" pitchFamily="50" charset="-127"/>
+              </a:rPr>
+              <a:t>를</a:t>
+            </a:r>
+            <a:r>
+              <a:rPr lang="ko-KR" altLang="ko-KR" dirty="0">
+                <a:latin typeface="Arial Unicode MS" panose="020B0604020202020204" pitchFamily="50" charset="-127"/>
+              </a:rPr>
+              <a:t> </a:t>
+            </a:r>
+            <a:r>
+              <a:rPr lang="ko-KR" altLang="ko-KR" dirty="0" smtClean="0">
+                <a:latin typeface="Arial Unicode MS" panose="020B0604020202020204" pitchFamily="50" charset="-127"/>
+              </a:rPr>
+              <a:t>사용</a:t>
+            </a:r>
+            <a:r>
+              <a:rPr lang="ko-KR" altLang="ko-KR" dirty="0">
+                <a:latin typeface="Arial Unicode MS" panose="020B0604020202020204" pitchFamily="50" charset="-127"/>
+              </a:rPr>
+              <a:t> </a:t>
+            </a:r>
+            <a:endParaRPr lang="en-US" altLang="ko-KR" dirty="0" smtClean="0">
+              <a:latin typeface="Arial Unicode MS" panose="020B0604020202020204" pitchFamily="50" charset="-127"/>
+            </a:endParaRPr>
+          </a:p>
+          <a:p>
+            <a:pPr lvl="1"/>
+            <a:r>
+              <a:rPr lang="ko-KR" altLang="ko-KR" dirty="0" smtClean="0">
+                <a:latin typeface="Arial Unicode MS" panose="020B0604020202020204" pitchFamily="50" charset="-127"/>
+              </a:rPr>
+              <a:t>부모</a:t>
+            </a:r>
+            <a:r>
+              <a:rPr lang="ko-KR" altLang="ko-KR" dirty="0">
+                <a:latin typeface="Arial Unicode MS" panose="020B0604020202020204" pitchFamily="50" charset="-127"/>
+              </a:rPr>
+              <a:t> 프로세스가 보낸 데이터를 </a:t>
+            </a:r>
+            <a:r>
+              <a:rPr lang="ko-KR" altLang="ko-KR" dirty="0" smtClean="0">
+                <a:latin typeface="Arial Unicode MS" panose="020B0604020202020204" pitchFamily="50" charset="-127"/>
+              </a:rPr>
+              <a:t>읽</a:t>
+            </a:r>
+            <a:r>
+              <a:rPr lang="ko-KR" altLang="en-US" dirty="0" smtClean="0">
+                <a:latin typeface="Arial Unicode MS" panose="020B0604020202020204" pitchFamily="50" charset="-127"/>
+              </a:rPr>
+              <a:t>음</a:t>
+            </a:r>
+            <a:endParaRPr lang="ko-KR" altLang="en-US" dirty="0"/>
+          </a:p>
+        </p:txBody>
+      </p:sp>
+    </p:spTree>
+    <p:extLst>
+      <p:ext uri="{BB962C8B-B14F-4D97-AF65-F5344CB8AC3E}">
+        <p14:creationId xmlns:p14="http://schemas.microsoft.com/office/powerpoint/2010/main" val="507290081"/>
+      </p:ext>
+    </p:extLst>
+  </p:cSld>
+  <p:clrMapOvr>
+    <a:masterClrMapping/>
+  </p:clrMapOvr>
+</p:sld>
+</file>
+
+<file path=ppt/slides/slide13.xml><?xml version="1.0" encoding="utf-8"?>
+<p:sld xmlns:a="http://schemas.openxmlformats.org/drawingml/2006/main" xmlns:r="http://schemas.openxmlformats.org/officeDocument/2006/relationships" xmlns:p="http://schemas.openxmlformats.org/presentationml/2006/main">
+  <p:cSld>
+    <p:spTree>
+      <p:nvGrpSpPr>
+        <p:cNvPr id="1" name=""/>
+        <p:cNvGrpSpPr/>
+        <p:nvPr/>
+      </p:nvGrpSpPr>
+      <p:grpSpPr>
+        <a:xfrm>
+          <a:off x="0" y="0"/>
+          <a:ext cx="0" cy="0"/>
+          <a:chOff x="0" y="0"/>
+          <a:chExt cx="0" cy="0"/>
+        </a:xfrm>
+      </p:grpSpPr>
+      <p:sp>
+        <p:nvSpPr>
+          <p:cNvPr id="2" name="제목 1"/>
+          <p:cNvSpPr>
+            <a:spLocks noGrp="1"/>
+          </p:cNvSpPr>
+          <p:nvPr>
+            <p:ph type="title"/>
+          </p:nvPr>
+        </p:nvSpPr>
+        <p:spPr/>
+        <p:txBody>
+          <a:bodyPr/>
+          <a:lstStyle/>
+          <a:p>
+            <a:r>
+              <a:rPr lang="ko-KR" altLang="en-US" b="1" dirty="0"/>
               <a:t>메시지 큐</a:t>
             </a:r>
             <a:r>
@@ -3920,7 +4202,7 @@
 </p:sld>
 </file>
 
-<file path=ppt/slides/slide13.xml><?xml version="1.0" encoding="utf-8"?>
+<file path=ppt/slides/slide14.xml><?xml version="1.0" encoding="utf-8"?>
 <p:sld xmlns:a="http://schemas.openxmlformats.org/drawingml/2006/main" xmlns:r="http://schemas.openxmlformats.org/officeDocument/2006/relationships" xmlns:p="http://schemas.openxmlformats.org/presentationml/2006/main">
   <p:cSld>
     <p:spTree>
@@ -4150,7 +4432,7 @@
 </p:sld>
 </file>
 
-<file path=ppt/slides/slide14.xml><?xml version="1.0" encoding="utf-8"?>
+<file path=ppt/slides/slide15.xml><?xml version="1.0" encoding="utf-8"?>
 <p:sld xmlns:a="http://schemas.openxmlformats.org/drawingml/2006/main" xmlns:r="http://schemas.openxmlformats.org/officeDocument/2006/relationships" xmlns:p="http://schemas.openxmlformats.org/presentationml/2006/main">
   <p:cSld>
     <p:spTree>
@@ -4422,107 +4704,6 @@
 </p:sld>
 </file>
 
-<file path=ppt/slides/slide15.xml><?xml version="1.0" encoding="utf-8"?>
-<p:sld xmlns:a="http://schemas.openxmlformats.org/drawingml/2006/main" xmlns:r="http://schemas.openxmlformats.org/officeDocument/2006/relationships" xmlns:p="http://schemas.openxmlformats.org/presentationml/2006/main">
-  <p:cSld>
-    <p:spTree>
-      <p:nvGrpSpPr>
-        <p:cNvPr id="1" name=""/>
-        <p:cNvGrpSpPr/>
-        <p:nvPr/>
-      </p:nvGrpSpPr>
-      <p:grpSpPr>
-        <a:xfrm>
-          <a:off x="0" y="0"/>
-          <a:ext cx="0" cy="0"/>
-          <a:chOff x="0" y="0"/>
-          <a:chExt cx="0" cy="0"/>
-        </a:xfrm>
-      </p:grpSpPr>
-      <p:sp>
-        <p:nvSpPr>
-          <p:cNvPr id="2" name="제목 1"/>
-          <p:cNvSpPr>
-            <a:spLocks noGrp="1"/>
-          </p:cNvSpPr>
-          <p:nvPr>
-            <p:ph type="title"/>
-          </p:nvPr>
-        </p:nvSpPr>
-        <p:spPr/>
-        <p:txBody>
-          <a:bodyPr/>
-          <a:lstStyle/>
-          <a:p>
-            <a:r>
-              <a:rPr lang="en-US" altLang="ko-KR" b="1" dirty="0">
-                <a:solidFill>
-                  <a:schemeClr val="tx1">
-                    <a:lumMod val="50000"/>
-                    <a:lumOff val="50000"/>
-                  </a:schemeClr>
-                </a:solidFill>
-              </a:rPr>
-              <a:t>RPC(Remote Procedure Call)</a:t>
-            </a:r>
-            <a:r>
-              <a:rPr lang="ko-KR" altLang="en-US" dirty="0">
-                <a:solidFill>
-                  <a:schemeClr val="tx1">
-                    <a:lumMod val="50000"/>
-                    <a:lumOff val="50000"/>
-                  </a:schemeClr>
-                </a:solidFill>
-              </a:rPr>
-              <a:t> </a:t>
-            </a:r>
-            <a:r>
-              <a:rPr lang="ko-KR" altLang="en-US" dirty="0" smtClean="0">
-                <a:solidFill>
-                  <a:schemeClr val="tx1">
-                    <a:lumMod val="50000"/>
-                    <a:lumOff val="50000"/>
-                  </a:schemeClr>
-                </a:solidFill>
-              </a:rPr>
-              <a:t>통신</a:t>
-            </a:r>
-            <a:endParaRPr lang="ko-KR" altLang="en-US" dirty="0"/>
-          </a:p>
-        </p:txBody>
-      </p:sp>
-      <p:sp>
-        <p:nvSpPr>
-          <p:cNvPr id="3" name="내용 개체 틀 2"/>
-          <p:cNvSpPr>
-            <a:spLocks noGrp="1"/>
-          </p:cNvSpPr>
-          <p:nvPr>
-            <p:ph idx="1"/>
-          </p:nvPr>
-        </p:nvSpPr>
-        <p:spPr/>
-        <p:txBody>
-          <a:bodyPr/>
-          <a:lstStyle/>
-          <a:p>
-            <a:endParaRPr lang="ko-KR" altLang="en-US"/>
-          </a:p>
-        </p:txBody>
-      </p:sp>
-    </p:spTree>
-    <p:extLst>
-      <p:ext uri="{BB962C8B-B14F-4D97-AF65-F5344CB8AC3E}">
-        <p14:creationId xmlns:p14="http://schemas.microsoft.com/office/powerpoint/2010/main" val="3611476118"/>
-      </p:ext>
-    </p:extLst>
-  </p:cSld>
-  <p:clrMapOvr>
-    <a:masterClrMapping/>
-  </p:clrMapOvr>
-</p:sld>
-</file>
-
 <file path=ppt/slides/slide16.xml><?xml version="1.0" encoding="utf-8"?>
 <p:sld xmlns:a="http://schemas.openxmlformats.org/drawingml/2006/main" xmlns:r="http://schemas.openxmlformats.org/officeDocument/2006/relationships" xmlns:p="http://schemas.openxmlformats.org/presentationml/2006/main">
   <p:cSld>
@@ -4556,17 +4737,6 @@
           <a:lstStyle/>
           <a:p>
             <a:r>
-              <a:rPr lang="ko-KR" altLang="en-US" b="1" dirty="0">
-                <a:solidFill>
-                  <a:schemeClr val="tx1">
-                    <a:lumMod val="50000"/>
-                    <a:lumOff val="50000"/>
-                  </a:schemeClr>
-                </a:solidFill>
-              </a:rPr>
-              <a:t>파일</a:t>
-            </a:r>
-            <a:r>
               <a:rPr lang="en-US" altLang="ko-KR" b="1" dirty="0">
                 <a:solidFill>
                   <a:schemeClr val="tx1">
@@ -4575,7 +4745,7 @@
                   </a:schemeClr>
                 </a:solidFill>
               </a:rPr>
-              <a:t>(Files)</a:t>
+              <a:t>RPC(Remote Procedure Call)</a:t>
             </a:r>
             <a:r>
               <a:rPr lang="ko-KR" altLang="en-US" dirty="0">
@@ -4625,7 +4795,7 @@
     </p:spTree>
     <p:extLst>
       <p:ext uri="{BB962C8B-B14F-4D97-AF65-F5344CB8AC3E}">
-        <p14:creationId xmlns:p14="http://schemas.microsoft.com/office/powerpoint/2010/main" val="970547482"/>
+        <p14:creationId xmlns:p14="http://schemas.microsoft.com/office/powerpoint/2010/main" val="3611476118"/>
       </p:ext>
     </p:extLst>
   </p:cSld>
@@ -4668,12 +4838,48 @@
           <a:lstStyle/>
           <a:p>
             <a:r>
-              <a:rPr lang="en-US" altLang="ko-KR" dirty="0" smtClean="0"/>
-              <a:t>RMS </a:t>
-            </a:r>
-            <a:r>
-              <a:rPr lang="ko-KR" altLang="en-US" dirty="0" smtClean="0"/>
-              <a:t>통신 방식</a:t>
+              <a:rPr lang="ko-KR" altLang="en-US" b="1" dirty="0">
+                <a:solidFill>
+                  <a:schemeClr val="tx1">
+                    <a:lumMod val="50000"/>
+                    <a:lumOff val="50000"/>
+                  </a:schemeClr>
+                </a:solidFill>
+              </a:rPr>
+              <a:t>파일</a:t>
+            </a:r>
+            <a:r>
+              <a:rPr lang="en-US" altLang="ko-KR" b="1" dirty="0">
+                <a:solidFill>
+                  <a:schemeClr val="tx1">
+                    <a:lumMod val="50000"/>
+                    <a:lumOff val="50000"/>
+                  </a:schemeClr>
+                </a:solidFill>
+              </a:rPr>
+              <a:t>(Files)</a:t>
+            </a:r>
+            <a:r>
+              <a:rPr lang="ko-KR" altLang="en-US" dirty="0">
+                <a:solidFill>
+                  <a:schemeClr val="tx1">
+                    <a:lumMod val="50000"/>
+                    <a:lumOff val="50000"/>
+                  </a:schemeClr>
+                </a:solidFill>
+              </a:rPr>
+              <a:t> </a:t>
+            </a:r>
+            <a:r>
+              <a:rPr lang="ko-KR" altLang="en-US" dirty="0" smtClean="0">
+                <a:solidFill>
+                  <a:schemeClr val="tx1">
+                    <a:lumMod val="50000"/>
+                    <a:lumOff val="50000"/>
+                  </a:schemeClr>
+                </a:solidFill>
+              </a:rPr>
+              <a:t>통신</a:t>
             </a:r>
             <a:endParaRPr lang="ko-KR" altLang="en-US" dirty="0"/>
           </a:p>
@@ -4694,6 +4900,82 @@
           <a:bodyPr/>
           <a:lstStyle/>
           <a:p>
+            <a:endParaRPr lang="ko-KR" altLang="en-US"/>
+          </a:p>
+        </p:txBody>
+      </p:sp>
+    </p:spTree>
+    <p:extLst>
+      <p:ext uri="{BB962C8B-B14F-4D97-AF65-F5344CB8AC3E}">
+        <p14:creationId xmlns:p14="http://schemas.microsoft.com/office/powerpoint/2010/main" val="970547482"/>
+      </p:ext>
+    </p:extLst>
+  </p:cSld>
+  <p:clrMapOvr>
+    <a:masterClrMapping/>
+  </p:clrMapOvr>
+</p:sld>
+</file>
+
+<file path=ppt/slides/slide18.xml><?xml version="1.0" encoding="utf-8"?>
+<p:sld xmlns:a="http://schemas.openxmlformats.org/drawingml/2006/main" xmlns:r="http://schemas.openxmlformats.org/officeDocument/2006/relationships" xmlns:p="http://schemas.openxmlformats.org/presentationml/2006/main">
+  <p:cSld>
+    <p:spTree>
+      <p:nvGrpSpPr>
+        <p:cNvPr id="1" name=""/>
+        <p:cNvGrpSpPr/>
+        <p:nvPr/>
+      </p:nvGrpSpPr>
+      <p:grpSpPr>
+        <a:xfrm>
+          <a:off x="0" y="0"/>
+          <a:ext cx="0" cy="0"/>
+          <a:chOff x="0" y="0"/>
+          <a:chExt cx="0" cy="0"/>
+        </a:xfrm>
+      </p:grpSpPr>
+      <p:sp>
+        <p:nvSpPr>
+          <p:cNvPr id="2" name="제목 1"/>
+          <p:cNvSpPr>
+            <a:spLocks noGrp="1"/>
+          </p:cNvSpPr>
+          <p:nvPr>
+            <p:ph type="title"/>
+          </p:nvPr>
+        </p:nvSpPr>
+        <p:spPr/>
+        <p:txBody>
+          <a:bodyPr/>
+          <a:lstStyle/>
+          <a:p>
+            <a:r>
+              <a:rPr lang="en-US" altLang="ko-KR" dirty="0" smtClean="0"/>
+              <a:t>RMS </a:t>
+            </a:r>
+            <a:r>
+              <a:rPr lang="ko-KR" altLang="en-US" dirty="0" smtClean="0"/>
+              <a:t>통신 방식</a:t>
+            </a:r>
+            <a:endParaRPr lang="ko-KR" altLang="en-US" dirty="0"/>
+          </a:p>
+        </p:txBody>
+      </p:sp>
+      <p:sp>
+        <p:nvSpPr>
+          <p:cNvPr id="3" name="내용 개체 틀 2"/>
+          <p:cNvSpPr>
+            <a:spLocks noGrp="1"/>
+          </p:cNvSpPr>
+          <p:nvPr>
+            <p:ph idx="1"/>
+          </p:nvPr>
+        </p:nvSpPr>
+        <p:spPr/>
+        <p:txBody>
+          <a:bodyPr/>
+          <a:lstStyle/>
+          <a:p>
             <a:pPr>
               <a:lnSpc>
                 <a:spcPct val="130000"/>
@@ -4779,7 +5061,7 @@
           <p:cNvPr id="4" name="그룹 3">
             <a:extLst>
               <a:ext uri="{FF2B5EF4-FFF2-40B4-BE49-F238E27FC236}">
-                <a16:creationId xmlns="" xmlns:a16="http://schemas.microsoft.com/office/drawing/2014/main" id="{2A1361DC-7140-4F25-8037-B69D38D40179}"/>
+                <a16:creationId xmlns:a16="http://schemas.microsoft.com/office/drawing/2014/main" xmlns="" id="{2A1361DC-7140-4F25-8037-B69D38D40179}"/>
               </a:ext>
             </a:extLst>
           </p:cNvPr>
@@ -4799,7 +5081,7 @@
             <p:cNvPr id="5" name="직선 연결선 4">
               <a:extLst>
                 <a:ext uri="{FF2B5EF4-FFF2-40B4-BE49-F238E27FC236}">
-                  <a16:creationId xmlns="" xmlns:a16="http://schemas.microsoft.com/office/drawing/2014/main" id="{0ADD0CCB-AD38-4767-9FE1-1EC71E65D9AB}"/>
+                  <a16:creationId xmlns:a16="http://schemas.microsoft.com/office/drawing/2014/main" xmlns="" id="{0ADD0CCB-AD38-4767-9FE1-1EC71E65D9AB}"/>
                 </a:ext>
               </a:extLst>
             </p:cNvPr>
@@ -4840,7 +5122,7 @@
             <p:cNvPr id="6" name="직선 연결선 5">
               <a:extLst>
                 <a:ext uri="{FF2B5EF4-FFF2-40B4-BE49-F238E27FC236}">
-                  <a16:creationId xmlns="" xmlns:a16="http://schemas.microsoft.com/office/drawing/2014/main" id="{DB2821D4-6880-4BAB-85E6-3BC52E9CDC97}"/>
+                  <a16:creationId xmlns:a16="http://schemas.microsoft.com/office/drawing/2014/main" xmlns="" id="{DB2821D4-6880-4BAB-85E6-3BC52E9CDC97}"/>
                 </a:ext>
               </a:extLst>
             </p:cNvPr>
@@ -4881,7 +5163,7 @@
             <p:cNvPr id="7" name="직선 연결선 6">
               <a:extLst>
                 <a:ext uri="{FF2B5EF4-FFF2-40B4-BE49-F238E27FC236}">
-                  <a16:creationId xmlns="" xmlns:a16="http://schemas.microsoft.com/office/drawing/2014/main" id="{2EA9CB77-521C-4C64-80FF-5DE592052AED}"/>
+                  <a16:creationId xmlns:a16="http://schemas.microsoft.com/office/drawing/2014/main" xmlns="" id="{2EA9CB77-521C-4C64-80FF-5DE592052AED}"/>
                 </a:ext>
               </a:extLst>
             </p:cNvPr>
@@ -4923,7 +5205,7 @@
             <p:cNvPr id="8" name="직사각형 7">
               <a:extLst>
                 <a:ext uri="{FF2B5EF4-FFF2-40B4-BE49-F238E27FC236}">
-                  <a16:creationId xmlns="" xmlns:a16="http://schemas.microsoft.com/office/drawing/2014/main" id="{731917E3-3824-4F43-89A4-DD3A42BCB228}"/>
+                  <a16:creationId xmlns:a16="http://schemas.microsoft.com/office/drawing/2014/main" xmlns="" id="{731917E3-3824-4F43-89A4-DD3A42BCB228}"/>
                 </a:ext>
               </a:extLst>
             </p:cNvPr>
@@ -4973,7 +5255,7 @@
             <p:cNvPr id="9" name="직선 연결선 8">
               <a:extLst>
                 <a:ext uri="{FF2B5EF4-FFF2-40B4-BE49-F238E27FC236}">
-                  <a16:creationId xmlns="" xmlns:a16="http://schemas.microsoft.com/office/drawing/2014/main" id="{43273483-E9A8-4F79-B703-88F25F912C85}"/>
+                  <a16:creationId xmlns:a16="http://schemas.microsoft.com/office/drawing/2014/main" xmlns="" id="{43273483-E9A8-4F79-B703-88F25F912C85}"/>
                 </a:ext>
               </a:extLst>
             </p:cNvPr>
@@ -5017,7 +5299,7 @@
             <p:cNvPr id="10" name="직사각형 9">
               <a:extLst>
                 <a:ext uri="{FF2B5EF4-FFF2-40B4-BE49-F238E27FC236}">
-                  <a16:creationId xmlns="" xmlns:a16="http://schemas.microsoft.com/office/drawing/2014/main" id="{DE42E870-4953-4AFB-8668-0FCD858E1460}"/>
+                  <a16:creationId xmlns:a16="http://schemas.microsoft.com/office/drawing/2014/main" xmlns="" id="{DE42E870-4953-4AFB-8668-0FCD858E1460}"/>
                 </a:ext>
               </a:extLst>
             </p:cNvPr>
@@ -5068,7 +5350,7 @@
             <p:cNvPr id="11" name="TextBox 10">
               <a:extLst>
                 <a:ext uri="{FF2B5EF4-FFF2-40B4-BE49-F238E27FC236}">
-                  <a16:creationId xmlns="" xmlns:a16="http://schemas.microsoft.com/office/drawing/2014/main" id="{51A68856-BD55-492A-A348-BB490C88B0AD}"/>
+                  <a16:creationId xmlns:a16="http://schemas.microsoft.com/office/drawing/2014/main" xmlns="" id="{51A68856-BD55-492A-A348-BB490C88B0AD}"/>
                 </a:ext>
               </a:extLst>
             </p:cNvPr>
@@ -5107,7 +5389,7 @@
             <p:cNvPr id="12" name="TextBox 11">
               <a:extLst>
                 <a:ext uri="{FF2B5EF4-FFF2-40B4-BE49-F238E27FC236}">
-                  <a16:creationId xmlns="" xmlns:a16="http://schemas.microsoft.com/office/drawing/2014/main" id="{ADF93129-7E88-410D-B4A9-9795CA65D0FF}"/>
+                  <a16:creationId xmlns:a16="http://schemas.microsoft.com/office/drawing/2014/main" xmlns="" id="{ADF93129-7E88-410D-B4A9-9795CA65D0FF}"/>
                 </a:ext>
               </a:extLst>
             </p:cNvPr>
@@ -5146,7 +5428,7 @@
             <p:cNvPr id="13" name="TextBox 12">
               <a:extLst>
                 <a:ext uri="{FF2B5EF4-FFF2-40B4-BE49-F238E27FC236}">
-                  <a16:creationId xmlns="" xmlns:a16="http://schemas.microsoft.com/office/drawing/2014/main" id="{2D768706-BDBF-49C4-95F5-7B8E8263D909}"/>
+                  <a16:creationId xmlns:a16="http://schemas.microsoft.com/office/drawing/2014/main" xmlns="" id="{2D768706-BDBF-49C4-95F5-7B8E8263D909}"/>
                 </a:ext>
               </a:extLst>
             </p:cNvPr>
@@ -5198,7 +5480,7 @@
             <p:cNvPr id="14" name="그림 13">
               <a:extLst>
                 <a:ext uri="{FF2B5EF4-FFF2-40B4-BE49-F238E27FC236}">
-                  <a16:creationId xmlns="" xmlns:a16="http://schemas.microsoft.com/office/drawing/2014/main" id="{E5A8C77B-C2EF-490B-A1FE-382FEBA550CD}"/>
+                  <a16:creationId xmlns:a16="http://schemas.microsoft.com/office/drawing/2014/main" xmlns="" id="{E5A8C77B-C2EF-490B-A1FE-382FEBA550CD}"/>
                 </a:ext>
               </a:extLst>
             </p:cNvPr>
@@ -5228,7 +5510,7 @@
             <p:cNvPr id="15" name="직선 화살표 연결선 14">
               <a:extLst>
                 <a:ext uri="{FF2B5EF4-FFF2-40B4-BE49-F238E27FC236}">
-                  <a16:creationId xmlns="" xmlns:a16="http://schemas.microsoft.com/office/drawing/2014/main" id="{9ED2498D-8747-490C-866B-44AD2AEFED12}"/>
+                  <a16:creationId xmlns:a16="http://schemas.microsoft.com/office/drawing/2014/main" xmlns="" id="{9ED2498D-8747-490C-866B-44AD2AEFED12}"/>
                 </a:ext>
               </a:extLst>
             </p:cNvPr>
@@ -5274,7 +5556,7 @@
             <p:cNvPr id="16" name="연결선: 꺾임 26">
               <a:extLst>
                 <a:ext uri="{FF2B5EF4-FFF2-40B4-BE49-F238E27FC236}">
-                  <a16:creationId xmlns="" xmlns:a16="http://schemas.microsoft.com/office/drawing/2014/main" id="{0D33849E-060C-47E5-B823-19BA350E7D10}"/>
+                  <a16:creationId xmlns:a16="http://schemas.microsoft.com/office/drawing/2014/main" xmlns="" id="{0D33849E-060C-47E5-B823-19BA350E7D10}"/>
                 </a:ext>
               </a:extLst>
             </p:cNvPr>
@@ -5320,7 +5602,7 @@
             <p:cNvPr id="17" name="TextBox 16">
               <a:extLst>
                 <a:ext uri="{FF2B5EF4-FFF2-40B4-BE49-F238E27FC236}">
-                  <a16:creationId xmlns="" xmlns:a16="http://schemas.microsoft.com/office/drawing/2014/main" id="{CE91DC5F-914E-4E51-9CF4-60283EC11B15}"/>
+                  <a16:creationId xmlns:a16="http://schemas.microsoft.com/office/drawing/2014/main" xmlns="" id="{CE91DC5F-914E-4E51-9CF4-60283EC11B15}"/>
                 </a:ext>
               </a:extLst>
             </p:cNvPr>
@@ -5396,7 +5678,7 @@
             <p:cNvPr id="18" name="직선 화살표 연결선 17">
               <a:extLst>
                 <a:ext uri="{FF2B5EF4-FFF2-40B4-BE49-F238E27FC236}">
-                  <a16:creationId xmlns="" xmlns:a16="http://schemas.microsoft.com/office/drawing/2014/main" id="{219A3D16-31EF-4566-B9A5-0EC7FE58E129}"/>
+                  <a16:creationId xmlns:a16="http://schemas.microsoft.com/office/drawing/2014/main" xmlns="" id="{219A3D16-31EF-4566-B9A5-0EC7FE58E129}"/>
                 </a:ext>
               </a:extLst>
             </p:cNvPr>
@@ -5440,7 +5722,7 @@
             <p:cNvPr id="19" name="TextBox 18">
               <a:extLst>
                 <a:ext uri="{FF2B5EF4-FFF2-40B4-BE49-F238E27FC236}">
-                  <a16:creationId xmlns="" xmlns:a16="http://schemas.microsoft.com/office/drawing/2014/main" id="{0B70F743-114A-43F7-BBC6-A0586FADA4AC}"/>
+                  <a16:creationId xmlns:a16="http://schemas.microsoft.com/office/drawing/2014/main" xmlns="" id="{0B70F743-114A-43F7-BBC6-A0586FADA4AC}"/>
                 </a:ext>
               </a:extLst>
             </p:cNvPr>
@@ -5486,7 +5768,7 @@
             <p:cNvPr id="20" name="직선 화살표 연결선 19">
               <a:extLst>
                 <a:ext uri="{FF2B5EF4-FFF2-40B4-BE49-F238E27FC236}">
-                  <a16:creationId xmlns="" xmlns:a16="http://schemas.microsoft.com/office/drawing/2014/main" id="{C952B2DB-56DA-4BD4-94A9-777A92CF1E62}"/>
+                  <a16:creationId xmlns:a16="http://schemas.microsoft.com/office/drawing/2014/main" xmlns="" id="{C952B2DB-56DA-4BD4-94A9-777A92CF1E62}"/>
                 </a:ext>
               </a:extLst>
             </p:cNvPr>
@@ -5531,7 +5813,7 @@
             <p:cNvPr id="21" name="TextBox 20">
               <a:extLst>
                 <a:ext uri="{FF2B5EF4-FFF2-40B4-BE49-F238E27FC236}">
-                  <a16:creationId xmlns="" xmlns:a16="http://schemas.microsoft.com/office/drawing/2014/main" id="{BC878A57-80F1-475A-9FE6-5B8B240C49F4}"/>
+                  <a16:creationId xmlns:a16="http://schemas.microsoft.com/office/drawing/2014/main" xmlns="" id="{BC878A57-80F1-475A-9FE6-5B8B240C49F4}"/>
                 </a:ext>
               </a:extLst>
             </p:cNvPr>
@@ -5577,7 +5859,7 @@
             <p:cNvPr id="22" name="연결선: 꺾임 33">
               <a:extLst>
                 <a:ext uri="{FF2B5EF4-FFF2-40B4-BE49-F238E27FC236}">
-                  <a16:creationId xmlns="" xmlns:a16="http://schemas.microsoft.com/office/drawing/2014/main" id="{87836733-8892-446E-9711-F19662159A55}"/>
+                  <a16:creationId xmlns:a16="http://schemas.microsoft.com/office/drawing/2014/main" xmlns="" id="{87836733-8892-446E-9711-F19662159A55}"/>
                 </a:ext>
               </a:extLst>
             </p:cNvPr>
@@ -5624,7 +5906,7 @@
             <p:cNvPr id="23" name="직사각형 22">
               <a:extLst>
                 <a:ext uri="{FF2B5EF4-FFF2-40B4-BE49-F238E27FC236}">
-                  <a16:creationId xmlns="" xmlns:a16="http://schemas.microsoft.com/office/drawing/2014/main" id="{339E2D42-7DE5-4AC4-BF64-AD88B9F242A1}"/>
+                  <a16:creationId xmlns:a16="http://schemas.microsoft.com/office/drawing/2014/main" xmlns="" id="{339E2D42-7DE5-4AC4-BF64-AD88B9F242A1}"/>
                 </a:ext>
               </a:extLst>
             </p:cNvPr>
@@ -5678,7 +5960,7 @@
             <p:cNvPr id="24" name="TextBox 23">
               <a:extLst>
                 <a:ext uri="{FF2B5EF4-FFF2-40B4-BE49-F238E27FC236}">
-                  <a16:creationId xmlns="" xmlns:a16="http://schemas.microsoft.com/office/drawing/2014/main" id="{B701EA46-259F-4D28-9A13-A27A8B4BCCB9}"/>
+                  <a16:creationId xmlns:a16="http://schemas.microsoft.com/office/drawing/2014/main" xmlns="" id="{B701EA46-259F-4D28-9A13-A27A8B4BCCB9}"/>
                 </a:ext>
               </a:extLst>
             </p:cNvPr>
@@ -5724,7 +6006,7 @@
             <p:cNvPr id="25" name="TextBox 24">
               <a:extLst>
                 <a:ext uri="{FF2B5EF4-FFF2-40B4-BE49-F238E27FC236}">
-                  <a16:creationId xmlns="" xmlns:a16="http://schemas.microsoft.com/office/drawing/2014/main" id="{C2B6FBBD-2DD9-4F12-894F-5C5CE62D3E6B}"/>
+                  <a16:creationId xmlns:a16="http://schemas.microsoft.com/office/drawing/2014/main" xmlns="" id="{C2B6FBBD-2DD9-4F12-894F-5C5CE62D3E6B}"/>
                 </a:ext>
               </a:extLst>
             </p:cNvPr>
@@ -5763,7 +6045,7 @@
             <p:cNvPr id="26" name="직선 연결선 25">
               <a:extLst>
                 <a:ext uri="{FF2B5EF4-FFF2-40B4-BE49-F238E27FC236}">
-                  <a16:creationId xmlns="" xmlns:a16="http://schemas.microsoft.com/office/drawing/2014/main" id="{5D96B073-5196-4364-BC52-F664F0DDDDF2}"/>
+                  <a16:creationId xmlns:a16="http://schemas.microsoft.com/office/drawing/2014/main" xmlns="" id="{5D96B073-5196-4364-BC52-F664F0DDDDF2}"/>
                 </a:ext>
               </a:extLst>
             </p:cNvPr>
@@ -5807,7 +6089,7 @@
             <p:cNvPr id="27" name="직선 연결선 26">
               <a:extLst>
                 <a:ext uri="{FF2B5EF4-FFF2-40B4-BE49-F238E27FC236}">
-                  <a16:creationId xmlns="" xmlns:a16="http://schemas.microsoft.com/office/drawing/2014/main" id="{587EEA75-FD40-47F3-8A35-B540DC71A6C8}"/>
+                  <a16:creationId xmlns:a16="http://schemas.microsoft.com/office/drawing/2014/main" xmlns="" id="{587EEA75-FD40-47F3-8A35-B540DC71A6C8}"/>
                 </a:ext>
               </a:extLst>
             </p:cNvPr>
@@ -5851,7 +6133,7 @@
             <p:cNvPr id="28" name="직사각형 27">
               <a:extLst>
                 <a:ext uri="{FF2B5EF4-FFF2-40B4-BE49-F238E27FC236}">
-                  <a16:creationId xmlns="" xmlns:a16="http://schemas.microsoft.com/office/drawing/2014/main" id="{B72C5B19-BF13-4372-8AB9-4412CE6166A1}"/>
+                  <a16:creationId xmlns:a16="http://schemas.microsoft.com/office/drawing/2014/main" xmlns="" id="{B72C5B19-BF13-4372-8AB9-4412CE6166A1}"/>
                 </a:ext>
               </a:extLst>
             </p:cNvPr>
@@ -5915,7 +6197,7 @@
 </p:sld>
 </file>
 
-<file path=ppt/slides/slide18.xml><?xml version="1.0" encoding="utf-8"?>
+<file path=ppt/slides/slide19.xml><?xml version="1.0" encoding="utf-8"?>
 <p:sld xmlns:a="http://schemas.openxmlformats.org/drawingml/2006/main" xmlns:r="http://schemas.openxmlformats.org/officeDocument/2006/relationships" xmlns:p="http://schemas.openxmlformats.org/presentationml/2006/main">
   <p:cSld>
     <p:spTree>
@@ -6039,7 +6321,7 @@
           <p:cNvPr id="46" name="표 45">
             <a:extLst>
               <a:ext uri="{FF2B5EF4-FFF2-40B4-BE49-F238E27FC236}">
-                <a16:creationId xmlns="" xmlns:a16="http://schemas.microsoft.com/office/drawing/2014/main" id="{F75FE497-FD0D-47C7-822C-21847A6FB633}"/>
+                <a16:creationId xmlns:a16="http://schemas.microsoft.com/office/drawing/2014/main" xmlns="" id="{F75FE497-FD0D-47C7-822C-21847A6FB633}"/>
               </a:ext>
             </a:extLst>
           </p:cNvPr>
@@ -6068,35 +6350,35 @@
                 <a:gridCol w="2088000">
                   <a:extLst>
                     <a:ext uri="{9D8B030D-6E8A-4147-A177-3AD203B41FA5}">
-                      <a16:colId xmlns="" xmlns:a16="http://schemas.microsoft.com/office/drawing/2014/main" val="59899521"/>
+                      <a16:colId xmlns:a16="http://schemas.microsoft.com/office/drawing/2014/main" xmlns="" val="59899521"/>
                     </a:ext>
                   </a:extLst>
                 </a:gridCol>
                 <a:gridCol w="2088000">
                   <a:extLst>
                     <a:ext uri="{9D8B030D-6E8A-4147-A177-3AD203B41FA5}">
-                      <a16:colId xmlns="" xmlns:a16="http://schemas.microsoft.com/office/drawing/2014/main" val="2131386069"/>
+                      <a16:colId xmlns:a16="http://schemas.microsoft.com/office/drawing/2014/main" xmlns="" val="2131386069"/>
                     </a:ext>
                   </a:extLst>
                 </a:gridCol>
                 <a:gridCol w="2088000">
                   <a:extLst>
                     <a:ext uri="{9D8B030D-6E8A-4147-A177-3AD203B41FA5}">
-                      <a16:colId xmlns="" xmlns:a16="http://schemas.microsoft.com/office/drawing/2014/main" val="1137955822"/>
+                      <a16:colId xmlns:a16="http://schemas.microsoft.com/office/drawing/2014/main" xmlns="" val="1137955822"/>
                     </a:ext>
                   </a:extLst>
                 </a:gridCol>
                 <a:gridCol w="2088000">
                   <a:extLst>
                     <a:ext uri="{9D8B030D-6E8A-4147-A177-3AD203B41FA5}">
-                      <a16:colId xmlns="" xmlns:a16="http://schemas.microsoft.com/office/drawing/2014/main" val="1928171229"/>
+                      <a16:colId xmlns:a16="http://schemas.microsoft.com/office/drawing/2014/main" xmlns="" val="1928171229"/>
                     </a:ext>
                   </a:extLst>
                 </a:gridCol>
                 <a:gridCol w="2376000">
                   <a:extLst>
                     <a:ext uri="{9D8B030D-6E8A-4147-A177-3AD203B41FA5}">
-                      <a16:colId xmlns="" xmlns:a16="http://schemas.microsoft.com/office/drawing/2014/main" val="643042941"/>
+                      <a16:colId xmlns:a16="http://schemas.microsoft.com/office/drawing/2014/main" xmlns="" val="643042941"/>
                     </a:ext>
                   </a:extLst>
                 </a:gridCol>
@@ -6508,7 +6790,7 @@
                 </a:tc>
                 <a:extLst>
                   <a:ext uri="{0D108BD9-81ED-4DB2-BD59-A6C34878D82A}">
-                    <a16:rowId xmlns="" xmlns:a16="http://schemas.microsoft.com/office/drawing/2014/main" val="3910608962"/>
+                    <a16:rowId xmlns:a16="http://schemas.microsoft.com/office/drawing/2014/main" xmlns="" val="3910608962"/>
                   </a:ext>
                 </a:extLst>
               </a:tr>
@@ -6887,7 +7169,7 @@
                 </a:tc>
                 <a:extLst>
                   <a:ext uri="{0D108BD9-81ED-4DB2-BD59-A6C34878D82A}">
-                    <a16:rowId xmlns="" xmlns:a16="http://schemas.microsoft.com/office/drawing/2014/main" val="2905183770"/>
+                    <a16:rowId xmlns:a16="http://schemas.microsoft.com/office/drawing/2014/main" xmlns="" val="2905183770"/>
                   </a:ext>
                 </a:extLst>
               </a:tr>
@@ -6900,7 +7182,7 @@
           <p:cNvPr id="47" name="순서도: 수행의 시작/종료 46">
             <a:extLst>
               <a:ext uri="{FF2B5EF4-FFF2-40B4-BE49-F238E27FC236}">
-                <a16:creationId xmlns="" xmlns:a16="http://schemas.microsoft.com/office/drawing/2014/main" id="{2A770171-8727-4549-8274-4C2005B50250}"/>
+                <a16:creationId xmlns:a16="http://schemas.microsoft.com/office/drawing/2014/main" xmlns="" id="{2A770171-8727-4549-8274-4C2005B50250}"/>
               </a:ext>
             </a:extLst>
           </p:cNvPr>
@@ -6959,7 +7241,7 @@
           <p:cNvPr id="48" name="직선 화살표 연결선 47">
             <a:extLst>
               <a:ext uri="{FF2B5EF4-FFF2-40B4-BE49-F238E27FC236}">
-                <a16:creationId xmlns="" xmlns:a16="http://schemas.microsoft.com/office/drawing/2014/main" id="{6F4D556F-C5C9-4949-BBFB-93DA66A18D5D}"/>
+                <a16:creationId xmlns:a16="http://schemas.microsoft.com/office/drawing/2014/main" xmlns="" id="{6F4D556F-C5C9-4949-BBFB-93DA66A18D5D}"/>
               </a:ext>
             </a:extLst>
           </p:cNvPr>
@@ -7001,7 +7283,7 @@
           <p:cNvPr id="49" name="직사각형 48">
             <a:extLst>
               <a:ext uri="{FF2B5EF4-FFF2-40B4-BE49-F238E27FC236}">
-                <a16:creationId xmlns="" xmlns:a16="http://schemas.microsoft.com/office/drawing/2014/main" id="{2ED56FA1-0AC3-4946-98E1-BA7CD11B427E}"/>
+                <a16:creationId xmlns:a16="http://schemas.microsoft.com/office/drawing/2014/main" xmlns="" id="{2ED56FA1-0AC3-4946-98E1-BA7CD11B427E}"/>
               </a:ext>
             </a:extLst>
           </p:cNvPr>
@@ -7077,7 +7359,7 @@
           <p:cNvPr id="50" name="직선 화살표 연결선 49">
             <a:extLst>
               <a:ext uri="{FF2B5EF4-FFF2-40B4-BE49-F238E27FC236}">
-                <a16:creationId xmlns="" xmlns:a16="http://schemas.microsoft.com/office/drawing/2014/main" id="{ED699828-D23D-49CF-A324-4B2F0725C5E1}"/>
+                <a16:creationId xmlns:a16="http://schemas.microsoft.com/office/drawing/2014/main" xmlns="" id="{ED699828-D23D-49CF-A324-4B2F0725C5E1}"/>
               </a:ext>
             </a:extLst>
           </p:cNvPr>
@@ -7119,7 +7401,7 @@
           <p:cNvPr id="51" name="직사각형 50">
             <a:extLst>
               <a:ext uri="{FF2B5EF4-FFF2-40B4-BE49-F238E27FC236}">
-                <a16:creationId xmlns="" xmlns:a16="http://schemas.microsoft.com/office/drawing/2014/main" id="{0A2E0C4C-3407-45E1-B3FB-3951C4358A28}"/>
+                <a16:creationId xmlns:a16="http://schemas.microsoft.com/office/drawing/2014/main" xmlns="" id="{0A2E0C4C-3407-45E1-B3FB-3951C4358A28}"/>
               </a:ext>
             </a:extLst>
           </p:cNvPr>
@@ -7186,7 +7468,7 @@
           <p:cNvPr id="52" name="직사각형 51">
             <a:extLst>
               <a:ext uri="{FF2B5EF4-FFF2-40B4-BE49-F238E27FC236}">
-                <a16:creationId xmlns="" xmlns:a16="http://schemas.microsoft.com/office/drawing/2014/main" id="{51F3FCC6-C6E4-42C0-BB43-AA0A392DB634}"/>
+                <a16:creationId xmlns:a16="http://schemas.microsoft.com/office/drawing/2014/main" xmlns="" id="{51F3FCC6-C6E4-42C0-BB43-AA0A392DB634}"/>
               </a:ext>
             </a:extLst>
           </p:cNvPr>
@@ -7245,7 +7527,7 @@
           <p:cNvPr id="53" name="직사각형 52">
             <a:extLst>
               <a:ext uri="{FF2B5EF4-FFF2-40B4-BE49-F238E27FC236}">
-                <a16:creationId xmlns="" xmlns:a16="http://schemas.microsoft.com/office/drawing/2014/main" id="{BF6FF74F-BF6A-4D35-97FB-3CC7D0AD6A98}"/>
+                <a16:creationId xmlns:a16="http://schemas.microsoft.com/office/drawing/2014/main" xmlns="" id="{BF6FF74F-BF6A-4D35-97FB-3CC7D0AD6A98}"/>
               </a:ext>
             </a:extLst>
           </p:cNvPr>
@@ -7320,7 +7602,7 @@
           <p:cNvPr id="54" name="직선 화살표 연결선 53">
             <a:extLst>
               <a:ext uri="{FF2B5EF4-FFF2-40B4-BE49-F238E27FC236}">
-                <a16:creationId xmlns="" xmlns:a16="http://schemas.microsoft.com/office/drawing/2014/main" id="{CBDFE9F0-8A01-4FFC-9FE1-9EAFFC6979DE}"/>
+                <a16:creationId xmlns:a16="http://schemas.microsoft.com/office/drawing/2014/main" xmlns="" id="{CBDFE9F0-8A01-4FFC-9FE1-9EAFFC6979DE}"/>
               </a:ext>
             </a:extLst>
           </p:cNvPr>
@@ -7364,7 +7646,7 @@
           <p:cNvPr id="55" name="직사각형 54">
             <a:extLst>
               <a:ext uri="{FF2B5EF4-FFF2-40B4-BE49-F238E27FC236}">
-                <a16:creationId xmlns="" xmlns:a16="http://schemas.microsoft.com/office/drawing/2014/main" id="{44235C96-60F7-4486-8092-7500C6507600}"/>
+                <a16:creationId xmlns:a16="http://schemas.microsoft.com/office/drawing/2014/main" xmlns="" id="{44235C96-60F7-4486-8092-7500C6507600}"/>
               </a:ext>
             </a:extLst>
           </p:cNvPr>
@@ -7439,7 +7721,7 @@
           <p:cNvPr id="56" name="직사각형 55">
             <a:extLst>
               <a:ext uri="{FF2B5EF4-FFF2-40B4-BE49-F238E27FC236}">
-                <a16:creationId xmlns="" xmlns:a16="http://schemas.microsoft.com/office/drawing/2014/main" id="{51881653-C4B8-47BA-831E-EC73A0162ECC}"/>
+                <a16:creationId xmlns:a16="http://schemas.microsoft.com/office/drawing/2014/main" xmlns="" id="{51881653-C4B8-47BA-831E-EC73A0162ECC}"/>
               </a:ext>
             </a:extLst>
           </p:cNvPr>
@@ -7514,7 +7796,7 @@
           <p:cNvPr id="57" name="직선 화살표 연결선 56">
             <a:extLst>
               <a:ext uri="{FF2B5EF4-FFF2-40B4-BE49-F238E27FC236}">
-                <a16:creationId xmlns="" xmlns:a16="http://schemas.microsoft.com/office/drawing/2014/main" id="{E28EED47-F663-440A-9543-27B4548E6651}"/>
+                <a16:creationId xmlns:a16="http://schemas.microsoft.com/office/drawing/2014/main" xmlns="" id="{E28EED47-F663-440A-9543-27B4548E6651}"/>
               </a:ext>
             </a:extLst>
           </p:cNvPr>
@@ -7558,7 +7840,7 @@
           <p:cNvPr id="58" name="연결선: 꺾임 23">
             <a:extLst>
               <a:ext uri="{FF2B5EF4-FFF2-40B4-BE49-F238E27FC236}">
-                <a16:creationId xmlns="" xmlns:a16="http://schemas.microsoft.com/office/drawing/2014/main" id="{5666E300-B7CF-4E52-B38A-9126CFAE43D7}"/>
+                <a16:creationId xmlns:a16="http://schemas.microsoft.com/office/drawing/2014/main" xmlns="" id="{5666E300-B7CF-4E52-B38A-9126CFAE43D7}"/>
               </a:ext>
             </a:extLst>
           </p:cNvPr>
@@ -7602,7 +7884,7 @@
           <p:cNvPr id="59" name="직선 연결선 58">
             <a:extLst>
               <a:ext uri="{FF2B5EF4-FFF2-40B4-BE49-F238E27FC236}">
-                <a16:creationId xmlns="" xmlns:a16="http://schemas.microsoft.com/office/drawing/2014/main" id="{D5524A4A-F320-4399-86C3-715A3679BC45}"/>
+                <a16:creationId xmlns:a16="http://schemas.microsoft.com/office/drawing/2014/main" xmlns="" id="{D5524A4A-F320-4399-86C3-715A3679BC45}"/>
               </a:ext>
             </a:extLst>
           </p:cNvPr>
@@ -7643,7 +7925,7 @@
           <p:cNvPr id="60" name="직사각형 59">
             <a:extLst>
               <a:ext uri="{FF2B5EF4-FFF2-40B4-BE49-F238E27FC236}">
-                <a16:creationId xmlns="" xmlns:a16="http://schemas.microsoft.com/office/drawing/2014/main" id="{3B06E307-DDC6-451A-A58A-E19FACA7B3E8}"/>
+                <a16:creationId xmlns:a16="http://schemas.microsoft.com/office/drawing/2014/main" xmlns="" id="{3B06E307-DDC6-451A-A58A-E19FACA7B3E8}"/>
               </a:ext>
             </a:extLst>
           </p:cNvPr>
@@ -7702,7 +7984,7 @@
           <p:cNvPr id="61" name="직선 화살표 연결선 60">
             <a:extLst>
               <a:ext uri="{FF2B5EF4-FFF2-40B4-BE49-F238E27FC236}">
-                <a16:creationId xmlns="" xmlns:a16="http://schemas.microsoft.com/office/drawing/2014/main" id="{877BB967-9417-4528-A762-A1BEC7F1BFBB}"/>
+                <a16:creationId xmlns:a16="http://schemas.microsoft.com/office/drawing/2014/main" xmlns="" id="{877BB967-9417-4528-A762-A1BEC7F1BFBB}"/>
               </a:ext>
             </a:extLst>
           </p:cNvPr>
@@ -7747,7 +8029,7 @@
           <p:cNvPr id="62" name="직선 화살표 연결선 61">
             <a:extLst>
               <a:ext uri="{FF2B5EF4-FFF2-40B4-BE49-F238E27FC236}">
-                <a16:creationId xmlns="" xmlns:a16="http://schemas.microsoft.com/office/drawing/2014/main" id="{DFFD1F2D-FB44-46C1-AF19-288BB89D7FD1}"/>
+                <a16:creationId xmlns:a16="http://schemas.microsoft.com/office/drawing/2014/main" xmlns="" id="{DFFD1F2D-FB44-46C1-AF19-288BB89D7FD1}"/>
               </a:ext>
             </a:extLst>
           </p:cNvPr>
@@ -7792,7 +8074,7 @@
           <p:cNvPr id="63" name="직사각형 62">
             <a:extLst>
               <a:ext uri="{FF2B5EF4-FFF2-40B4-BE49-F238E27FC236}">
-                <a16:creationId xmlns="" xmlns:a16="http://schemas.microsoft.com/office/drawing/2014/main" id="{C663F033-B409-4910-AAC5-1F175BC8100A}"/>
+                <a16:creationId xmlns:a16="http://schemas.microsoft.com/office/drawing/2014/main" xmlns="" id="{C663F033-B409-4910-AAC5-1F175BC8100A}"/>
               </a:ext>
             </a:extLst>
           </p:cNvPr>
@@ -7851,7 +8133,7 @@
           <p:cNvPr id="64" name="직선 화살표 연결선 63">
             <a:extLst>
               <a:ext uri="{FF2B5EF4-FFF2-40B4-BE49-F238E27FC236}">
-                <a16:creationId xmlns="" xmlns:a16="http://schemas.microsoft.com/office/drawing/2014/main" id="{1D2763F5-9E59-47A8-AC92-A2C74EF1EEB8}"/>
+                <a16:creationId xmlns:a16="http://schemas.microsoft.com/office/drawing/2014/main" xmlns="" id="{1D2763F5-9E59-47A8-AC92-A2C74EF1EEB8}"/>
               </a:ext>
             </a:extLst>
           </p:cNvPr>
@@ -7895,7 +8177,7 @@
           <p:cNvPr id="65" name="직선 화살표 연결선 64">
             <a:extLst>
               <a:ext uri="{FF2B5EF4-FFF2-40B4-BE49-F238E27FC236}">
-                <a16:creationId xmlns="" xmlns:a16="http://schemas.microsoft.com/office/drawing/2014/main" id="{9C0075CC-76B3-41CD-9566-C2F51CBB5FA0}"/>
+                <a16:creationId xmlns:a16="http://schemas.microsoft.com/office/drawing/2014/main" xmlns="" id="{9C0075CC-76B3-41CD-9566-C2F51CBB5FA0}"/>
               </a:ext>
             </a:extLst>
           </p:cNvPr>
@@ -7937,7 +8219,7 @@
           <p:cNvPr id="66" name="연결선: 꺾임 35">
             <a:extLst>
               <a:ext uri="{FF2B5EF4-FFF2-40B4-BE49-F238E27FC236}">
-                <a16:creationId xmlns="" xmlns:a16="http://schemas.microsoft.com/office/drawing/2014/main" id="{55D97574-A869-48CA-88C3-4536A57C0227}"/>
+                <a16:creationId xmlns:a16="http://schemas.microsoft.com/office/drawing/2014/main" xmlns="" id="{55D97574-A869-48CA-88C3-4536A57C0227}"/>
               </a:ext>
             </a:extLst>
           </p:cNvPr>
@@ -7981,7 +8263,7 @@
           <p:cNvPr id="67" name="직선 화살표 연결선 66">
             <a:extLst>
               <a:ext uri="{FF2B5EF4-FFF2-40B4-BE49-F238E27FC236}">
-                <a16:creationId xmlns="" xmlns:a16="http://schemas.microsoft.com/office/drawing/2014/main" id="{AEDDB7A8-2ACF-4C5D-B4A9-653D8279F9EC}"/>
+                <a16:creationId xmlns:a16="http://schemas.microsoft.com/office/drawing/2014/main" xmlns="" id="{AEDDB7A8-2ACF-4C5D-B4A9-653D8279F9EC}"/>
               </a:ext>
             </a:extLst>
           </p:cNvPr>
@@ -8023,7 +8305,7 @@
           <p:cNvPr id="68" name="순서도: 수행의 시작/종료 67">
             <a:extLst>
               <a:ext uri="{FF2B5EF4-FFF2-40B4-BE49-F238E27FC236}">
-                <a16:creationId xmlns="" xmlns:a16="http://schemas.microsoft.com/office/drawing/2014/main" id="{5CEC52C6-13D5-43B6-81A3-72D31733AFD5}"/>
+                <a16:creationId xmlns:a16="http://schemas.microsoft.com/office/drawing/2014/main" xmlns="" id="{5CEC52C6-13D5-43B6-81A3-72D31733AFD5}"/>
               </a:ext>
             </a:extLst>
           </p:cNvPr>
@@ -8082,7 +8364,7 @@
           <p:cNvPr id="69" name="직사각형 68">
             <a:extLst>
               <a:ext uri="{FF2B5EF4-FFF2-40B4-BE49-F238E27FC236}">
-                <a16:creationId xmlns="" xmlns:a16="http://schemas.microsoft.com/office/drawing/2014/main" id="{D69B10B9-7455-4731-B2F9-7B18AC3BB20A}"/>
+                <a16:creationId xmlns:a16="http://schemas.microsoft.com/office/drawing/2014/main" xmlns="" id="{D69B10B9-7455-4731-B2F9-7B18AC3BB20A}"/>
               </a:ext>
             </a:extLst>
           </p:cNvPr>
@@ -8139,7 +8421,7 @@
           <p:cNvPr id="70" name="그림 69">
             <a:extLst>
               <a:ext uri="{FF2B5EF4-FFF2-40B4-BE49-F238E27FC236}">
-                <a16:creationId xmlns="" xmlns:a16="http://schemas.microsoft.com/office/drawing/2014/main" id="{85AF3B3C-CA22-40AF-9903-F5E66ABDB17D}"/>
+                <a16:creationId xmlns:a16="http://schemas.microsoft.com/office/drawing/2014/main" xmlns="" id="{85AF3B3C-CA22-40AF-9903-F5E66ABDB17D}"/>
               </a:ext>
             </a:extLst>
           </p:cNvPr>
@@ -8169,7 +8451,7 @@
           <p:cNvPr id="71" name="직사각형 70">
             <a:extLst>
               <a:ext uri="{FF2B5EF4-FFF2-40B4-BE49-F238E27FC236}">
-                <a16:creationId xmlns="" xmlns:a16="http://schemas.microsoft.com/office/drawing/2014/main" id="{51ED2F8A-AF5E-4743-BBAB-CA258E1BB304}"/>
+                <a16:creationId xmlns:a16="http://schemas.microsoft.com/office/drawing/2014/main" xmlns="" id="{51ED2F8A-AF5E-4743-BBAB-CA258E1BB304}"/>
               </a:ext>
             </a:extLst>
           </p:cNvPr>
@@ -8221,7 +8503,7 @@
           <p:cNvPr id="72" name="TextBox 71">
             <a:extLst>
               <a:ext uri="{FF2B5EF4-FFF2-40B4-BE49-F238E27FC236}">
-                <a16:creationId xmlns="" xmlns:a16="http://schemas.microsoft.com/office/drawing/2014/main" id="{670E432A-5EFB-4BCF-A24F-F48B8D585052}"/>
+                <a16:creationId xmlns:a16="http://schemas.microsoft.com/office/drawing/2014/main" xmlns="" id="{670E432A-5EFB-4BCF-A24F-F48B8D585052}"/>
               </a:ext>
             </a:extLst>
           </p:cNvPr>
@@ -8260,7 +8542,7 @@
           <p:cNvPr id="73" name="직사각형 72">
             <a:extLst>
               <a:ext uri="{FF2B5EF4-FFF2-40B4-BE49-F238E27FC236}">
-                <a16:creationId xmlns="" xmlns:a16="http://schemas.microsoft.com/office/drawing/2014/main" id="{65DFDECB-E554-4D73-9B47-E15F23ACA893}"/>
+                <a16:creationId xmlns:a16="http://schemas.microsoft.com/office/drawing/2014/main" xmlns="" id="{65DFDECB-E554-4D73-9B47-E15F23ACA893}"/>
               </a:ext>
             </a:extLst>
           </p:cNvPr>
@@ -8312,7 +8594,7 @@
           <p:cNvPr id="74" name="TextBox 73">
             <a:extLst>
               <a:ext uri="{FF2B5EF4-FFF2-40B4-BE49-F238E27FC236}">
-                <a16:creationId xmlns="" xmlns:a16="http://schemas.microsoft.com/office/drawing/2014/main" id="{1DC45C22-37E5-43C6-B214-287CDDF8F14A}"/>
+                <a16:creationId xmlns:a16="http://schemas.microsoft.com/office/drawing/2014/main" xmlns="" id="{1DC45C22-37E5-43C6-B214-287CDDF8F14A}"/>
               </a:ext>
             </a:extLst>
           </p:cNvPr>
@@ -8359,7 +8641,7 @@
           <p:cNvPr id="75" name="직사각형 74">
             <a:extLst>
               <a:ext uri="{FF2B5EF4-FFF2-40B4-BE49-F238E27FC236}">
-                <a16:creationId xmlns="" xmlns:a16="http://schemas.microsoft.com/office/drawing/2014/main" id="{E2AF4CBE-F534-4374-A3B9-6EB8C196FD5F}"/>
+                <a16:creationId xmlns:a16="http://schemas.microsoft.com/office/drawing/2014/main" xmlns="" id="{E2AF4CBE-F534-4374-A3B9-6EB8C196FD5F}"/>
               </a:ext>
             </a:extLst>
           </p:cNvPr>
@@ -8411,7 +8693,7 @@
           <p:cNvPr id="76" name="TextBox 75">
             <a:extLst>
               <a:ext uri="{FF2B5EF4-FFF2-40B4-BE49-F238E27FC236}">
-                <a16:creationId xmlns="" xmlns:a16="http://schemas.microsoft.com/office/drawing/2014/main" id="{B893E3D0-2E30-42CF-A80E-477C2E16743C}"/>
+                <a16:creationId xmlns:a16="http://schemas.microsoft.com/office/drawing/2014/main" xmlns="" id="{B893E3D0-2E30-42CF-A80E-477C2E16743C}"/>
               </a:ext>
             </a:extLst>
           </p:cNvPr>
@@ -8482,7 +8764,7 @@
 </p:sld>
 </file>
 
-<file path=ppt/slides/slide19.xml><?xml version="1.0" encoding="utf-8"?>
+<file path=ppt/slides/slide2.xml><?xml version="1.0" encoding="utf-8"?>
 <p:sld xmlns:a="http://schemas.openxmlformats.org/drawingml/2006/main" xmlns:r="http://schemas.openxmlformats.org/officeDocument/2006/relationships" xmlns:p="http://schemas.openxmlformats.org/presentationml/2006/main">
   <p:cSld>
     <p:spTree>
@@ -8515,6 +8797,154 @@
           <a:lstStyle/>
           <a:p>
             <a:r>
+              <a:rPr lang="ko-KR" altLang="en-US" dirty="0" smtClean="0"/>
+              <a:t>개발목적</a:t>
+            </a:r>
+            <a:endParaRPr lang="ko-KR" altLang="en-US" dirty="0"/>
+          </a:p>
+        </p:txBody>
+      </p:sp>
+      <p:sp>
+        <p:nvSpPr>
+          <p:cNvPr id="3" name="내용 개체 틀 2"/>
+          <p:cNvSpPr>
+            <a:spLocks noGrp="1"/>
+          </p:cNvSpPr>
+          <p:nvPr>
+            <p:ph idx="1"/>
+          </p:nvPr>
+        </p:nvSpPr>
+        <p:spPr/>
+        <p:txBody>
+          <a:bodyPr/>
+          <a:lstStyle/>
+          <a:p>
+            <a:r>
+              <a:rPr lang="en-US" altLang="ko-KR" dirty="0" smtClean="0"/>
+              <a:t>RTR ECS</a:t>
+            </a:r>
+            <a:r>
+              <a:rPr lang="ko-KR" altLang="en-US" dirty="0" smtClean="0"/>
+              <a:t>를 중심으로 한</a:t>
+            </a:r>
+            <a:r>
+              <a:rPr lang="en-US" altLang="ko-KR" dirty="0"/>
+              <a:t> </a:t>
+            </a:r>
+            <a:r>
+              <a:rPr lang="en-US" altLang="ko-KR" dirty="0" smtClean="0"/>
+              <a:t>PLC, </a:t>
+            </a:r>
+            <a:r>
+              <a:rPr lang="en-US" altLang="ko-KR" dirty="0" err="1" smtClean="0"/>
+              <a:t>GvisCAM</a:t>
+            </a:r>
+            <a:r>
+              <a:rPr lang="en-US" altLang="ko-KR" dirty="0" smtClean="0"/>
+              <a:t>, </a:t>
+            </a:r>
+            <a:r>
+              <a:rPr lang="ko-KR" altLang="en-US" dirty="0" smtClean="0"/>
+              <a:t>레이저 </a:t>
+            </a:r>
+            <a:r>
+              <a:rPr lang="ko-KR" altLang="en-US" dirty="0" err="1" smtClean="0"/>
+              <a:t>각인기</a:t>
+            </a:r>
+            <a:r>
+              <a:rPr lang="en-US" altLang="ko-KR" dirty="0" smtClean="0"/>
+              <a:t>, AOI, VS, </a:t>
+            </a:r>
+            <a:r>
+              <a:rPr lang="ko-KR" altLang="en-US" dirty="0" err="1" smtClean="0"/>
+              <a:t>펀칭기</a:t>
+            </a:r>
+            <a:r>
+              <a:rPr lang="en-US" altLang="ko-KR" dirty="0" smtClean="0"/>
+              <a:t>, DTS</a:t>
+            </a:r>
+            <a:r>
+              <a:rPr lang="ko-KR" altLang="en-US" dirty="0" smtClean="0"/>
+              <a:t> 간 독립적 연결</a:t>
+            </a:r>
+            <a:endParaRPr lang="en-US" altLang="ko-KR" dirty="0" smtClean="0"/>
+          </a:p>
+          <a:p>
+            <a:r>
+              <a:rPr lang="en-US" altLang="ko-KR" dirty="0" smtClean="0"/>
+              <a:t>ECS</a:t>
+            </a:r>
+            <a:r>
+              <a:rPr lang="ko-KR" altLang="en-US" dirty="0" smtClean="0"/>
+              <a:t>를 통한 전체 시스템 모니터링</a:t>
+            </a:r>
+            <a:endParaRPr lang="en-US" altLang="ko-KR" dirty="0" smtClean="0"/>
+          </a:p>
+          <a:p>
+            <a:r>
+              <a:rPr lang="en-US" altLang="ko-KR" dirty="0" smtClean="0"/>
+              <a:t>ECS</a:t>
+            </a:r>
+            <a:r>
+              <a:rPr lang="ko-KR" altLang="en-US" dirty="0" smtClean="0"/>
+              <a:t>를 이용한 상위 시스템간 인터페이스 역할</a:t>
+            </a:r>
+            <a:endParaRPr lang="en-US" altLang="ko-KR" dirty="0" smtClean="0"/>
+          </a:p>
+          <a:p>
+            <a:endParaRPr lang="en-US" altLang="ko-KR" dirty="0" smtClean="0"/>
+          </a:p>
+          <a:p>
+            <a:endParaRPr lang="ko-KR" altLang="en-US" dirty="0"/>
+          </a:p>
+        </p:txBody>
+      </p:sp>
+    </p:spTree>
+    <p:extLst>
+      <p:ext uri="{BB962C8B-B14F-4D97-AF65-F5344CB8AC3E}">
+        <p14:creationId xmlns:p14="http://schemas.microsoft.com/office/powerpoint/2010/main" val="1097715346"/>
+      </p:ext>
+    </p:extLst>
+  </p:cSld>
+  <p:clrMapOvr>
+    <a:masterClrMapping/>
+  </p:clrMapOvr>
+</p:sld>
+</file>
+
+<file path=ppt/slides/slide20.xml><?xml version="1.0" encoding="utf-8"?>
+<p:sld xmlns:a="http://schemas.openxmlformats.org/drawingml/2006/main" xmlns:r="http://schemas.openxmlformats.org/officeDocument/2006/relationships" xmlns:p="http://schemas.openxmlformats.org/presentationml/2006/main">
+  <p:cSld>
+    <p:spTree>
+      <p:nvGrpSpPr>
+        <p:cNvPr id="1" name=""/>
+        <p:cNvGrpSpPr/>
+        <p:nvPr/>
+      </p:nvGrpSpPr>
+      <p:grpSpPr>
+        <a:xfrm>
+          <a:off x="0" y="0"/>
+          <a:ext cx="0" cy="0"/>
+          <a:chOff x="0" y="0"/>
+          <a:chExt cx="0" cy="0"/>
+        </a:xfrm>
+      </p:grpSpPr>
+      <p:sp>
+        <p:nvSpPr>
+          <p:cNvPr id="2" name="제목 1"/>
+          <p:cNvSpPr>
+            <a:spLocks noGrp="1"/>
+          </p:cNvSpPr>
+          <p:nvPr>
+            <p:ph type="title"/>
+          </p:nvPr>
+        </p:nvSpPr>
+        <p:spPr/>
+        <p:txBody>
+          <a:bodyPr/>
+          <a:lstStyle/>
+          <a:p>
+            <a:r>
               <a:rPr lang="en-US" altLang="ko-KR" dirty="0" smtClean="0"/>
               <a:t>RMS </a:t>
             </a:r>
@@ -8723,7 +9153,7 @@
           <p:cNvPr id="4" name="표 3">
             <a:extLst>
               <a:ext uri="{FF2B5EF4-FFF2-40B4-BE49-F238E27FC236}">
-                <a16:creationId xmlns="" xmlns:a16="http://schemas.microsoft.com/office/drawing/2014/main" id="{432F2777-EAF5-462B-9D58-A63DF263EE27}"/>
+                <a16:creationId xmlns:a16="http://schemas.microsoft.com/office/drawing/2014/main" xmlns="" id="{432F2777-EAF5-462B-9D58-A63DF263EE27}"/>
               </a:ext>
             </a:extLst>
           </p:cNvPr>
@@ -8752,35 +9182,35 @@
                 <a:gridCol w="1205225">
                   <a:extLst>
                     <a:ext uri="{9D8B030D-6E8A-4147-A177-3AD203B41FA5}">
-                      <a16:colId xmlns="" xmlns:a16="http://schemas.microsoft.com/office/drawing/2014/main" val="3314465299"/>
+                      <a16:colId xmlns:a16="http://schemas.microsoft.com/office/drawing/2014/main" xmlns="" val="3314465299"/>
                     </a:ext>
                   </a:extLst>
                 </a:gridCol>
                 <a:gridCol w="943219">
                   <a:extLst>
                     <a:ext uri="{9D8B030D-6E8A-4147-A177-3AD203B41FA5}">
-                      <a16:colId xmlns="" xmlns:a16="http://schemas.microsoft.com/office/drawing/2014/main" val="3154350998"/>
+                      <a16:colId xmlns:a16="http://schemas.microsoft.com/office/drawing/2014/main" xmlns="" val="3154350998"/>
                     </a:ext>
                   </a:extLst>
                 </a:gridCol>
                 <a:gridCol w="943219">
                   <a:extLst>
                     <a:ext uri="{9D8B030D-6E8A-4147-A177-3AD203B41FA5}">
-                      <a16:colId xmlns="" xmlns:a16="http://schemas.microsoft.com/office/drawing/2014/main" val="3053498514"/>
+                      <a16:colId xmlns:a16="http://schemas.microsoft.com/office/drawing/2014/main" xmlns="" val="3053498514"/>
                     </a:ext>
                   </a:extLst>
                 </a:gridCol>
                 <a:gridCol w="943219">
                   <a:extLst>
                     <a:ext uri="{9D8B030D-6E8A-4147-A177-3AD203B41FA5}">
-                      <a16:colId xmlns="" xmlns:a16="http://schemas.microsoft.com/office/drawing/2014/main" val="2867911783"/>
+                      <a16:colId xmlns:a16="http://schemas.microsoft.com/office/drawing/2014/main" xmlns="" val="2867911783"/>
                     </a:ext>
                   </a:extLst>
                 </a:gridCol>
                 <a:gridCol w="943219">
                   <a:extLst>
                     <a:ext uri="{9D8B030D-6E8A-4147-A177-3AD203B41FA5}">
-                      <a16:colId xmlns="" xmlns:a16="http://schemas.microsoft.com/office/drawing/2014/main" val="1465502420"/>
+                      <a16:colId xmlns:a16="http://schemas.microsoft.com/office/drawing/2014/main" xmlns="" val="1465502420"/>
                     </a:ext>
                   </a:extLst>
                 </a:gridCol>
@@ -8961,7 +9391,7 @@
                 </a:tc>
                 <a:extLst>
                   <a:ext uri="{0D108BD9-81ED-4DB2-BD59-A6C34878D82A}">
-                    <a16:rowId xmlns="" xmlns:a16="http://schemas.microsoft.com/office/drawing/2014/main" val="3525170690"/>
+                    <a16:rowId xmlns:a16="http://schemas.microsoft.com/office/drawing/2014/main" xmlns="" val="3525170690"/>
                   </a:ext>
                 </a:extLst>
               </a:tr>
@@ -9259,7 +9689,7 @@
                 </a:tc>
                 <a:extLst>
                   <a:ext uri="{0D108BD9-81ED-4DB2-BD59-A6C34878D82A}">
-                    <a16:rowId xmlns="" xmlns:a16="http://schemas.microsoft.com/office/drawing/2014/main" val="14656909"/>
+                    <a16:rowId xmlns:a16="http://schemas.microsoft.com/office/drawing/2014/main" xmlns="" val="14656909"/>
                   </a:ext>
                 </a:extLst>
               </a:tr>
@@ -9596,7 +10026,7 @@
                 </a:tc>
                 <a:extLst>
                   <a:ext uri="{0D108BD9-81ED-4DB2-BD59-A6C34878D82A}">
-                    <a16:rowId xmlns="" xmlns:a16="http://schemas.microsoft.com/office/drawing/2014/main" val="3637640437"/>
+                    <a16:rowId xmlns:a16="http://schemas.microsoft.com/office/drawing/2014/main" xmlns="" val="3637640437"/>
                   </a:ext>
                 </a:extLst>
               </a:tr>
@@ -9933,7 +10363,7 @@
                 </a:tc>
                 <a:extLst>
                   <a:ext uri="{0D108BD9-81ED-4DB2-BD59-A6C34878D82A}">
-                    <a16:rowId xmlns="" xmlns:a16="http://schemas.microsoft.com/office/drawing/2014/main" val="3285124878"/>
+                    <a16:rowId xmlns:a16="http://schemas.microsoft.com/office/drawing/2014/main" xmlns="" val="3285124878"/>
                   </a:ext>
                 </a:extLst>
               </a:tr>
@@ -10270,7 +10700,7 @@
                 </a:tc>
                 <a:extLst>
                   <a:ext uri="{0D108BD9-81ED-4DB2-BD59-A6C34878D82A}">
-                    <a16:rowId xmlns="" xmlns:a16="http://schemas.microsoft.com/office/drawing/2014/main" val="3543377646"/>
+                    <a16:rowId xmlns:a16="http://schemas.microsoft.com/office/drawing/2014/main" xmlns="" val="3543377646"/>
                   </a:ext>
                 </a:extLst>
               </a:tr>
@@ -10607,7 +11037,7 @@
                 </a:tc>
                 <a:extLst>
                   <a:ext uri="{0D108BD9-81ED-4DB2-BD59-A6C34878D82A}">
-                    <a16:rowId xmlns="" xmlns:a16="http://schemas.microsoft.com/office/drawing/2014/main" val="1294887234"/>
+                    <a16:rowId xmlns:a16="http://schemas.microsoft.com/office/drawing/2014/main" xmlns="" val="1294887234"/>
                   </a:ext>
                 </a:extLst>
               </a:tr>
@@ -10944,7 +11374,7 @@
                 </a:tc>
                 <a:extLst>
                   <a:ext uri="{0D108BD9-81ED-4DB2-BD59-A6C34878D82A}">
-                    <a16:rowId xmlns="" xmlns:a16="http://schemas.microsoft.com/office/drawing/2014/main" val="1499230498"/>
+                    <a16:rowId xmlns:a16="http://schemas.microsoft.com/office/drawing/2014/main" xmlns="" val="1499230498"/>
                   </a:ext>
                 </a:extLst>
               </a:tr>
@@ -11281,7 +11711,7 @@
                 </a:tc>
                 <a:extLst>
                   <a:ext uri="{0D108BD9-81ED-4DB2-BD59-A6C34878D82A}">
-                    <a16:rowId xmlns="" xmlns:a16="http://schemas.microsoft.com/office/drawing/2014/main" val="276588842"/>
+                    <a16:rowId xmlns:a16="http://schemas.microsoft.com/office/drawing/2014/main" xmlns="" val="276588842"/>
                   </a:ext>
                 </a:extLst>
               </a:tr>
@@ -11618,7 +12048,7 @@
                 </a:tc>
                 <a:extLst>
                   <a:ext uri="{0D108BD9-81ED-4DB2-BD59-A6C34878D82A}">
-                    <a16:rowId xmlns="" xmlns:a16="http://schemas.microsoft.com/office/drawing/2014/main" val="1484234383"/>
+                    <a16:rowId xmlns:a16="http://schemas.microsoft.com/office/drawing/2014/main" xmlns="" val="1484234383"/>
                   </a:ext>
                 </a:extLst>
               </a:tr>
@@ -11631,7 +12061,7 @@
           <p:cNvPr id="5" name="제목 3">
             <a:extLst>
               <a:ext uri="{FF2B5EF4-FFF2-40B4-BE49-F238E27FC236}">
-                <a16:creationId xmlns="" xmlns:a16="http://schemas.microsoft.com/office/drawing/2014/main" id="{3258AA73-893E-4FAF-ACEB-7B9C0E5839F1}"/>
+                <a16:creationId xmlns:a16="http://schemas.microsoft.com/office/drawing/2014/main" xmlns="" id="{3258AA73-893E-4FAF-ACEB-7B9C0E5839F1}"/>
               </a:ext>
             </a:extLst>
           </p:cNvPr>
@@ -11746,7 +12176,7 @@
           <p:cNvPr id="6" name="표 5">
             <a:extLst>
               <a:ext uri="{FF2B5EF4-FFF2-40B4-BE49-F238E27FC236}">
-                <a16:creationId xmlns="" xmlns:a16="http://schemas.microsoft.com/office/drawing/2014/main" id="{CC0E93B4-B219-45B9-87AB-29127F02F652}"/>
+                <a16:creationId xmlns:a16="http://schemas.microsoft.com/office/drawing/2014/main" xmlns="" id="{CC0E93B4-B219-45B9-87AB-29127F02F652}"/>
               </a:ext>
             </a:extLst>
           </p:cNvPr>
@@ -11775,56 +12205,56 @@
                 <a:gridCol w="655156">
                   <a:extLst>
                     <a:ext uri="{9D8B030D-6E8A-4147-A177-3AD203B41FA5}">
-                      <a16:colId xmlns="" xmlns:a16="http://schemas.microsoft.com/office/drawing/2014/main" val="3403421608"/>
+                      <a16:colId xmlns:a16="http://schemas.microsoft.com/office/drawing/2014/main" xmlns="" val="3403421608"/>
                     </a:ext>
                   </a:extLst>
                 </a:gridCol>
                 <a:gridCol w="655156">
                   <a:extLst>
                     <a:ext uri="{9D8B030D-6E8A-4147-A177-3AD203B41FA5}">
-                      <a16:colId xmlns="" xmlns:a16="http://schemas.microsoft.com/office/drawing/2014/main" val="1206794548"/>
+                      <a16:colId xmlns:a16="http://schemas.microsoft.com/office/drawing/2014/main" xmlns="" val="1206794548"/>
                     </a:ext>
                   </a:extLst>
                 </a:gridCol>
                 <a:gridCol w="655156">
                   <a:extLst>
                     <a:ext uri="{9D8B030D-6E8A-4147-A177-3AD203B41FA5}">
-                      <a16:colId xmlns="" xmlns:a16="http://schemas.microsoft.com/office/drawing/2014/main" val="1674119444"/>
+                      <a16:colId xmlns:a16="http://schemas.microsoft.com/office/drawing/2014/main" xmlns="" val="1674119444"/>
                     </a:ext>
                   </a:extLst>
                 </a:gridCol>
                 <a:gridCol w="655156">
                   <a:extLst>
                     <a:ext uri="{9D8B030D-6E8A-4147-A177-3AD203B41FA5}">
-                      <a16:colId xmlns="" xmlns:a16="http://schemas.microsoft.com/office/drawing/2014/main" val="3982190741"/>
+                      <a16:colId xmlns:a16="http://schemas.microsoft.com/office/drawing/2014/main" xmlns="" val="3982190741"/>
                     </a:ext>
                   </a:extLst>
                 </a:gridCol>
                 <a:gridCol w="540000">
                   <a:extLst>
                     <a:ext uri="{9D8B030D-6E8A-4147-A177-3AD203B41FA5}">
-                      <a16:colId xmlns="" xmlns:a16="http://schemas.microsoft.com/office/drawing/2014/main" val="1660583647"/>
+                      <a16:colId xmlns:a16="http://schemas.microsoft.com/office/drawing/2014/main" xmlns="" val="1660583647"/>
                     </a:ext>
                   </a:extLst>
                 </a:gridCol>
                 <a:gridCol w="540000">
                   <a:extLst>
                     <a:ext uri="{9D8B030D-6E8A-4147-A177-3AD203B41FA5}">
-                      <a16:colId xmlns="" xmlns:a16="http://schemas.microsoft.com/office/drawing/2014/main" val="487723510"/>
+                      <a16:colId xmlns:a16="http://schemas.microsoft.com/office/drawing/2014/main" xmlns="" val="487723510"/>
                     </a:ext>
                   </a:extLst>
                 </a:gridCol>
                 <a:gridCol w="540000">
                   <a:extLst>
                     <a:ext uri="{9D8B030D-6E8A-4147-A177-3AD203B41FA5}">
-                      <a16:colId xmlns="" xmlns:a16="http://schemas.microsoft.com/office/drawing/2014/main" val="826013471"/>
+                      <a16:colId xmlns:a16="http://schemas.microsoft.com/office/drawing/2014/main" xmlns="" val="826013471"/>
                     </a:ext>
                   </a:extLst>
                 </a:gridCol>
                 <a:gridCol w="1800000">
                   <a:extLst>
                     <a:ext uri="{9D8B030D-6E8A-4147-A177-3AD203B41FA5}">
-                      <a16:colId xmlns="" xmlns:a16="http://schemas.microsoft.com/office/drawing/2014/main" val="1448965831"/>
+                      <a16:colId xmlns:a16="http://schemas.microsoft.com/office/drawing/2014/main" xmlns="" val="1448965831"/>
                     </a:ext>
                   </a:extLst>
                 </a:gridCol>
@@ -12366,7 +12796,7 @@
                 </a:tc>
                 <a:extLst>
                   <a:ext uri="{0D108BD9-81ED-4DB2-BD59-A6C34878D82A}">
-                    <a16:rowId xmlns="" xmlns:a16="http://schemas.microsoft.com/office/drawing/2014/main" val="3202431412"/>
+                    <a16:rowId xmlns:a16="http://schemas.microsoft.com/office/drawing/2014/main" xmlns="" val="3202431412"/>
                   </a:ext>
                 </a:extLst>
               </a:tr>
@@ -12913,7 +13343,7 @@
                 </a:tc>
                 <a:extLst>
                   <a:ext uri="{0D108BD9-81ED-4DB2-BD59-A6C34878D82A}">
-                    <a16:rowId xmlns="" xmlns:a16="http://schemas.microsoft.com/office/drawing/2014/main" val="3172395753"/>
+                    <a16:rowId xmlns:a16="http://schemas.microsoft.com/office/drawing/2014/main" xmlns="" val="3172395753"/>
                   </a:ext>
                 </a:extLst>
               </a:tr>
@@ -13212,7 +13642,7 @@
                 </a:tc>
                 <a:extLst>
                   <a:ext uri="{0D108BD9-81ED-4DB2-BD59-A6C34878D82A}">
-                    <a16:rowId xmlns="" xmlns:a16="http://schemas.microsoft.com/office/drawing/2014/main" val="1788895882"/>
+                    <a16:rowId xmlns:a16="http://schemas.microsoft.com/office/drawing/2014/main" xmlns="" val="1788895882"/>
                   </a:ext>
                 </a:extLst>
               </a:tr>
@@ -13511,7 +13941,7 @@
                 </a:tc>
                 <a:extLst>
                   <a:ext uri="{0D108BD9-81ED-4DB2-BD59-A6C34878D82A}">
-                    <a16:rowId xmlns="" xmlns:a16="http://schemas.microsoft.com/office/drawing/2014/main" val="2592266564"/>
+                    <a16:rowId xmlns:a16="http://schemas.microsoft.com/office/drawing/2014/main" xmlns="" val="2592266564"/>
                   </a:ext>
                 </a:extLst>
               </a:tr>
@@ -13810,7 +14240,7 @@
                 </a:tc>
                 <a:extLst>
                   <a:ext uri="{0D108BD9-81ED-4DB2-BD59-A6C34878D82A}">
-                    <a16:rowId xmlns="" xmlns:a16="http://schemas.microsoft.com/office/drawing/2014/main" val="940836603"/>
+                    <a16:rowId xmlns:a16="http://schemas.microsoft.com/office/drawing/2014/main" xmlns="" val="940836603"/>
                   </a:ext>
                 </a:extLst>
               </a:tr>
@@ -14166,7 +14596,7 @@
                 </a:tc>
                 <a:extLst>
                   <a:ext uri="{0D108BD9-81ED-4DB2-BD59-A6C34878D82A}">
-                    <a16:rowId xmlns="" xmlns:a16="http://schemas.microsoft.com/office/drawing/2014/main" val="2008582587"/>
+                    <a16:rowId xmlns:a16="http://schemas.microsoft.com/office/drawing/2014/main" xmlns="" val="2008582587"/>
                   </a:ext>
                 </a:extLst>
               </a:tr>
@@ -14465,7 +14895,7 @@
                 </a:tc>
                 <a:extLst>
                   <a:ext uri="{0D108BD9-81ED-4DB2-BD59-A6C34878D82A}">
-                    <a16:rowId xmlns="" xmlns:a16="http://schemas.microsoft.com/office/drawing/2014/main" val="605649832"/>
+                    <a16:rowId xmlns:a16="http://schemas.microsoft.com/office/drawing/2014/main" xmlns="" val="605649832"/>
                   </a:ext>
                 </a:extLst>
               </a:tr>
@@ -14764,7 +15194,7 @@
                 </a:tc>
                 <a:extLst>
                   <a:ext uri="{0D108BD9-81ED-4DB2-BD59-A6C34878D82A}">
-                    <a16:rowId xmlns="" xmlns:a16="http://schemas.microsoft.com/office/drawing/2014/main" val="196827477"/>
+                    <a16:rowId xmlns:a16="http://schemas.microsoft.com/office/drawing/2014/main" xmlns="" val="196827477"/>
                   </a:ext>
                 </a:extLst>
               </a:tr>
@@ -15063,7 +15493,7 @@
                 </a:tc>
                 <a:extLst>
                   <a:ext uri="{0D108BD9-81ED-4DB2-BD59-A6C34878D82A}">
-                    <a16:rowId xmlns="" xmlns:a16="http://schemas.microsoft.com/office/drawing/2014/main" val="3354319586"/>
+                    <a16:rowId xmlns:a16="http://schemas.microsoft.com/office/drawing/2014/main" xmlns="" val="3354319586"/>
                   </a:ext>
                 </a:extLst>
               </a:tr>
@@ -15511,7 +15941,7 @@
                 </a:tc>
                 <a:extLst>
                   <a:ext uri="{0D108BD9-81ED-4DB2-BD59-A6C34878D82A}">
-                    <a16:rowId xmlns="" xmlns:a16="http://schemas.microsoft.com/office/drawing/2014/main" val="1945925760"/>
+                    <a16:rowId xmlns:a16="http://schemas.microsoft.com/office/drawing/2014/main" xmlns="" val="1945925760"/>
                   </a:ext>
                 </a:extLst>
               </a:tr>
@@ -15810,7 +16240,7 @@
                 </a:tc>
                 <a:extLst>
                   <a:ext uri="{0D108BD9-81ED-4DB2-BD59-A6C34878D82A}">
-                    <a16:rowId xmlns="" xmlns:a16="http://schemas.microsoft.com/office/drawing/2014/main" val="1312914118"/>
+                    <a16:rowId xmlns:a16="http://schemas.microsoft.com/office/drawing/2014/main" xmlns="" val="1312914118"/>
                   </a:ext>
                 </a:extLst>
               </a:tr>
@@ -16109,7 +16539,7 @@
                 </a:tc>
                 <a:extLst>
                   <a:ext uri="{0D108BD9-81ED-4DB2-BD59-A6C34878D82A}">
-                    <a16:rowId xmlns="" xmlns:a16="http://schemas.microsoft.com/office/drawing/2014/main" val="3537847626"/>
+                    <a16:rowId xmlns:a16="http://schemas.microsoft.com/office/drawing/2014/main" xmlns="" val="3537847626"/>
                   </a:ext>
                 </a:extLst>
               </a:tr>
@@ -16408,7 +16838,7 @@
                 </a:tc>
                 <a:extLst>
                   <a:ext uri="{0D108BD9-81ED-4DB2-BD59-A6C34878D82A}">
-                    <a16:rowId xmlns="" xmlns:a16="http://schemas.microsoft.com/office/drawing/2014/main" val="739120238"/>
+                    <a16:rowId xmlns:a16="http://schemas.microsoft.com/office/drawing/2014/main" xmlns="" val="739120238"/>
                   </a:ext>
                 </a:extLst>
               </a:tr>
@@ -16764,7 +17194,7 @@
                 </a:tc>
                 <a:extLst>
                   <a:ext uri="{0D108BD9-81ED-4DB2-BD59-A6C34878D82A}">
-                    <a16:rowId xmlns="" xmlns:a16="http://schemas.microsoft.com/office/drawing/2014/main" val="656539281"/>
+                    <a16:rowId xmlns:a16="http://schemas.microsoft.com/office/drawing/2014/main" xmlns="" val="656539281"/>
                   </a:ext>
                 </a:extLst>
               </a:tr>
@@ -17063,7 +17493,7 @@
                 </a:tc>
                 <a:extLst>
                   <a:ext uri="{0D108BD9-81ED-4DB2-BD59-A6C34878D82A}">
-                    <a16:rowId xmlns="" xmlns:a16="http://schemas.microsoft.com/office/drawing/2014/main" val="1565734258"/>
+                    <a16:rowId xmlns:a16="http://schemas.microsoft.com/office/drawing/2014/main" xmlns="" val="1565734258"/>
                   </a:ext>
                 </a:extLst>
               </a:tr>
@@ -17362,7 +17792,7 @@
                 </a:tc>
                 <a:extLst>
                   <a:ext uri="{0D108BD9-81ED-4DB2-BD59-A6C34878D82A}">
-                    <a16:rowId xmlns="" xmlns:a16="http://schemas.microsoft.com/office/drawing/2014/main" val="2436091271"/>
+                    <a16:rowId xmlns:a16="http://schemas.microsoft.com/office/drawing/2014/main" xmlns="" val="2436091271"/>
                   </a:ext>
                 </a:extLst>
               </a:tr>
@@ -17661,7 +18091,7 @@
                 </a:tc>
                 <a:extLst>
                   <a:ext uri="{0D108BD9-81ED-4DB2-BD59-A6C34878D82A}">
-                    <a16:rowId xmlns="" xmlns:a16="http://schemas.microsoft.com/office/drawing/2014/main" val="4064780439"/>
+                    <a16:rowId xmlns:a16="http://schemas.microsoft.com/office/drawing/2014/main" xmlns="" val="4064780439"/>
                   </a:ext>
                 </a:extLst>
               </a:tr>
@@ -17674,7 +18104,7 @@
           <p:cNvPr id="7" name="제목 3">
             <a:extLst>
               <a:ext uri="{FF2B5EF4-FFF2-40B4-BE49-F238E27FC236}">
-                <a16:creationId xmlns="" xmlns:a16="http://schemas.microsoft.com/office/drawing/2014/main" id="{257F8841-23FB-4864-A971-E08BF7EC7487}"/>
+                <a16:creationId xmlns:a16="http://schemas.microsoft.com/office/drawing/2014/main" xmlns="" id="{257F8841-23FB-4864-A971-E08BF7EC7487}"/>
               </a:ext>
             </a:extLst>
           </p:cNvPr>
@@ -17775,7 +18205,7 @@
 </p:sld>
 </file>
 
-<file path=ppt/slides/slide2.xml><?xml version="1.0" encoding="utf-8"?>
+<file path=ppt/slides/slide21.xml><?xml version="1.0" encoding="utf-8"?>
 <p:sld xmlns:a="http://schemas.openxmlformats.org/drawingml/2006/main" xmlns:r="http://schemas.openxmlformats.org/officeDocument/2006/relationships" xmlns:p="http://schemas.openxmlformats.org/presentationml/2006/main">
   <p:cSld>
     <p:spTree>
@@ -17808,154 +18238,6 @@
           <a:lstStyle/>
           <a:p>
             <a:r>
-              <a:rPr lang="ko-KR" altLang="en-US" dirty="0" smtClean="0"/>
-              <a:t>개발목적</a:t>
-            </a:r>
-            <a:endParaRPr lang="ko-KR" altLang="en-US" dirty="0"/>
-          </a:p>
-        </p:txBody>
-      </p:sp>
-      <p:sp>
-        <p:nvSpPr>
-          <p:cNvPr id="3" name="내용 개체 틀 2"/>
-          <p:cNvSpPr>
-            <a:spLocks noGrp="1"/>
-          </p:cNvSpPr>
-          <p:nvPr>
-            <p:ph idx="1"/>
-          </p:nvPr>
-        </p:nvSpPr>
-        <p:spPr/>
-        <p:txBody>
-          <a:bodyPr/>
-          <a:lstStyle/>
-          <a:p>
-            <a:r>
-              <a:rPr lang="en-US" altLang="ko-KR" dirty="0" smtClean="0"/>
-              <a:t>RTR ECS</a:t>
-            </a:r>
-            <a:r>
-              <a:rPr lang="ko-KR" altLang="en-US" dirty="0" smtClean="0"/>
-              <a:t>를 중심으로 한</a:t>
-            </a:r>
-            <a:r>
-              <a:rPr lang="en-US" altLang="ko-KR" dirty="0"/>
-              <a:t> </a:t>
-            </a:r>
-            <a:r>
-              <a:rPr lang="en-US" altLang="ko-KR" dirty="0" smtClean="0"/>
-              <a:t>PLC, </a:t>
-            </a:r>
-            <a:r>
-              <a:rPr lang="en-US" altLang="ko-KR" dirty="0" err="1" smtClean="0"/>
-              <a:t>GvisCAM</a:t>
-            </a:r>
-            <a:r>
-              <a:rPr lang="en-US" altLang="ko-KR" dirty="0" smtClean="0"/>
-              <a:t>, </a:t>
-            </a:r>
-            <a:r>
-              <a:rPr lang="ko-KR" altLang="en-US" dirty="0" smtClean="0"/>
-              <a:t>레이저 </a:t>
-            </a:r>
-            <a:r>
-              <a:rPr lang="ko-KR" altLang="en-US" dirty="0" err="1" smtClean="0"/>
-              <a:t>각인기</a:t>
-            </a:r>
-            <a:r>
-              <a:rPr lang="en-US" altLang="ko-KR" dirty="0" smtClean="0"/>
-              <a:t>, AOI, VS, </a:t>
-            </a:r>
-            <a:r>
-              <a:rPr lang="ko-KR" altLang="en-US" dirty="0" err="1" smtClean="0"/>
-              <a:t>펀칭기</a:t>
-            </a:r>
-            <a:r>
-              <a:rPr lang="en-US" altLang="ko-KR" dirty="0" smtClean="0"/>
-              <a:t>, DTS</a:t>
-            </a:r>
-            <a:r>
-              <a:rPr lang="ko-KR" altLang="en-US" dirty="0" smtClean="0"/>
-              <a:t> 간 독립적 연결</a:t>
-            </a:r>
-            <a:endParaRPr lang="en-US" altLang="ko-KR" dirty="0" smtClean="0"/>
-          </a:p>
-          <a:p>
-            <a:r>
-              <a:rPr lang="en-US" altLang="ko-KR" dirty="0" smtClean="0"/>
-              <a:t>ECS</a:t>
-            </a:r>
-            <a:r>
-              <a:rPr lang="ko-KR" altLang="en-US" dirty="0" smtClean="0"/>
-              <a:t>를 통한 전체 시스템 모니터링</a:t>
-            </a:r>
-            <a:endParaRPr lang="en-US" altLang="ko-KR" dirty="0" smtClean="0"/>
-          </a:p>
-          <a:p>
-            <a:r>
-              <a:rPr lang="en-US" altLang="ko-KR" dirty="0" smtClean="0"/>
-              <a:t>ECS</a:t>
-            </a:r>
-            <a:r>
-              <a:rPr lang="ko-KR" altLang="en-US" dirty="0" smtClean="0"/>
-              <a:t>를 이용한 상위 시스템간 인터페이스 역할</a:t>
-            </a:r>
-            <a:endParaRPr lang="en-US" altLang="ko-KR" dirty="0" smtClean="0"/>
-          </a:p>
-          <a:p>
-            <a:endParaRPr lang="en-US" altLang="ko-KR" dirty="0" smtClean="0"/>
-          </a:p>
-          <a:p>
-            <a:endParaRPr lang="ko-KR" altLang="en-US" dirty="0"/>
-          </a:p>
-        </p:txBody>
-      </p:sp>
-    </p:spTree>
-    <p:extLst>
-      <p:ext uri="{BB962C8B-B14F-4D97-AF65-F5344CB8AC3E}">
-        <p14:creationId xmlns:p14="http://schemas.microsoft.com/office/powerpoint/2010/main" val="1097715346"/>
-      </p:ext>
-    </p:extLst>
-  </p:cSld>
-  <p:clrMapOvr>
-    <a:masterClrMapping/>
-  </p:clrMapOvr>
-</p:sld>
-</file>
-
-<file path=ppt/slides/slide20.xml><?xml version="1.0" encoding="utf-8"?>
-<p:sld xmlns:a="http://schemas.openxmlformats.org/drawingml/2006/main" xmlns:r="http://schemas.openxmlformats.org/officeDocument/2006/relationships" xmlns:p="http://schemas.openxmlformats.org/presentationml/2006/main">
-  <p:cSld>
-    <p:spTree>
-      <p:nvGrpSpPr>
-        <p:cNvPr id="1" name=""/>
-        <p:cNvGrpSpPr/>
-        <p:nvPr/>
-      </p:nvGrpSpPr>
-      <p:grpSpPr>
-        <a:xfrm>
-          <a:off x="0" y="0"/>
-          <a:ext cx="0" cy="0"/>
-          <a:chOff x="0" y="0"/>
-          <a:chExt cx="0" cy="0"/>
-        </a:xfrm>
-      </p:grpSpPr>
-      <p:sp>
-        <p:nvSpPr>
-          <p:cNvPr id="2" name="제목 1"/>
-          <p:cNvSpPr>
-            <a:spLocks noGrp="1"/>
-          </p:cNvSpPr>
-          <p:nvPr>
-            <p:ph type="title"/>
-          </p:nvPr>
-        </p:nvSpPr>
-        <p:spPr/>
-        <p:txBody>
-          <a:bodyPr/>
-          <a:lstStyle/>
-          <a:p>
-            <a:r>
               <a:rPr lang="en-US" altLang="ko-KR" dirty="0" smtClean="0"/>
               <a:t>ECS </a:t>
             </a:r>
@@ -18284,7 +18566,7 @@
 </p:sld>
 </file>
 
-<file path=ppt/slides/slide21.xml><?xml version="1.0" encoding="utf-8"?>
+<file path=ppt/slides/slide22.xml><?xml version="1.0" encoding="utf-8"?>
 <p:sld xmlns:a="http://schemas.openxmlformats.org/drawingml/2006/main" xmlns:r="http://schemas.openxmlformats.org/officeDocument/2006/relationships" xmlns:p="http://schemas.openxmlformats.org/presentationml/2006/main">
   <p:cSld>
     <p:spTree>
@@ -18503,7 +18785,7 @@
 </p:sld>
 </file>
 
-<file path=ppt/slides/slide22.xml><?xml version="1.0" encoding="utf-8"?>
+<file path=ppt/slides/slide23.xml><?xml version="1.0" encoding="utf-8"?>
 <p:sld xmlns:a="http://schemas.openxmlformats.org/drawingml/2006/main" xmlns:r="http://schemas.openxmlformats.org/officeDocument/2006/relationships" xmlns:p="http://schemas.openxmlformats.org/presentationml/2006/main">
   <p:cSld>
     <p:spTree>
@@ -18616,7 +18898,7 @@
 </p:sld>
 </file>
 
-<file path=ppt/slides/slide23.xml><?xml version="1.0" encoding="utf-8"?>
+<file path=ppt/slides/slide24.xml><?xml version="1.0" encoding="utf-8"?>
 <p:sld xmlns:a="http://schemas.openxmlformats.org/drawingml/2006/main" xmlns:r="http://schemas.openxmlformats.org/officeDocument/2006/relationships" xmlns:p="http://schemas.openxmlformats.org/presentationml/2006/main">
   <p:cSld>
     <p:spTree>
@@ -18742,7 +19024,7 @@
 </p:sld>
 </file>
 
-<file path=ppt/slides/slide24.xml><?xml version="1.0" encoding="utf-8"?>
+<file path=ppt/slides/slide25.xml><?xml version="1.0" encoding="utf-8"?>
 <p:sld xmlns:a="http://schemas.openxmlformats.org/drawingml/2006/main" xmlns:r="http://schemas.openxmlformats.org/officeDocument/2006/relationships" xmlns:p="http://schemas.openxmlformats.org/presentationml/2006/main">
   <p:cSld>
     <p:spTree>
@@ -18828,158 +19110,6 @@
 </p:sld>
 </file>
 
-<file path=ppt/slides/slide25.xml><?xml version="1.0" encoding="utf-8"?>
-<p:sld xmlns:a="http://schemas.openxmlformats.org/drawingml/2006/main" xmlns:r="http://schemas.openxmlformats.org/officeDocument/2006/relationships" xmlns:p="http://schemas.openxmlformats.org/presentationml/2006/main">
-  <p:cSld>
-    <p:spTree>
-      <p:nvGrpSpPr>
-        <p:cNvPr id="1" name=""/>
-        <p:cNvGrpSpPr/>
-        <p:nvPr/>
-      </p:nvGrpSpPr>
-      <p:grpSpPr>
-        <a:xfrm>
-          <a:off x="0" y="0"/>
-          <a:ext cx="0" cy="0"/>
-          <a:chOff x="0" y="0"/>
-          <a:chExt cx="0" cy="0"/>
-        </a:xfrm>
-      </p:grpSpPr>
-      <p:sp>
-        <p:nvSpPr>
-          <p:cNvPr id="2" name="제목 1"/>
-          <p:cNvSpPr>
-            <a:spLocks noGrp="1"/>
-          </p:cNvSpPr>
-          <p:nvPr>
-            <p:ph type="title"/>
-          </p:nvPr>
-        </p:nvSpPr>
-        <p:spPr/>
-        <p:txBody>
-          <a:bodyPr/>
-          <a:lstStyle/>
-          <a:p>
-            <a:r>
-              <a:rPr lang="en-US" altLang="ko-KR" dirty="0" smtClean="0"/>
-              <a:t>AOI</a:t>
-            </a:r>
-            <a:r>
-              <a:rPr lang="ko-KR" altLang="en-US" dirty="0" smtClean="0"/>
-              <a:t> 구성</a:t>
-            </a:r>
-            <a:endParaRPr lang="ko-KR" altLang="en-US" dirty="0"/>
-          </a:p>
-        </p:txBody>
-      </p:sp>
-      <p:sp>
-        <p:nvSpPr>
-          <p:cNvPr id="3" name="내용 개체 틀 2"/>
-          <p:cNvSpPr>
-            <a:spLocks noGrp="1"/>
-          </p:cNvSpPr>
-          <p:nvPr>
-            <p:ph idx="1"/>
-          </p:nvPr>
-        </p:nvSpPr>
-        <p:spPr/>
-        <p:txBody>
-          <a:bodyPr/>
-          <a:lstStyle/>
-          <a:p>
-            <a:r>
-              <a:rPr lang="en-US" altLang="ko-KR" dirty="0" smtClean="0"/>
-              <a:t>Vision</a:t>
-            </a:r>
-          </a:p>
-          <a:p>
-            <a:r>
-              <a:rPr lang="en-US" altLang="ko-KR" dirty="0" smtClean="0"/>
-              <a:t>Motion</a:t>
-            </a:r>
-          </a:p>
-          <a:p>
-            <a:r>
-              <a:rPr lang="en-US" altLang="ko-KR" dirty="0" smtClean="0"/>
-              <a:t>Lan</a:t>
-            </a:r>
-          </a:p>
-          <a:p>
-            <a:r>
-              <a:rPr lang="en-US" altLang="ko-KR" dirty="0" smtClean="0"/>
-              <a:t>IO</a:t>
-            </a:r>
-          </a:p>
-          <a:p>
-            <a:r>
-              <a:rPr lang="en-US" altLang="ko-KR" dirty="0" smtClean="0"/>
-              <a:t>DTS </a:t>
-            </a:r>
-            <a:r>
-              <a:rPr lang="ko-KR" altLang="en-US" dirty="0" smtClean="0"/>
-              <a:t>연결</a:t>
-            </a:r>
-            <a:endParaRPr lang="en-US" altLang="ko-KR" dirty="0" smtClean="0"/>
-          </a:p>
-          <a:p>
-            <a:pPr lvl="1"/>
-            <a:r>
-              <a:rPr lang="ko-KR" altLang="en-US" dirty="0" smtClean="0"/>
-              <a:t>검사결과 업데이트</a:t>
-            </a:r>
-            <a:endParaRPr lang="en-US" altLang="ko-KR" dirty="0" smtClean="0"/>
-          </a:p>
-          <a:p>
-            <a:r>
-              <a:rPr lang="en-US" altLang="ko-KR" dirty="0" err="1" smtClean="0"/>
-              <a:t>GvisCAM</a:t>
-            </a:r>
-            <a:r>
-              <a:rPr lang="en-US" altLang="ko-KR" dirty="0" smtClean="0"/>
-              <a:t> </a:t>
-            </a:r>
-            <a:r>
-              <a:rPr lang="ko-KR" altLang="en-US" dirty="0" smtClean="0"/>
-              <a:t>연결</a:t>
-            </a:r>
-            <a:endParaRPr lang="en-US" altLang="ko-KR" dirty="0" smtClean="0"/>
-          </a:p>
-          <a:p>
-            <a:r>
-              <a:rPr lang="en-US" altLang="ko-KR" dirty="0" smtClean="0"/>
-              <a:t>ECS</a:t>
-            </a:r>
-            <a:r>
-              <a:rPr lang="ko-KR" altLang="en-US" dirty="0" smtClean="0"/>
-              <a:t>에 </a:t>
-            </a:r>
-            <a:r>
-              <a:rPr lang="en-US" altLang="ko-KR" dirty="0" smtClean="0"/>
-              <a:t>PCR </a:t>
-            </a:r>
-            <a:r>
-              <a:rPr lang="ko-KR" altLang="en-US" dirty="0" smtClean="0"/>
-              <a:t>전송</a:t>
-            </a:r>
-          </a:p>
-          <a:p>
-            <a:endParaRPr lang="ko-KR" altLang="en-US" dirty="0"/>
-          </a:p>
-        </p:txBody>
-      </p:sp>
-    </p:spTree>
-    <p:extLst>
-      <p:ext uri="{BB962C8B-B14F-4D97-AF65-F5344CB8AC3E}">
-        <p14:creationId xmlns:p14="http://schemas.microsoft.com/office/powerpoint/2010/main" val="733048190"/>
-      </p:ext>
-    </p:extLst>
-  </p:cSld>
-  <p:clrMapOvr>
-    <a:masterClrMapping/>
-  </p:clrMapOvr>
-</p:sld>
-</file>
-
 <file path=ppt/slides/slide26.xml><?xml version="1.0" encoding="utf-8"?>
 <p:sld xmlns:a="http://schemas.openxmlformats.org/drawingml/2006/main" xmlns:r="http://schemas.openxmlformats.org/officeDocument/2006/relationships" xmlns:p="http://schemas.openxmlformats.org/presentationml/2006/main">
   <p:cSld>
@@ -19014,7 +19144,7 @@
           <a:p>
             <a:r>
               <a:rPr lang="en-US" altLang="ko-KR" dirty="0" smtClean="0"/>
-              <a:t>VS</a:t>
+              <a:t>AOI</a:t>
             </a:r>
             <a:r>
               <a:rPr lang="ko-KR" altLang="en-US" dirty="0" smtClean="0"/>
@@ -19041,7 +19171,25 @@
           <a:p>
             <a:r>
               <a:rPr lang="en-US" altLang="ko-KR" dirty="0" smtClean="0"/>
+              <a:t>Vision</a:t>
+            </a:r>
+          </a:p>
+          <a:p>
+            <a:r>
+              <a:rPr lang="en-US" altLang="ko-KR" dirty="0" smtClean="0"/>
+              <a:t>Motion</a:t>
+            </a:r>
+          </a:p>
+          <a:p>
+            <a:r>
+              <a:rPr lang="en-US" altLang="ko-KR" dirty="0" smtClean="0"/>
               <a:t>Lan</a:t>
+            </a:r>
+          </a:p>
+          <a:p>
+            <a:r>
+              <a:rPr lang="en-US" altLang="ko-KR" dirty="0" smtClean="0"/>
+              <a:t>IO</a:t>
             </a:r>
           </a:p>
           <a:p>
@@ -19058,12 +19206,8 @@
           <a:p>
             <a:pPr lvl="1"/>
             <a:r>
-              <a:rPr lang="en-US" altLang="ko-KR" dirty="0" smtClean="0"/>
-              <a:t>Verify</a:t>
-            </a:r>
-            <a:r>
               <a:rPr lang="ko-KR" altLang="en-US" dirty="0" smtClean="0"/>
-              <a:t>결과 업데이트</a:t>
+              <a:t>검사결과 업데이트</a:t>
             </a:r>
             <a:endParaRPr lang="en-US" altLang="ko-KR" dirty="0" smtClean="0"/>
           </a:p>
@@ -19080,6 +19224,7 @@
               <a:rPr lang="ko-KR" altLang="en-US" dirty="0" smtClean="0"/>
               <a:t>연결</a:t>
             </a:r>
+            <a:endParaRPr lang="en-US" altLang="ko-KR" dirty="0" smtClean="0"/>
           </a:p>
           <a:p>
             <a:r>
@@ -19098,6 +19243,8 @@
               <a:rPr lang="ko-KR" altLang="en-US" dirty="0" smtClean="0"/>
               <a:t>전송</a:t>
             </a:r>
+          </a:p>
+          <a:p>
             <a:endParaRPr lang="ko-KR" altLang="en-US" dirty="0"/>
           </a:p>
         </p:txBody>
@@ -19105,7 +19252,7 @@
     </p:spTree>
     <p:extLst>
       <p:ext uri="{BB962C8B-B14F-4D97-AF65-F5344CB8AC3E}">
-        <p14:creationId xmlns:p14="http://schemas.microsoft.com/office/powerpoint/2010/main" val="2831113681"/>
+        <p14:creationId xmlns:p14="http://schemas.microsoft.com/office/powerpoint/2010/main" val="733048190"/>
       </p:ext>
     </p:extLst>
   </p:cSld>
@@ -19148,6 +19295,141 @@
           <a:lstStyle/>
           <a:p>
             <a:r>
+              <a:rPr lang="en-US" altLang="ko-KR" dirty="0" smtClean="0"/>
+              <a:t>VS</a:t>
+            </a:r>
+            <a:r>
+              <a:rPr lang="ko-KR" altLang="en-US" dirty="0" smtClean="0"/>
+              <a:t> 구성</a:t>
+            </a:r>
+            <a:endParaRPr lang="ko-KR" altLang="en-US" dirty="0"/>
+          </a:p>
+        </p:txBody>
+      </p:sp>
+      <p:sp>
+        <p:nvSpPr>
+          <p:cNvPr id="3" name="내용 개체 틀 2"/>
+          <p:cNvSpPr>
+            <a:spLocks noGrp="1"/>
+          </p:cNvSpPr>
+          <p:nvPr>
+            <p:ph idx="1"/>
+          </p:nvPr>
+        </p:nvSpPr>
+        <p:spPr/>
+        <p:txBody>
+          <a:bodyPr/>
+          <a:lstStyle/>
+          <a:p>
+            <a:r>
+              <a:rPr lang="en-US" altLang="ko-KR" dirty="0" smtClean="0"/>
+              <a:t>Lan</a:t>
+            </a:r>
+          </a:p>
+          <a:p>
+            <a:r>
+              <a:rPr lang="en-US" altLang="ko-KR" dirty="0" smtClean="0"/>
+              <a:t>DTS </a:t>
+            </a:r>
+            <a:r>
+              <a:rPr lang="ko-KR" altLang="en-US" dirty="0" smtClean="0"/>
+              <a:t>연결</a:t>
+            </a:r>
+            <a:endParaRPr lang="en-US" altLang="ko-KR" dirty="0" smtClean="0"/>
+          </a:p>
+          <a:p>
+            <a:pPr lvl="1"/>
+            <a:r>
+              <a:rPr lang="en-US" altLang="ko-KR" dirty="0" smtClean="0"/>
+              <a:t>Verify</a:t>
+            </a:r>
+            <a:r>
+              <a:rPr lang="ko-KR" altLang="en-US" dirty="0" smtClean="0"/>
+              <a:t>결과 업데이트</a:t>
+            </a:r>
+            <a:endParaRPr lang="en-US" altLang="ko-KR" dirty="0" smtClean="0"/>
+          </a:p>
+          <a:p>
+            <a:r>
+              <a:rPr lang="en-US" altLang="ko-KR" dirty="0" err="1" smtClean="0"/>
+              <a:t>GvisCAM</a:t>
+            </a:r>
+            <a:r>
+              <a:rPr lang="en-US" altLang="ko-KR" dirty="0" smtClean="0"/>
+              <a:t> </a:t>
+            </a:r>
+            <a:r>
+              <a:rPr lang="ko-KR" altLang="en-US" dirty="0" smtClean="0"/>
+              <a:t>연결</a:t>
+            </a:r>
+          </a:p>
+          <a:p>
+            <a:r>
+              <a:rPr lang="en-US" altLang="ko-KR" dirty="0" smtClean="0"/>
+              <a:t>ECS</a:t>
+            </a:r>
+            <a:r>
+              <a:rPr lang="ko-KR" altLang="en-US" dirty="0" smtClean="0"/>
+              <a:t>에 </a:t>
+            </a:r>
+            <a:r>
+              <a:rPr lang="en-US" altLang="ko-KR" dirty="0" smtClean="0"/>
+              <a:t>PCR </a:t>
+            </a:r>
+            <a:r>
+              <a:rPr lang="ko-KR" altLang="en-US" dirty="0" smtClean="0"/>
+              <a:t>전송</a:t>
+            </a:r>
+            <a:endParaRPr lang="ko-KR" altLang="en-US" dirty="0"/>
+          </a:p>
+        </p:txBody>
+      </p:sp>
+    </p:spTree>
+    <p:extLst>
+      <p:ext uri="{BB962C8B-B14F-4D97-AF65-F5344CB8AC3E}">
+        <p14:creationId xmlns:p14="http://schemas.microsoft.com/office/powerpoint/2010/main" val="2831113681"/>
+      </p:ext>
+    </p:extLst>
+  </p:cSld>
+  <p:clrMapOvr>
+    <a:masterClrMapping/>
+  </p:clrMapOvr>
+</p:sld>
+</file>
+
+<file path=ppt/slides/slide28.xml><?xml version="1.0" encoding="utf-8"?>
+<p:sld xmlns:a="http://schemas.openxmlformats.org/drawingml/2006/main" xmlns:r="http://schemas.openxmlformats.org/officeDocument/2006/relationships" xmlns:p="http://schemas.openxmlformats.org/presentationml/2006/main">
+  <p:cSld>
+    <p:spTree>
+      <p:nvGrpSpPr>
+        <p:cNvPr id="1" name=""/>
+        <p:cNvGrpSpPr/>
+        <p:nvPr/>
+      </p:nvGrpSpPr>
+      <p:grpSpPr>
+        <a:xfrm>
+          <a:off x="0" y="0"/>
+          <a:ext cx="0" cy="0"/>
+          <a:chOff x="0" y="0"/>
+          <a:chExt cx="0" cy="0"/>
+        </a:xfrm>
+      </p:grpSpPr>
+      <p:sp>
+        <p:nvSpPr>
+          <p:cNvPr id="2" name="제목 1"/>
+          <p:cNvSpPr>
+            <a:spLocks noGrp="1"/>
+          </p:cNvSpPr>
+          <p:nvPr>
+            <p:ph type="title"/>
+          </p:nvPr>
+        </p:nvSpPr>
+        <p:spPr/>
+        <p:txBody>
+          <a:bodyPr/>
+          <a:lstStyle/>
+          <a:p>
+            <a:r>
               <a:rPr lang="ko-KR" altLang="en-US" dirty="0" err="1" smtClean="0"/>
               <a:t>펀칭부</a:t>
             </a:r>
@@ -19323,7 +19605,7 @@
 </p:sld>
 </file>
 
-<file path=ppt/slides/slide28.xml><?xml version="1.0" encoding="utf-8"?>
+<file path=ppt/slides/slide29.xml><?xml version="1.0" encoding="utf-8"?>
 <p:sld xmlns:a="http://schemas.openxmlformats.org/drawingml/2006/main" xmlns:r="http://schemas.openxmlformats.org/officeDocument/2006/relationships" xmlns:p="http://schemas.openxmlformats.org/presentationml/2006/main">
   <p:cSld>
     <p:spTree>
@@ -19430,1183 +19712,6 @@
 </p:sld>
 </file>
 
-<file path=ppt/slides/slide29.xml><?xml version="1.0" encoding="utf-8"?>
-<p:sld xmlns:a="http://schemas.openxmlformats.org/drawingml/2006/main" xmlns:r="http://schemas.openxmlformats.org/officeDocument/2006/relationships" xmlns:p="http://schemas.openxmlformats.org/presentationml/2006/main">
-  <p:cSld>
-    <p:spTree>
-      <p:nvGrpSpPr>
-        <p:cNvPr id="1" name=""/>
-        <p:cNvGrpSpPr/>
-        <p:nvPr/>
-      </p:nvGrpSpPr>
-      <p:grpSpPr>
-        <a:xfrm>
-          <a:off x="0" y="0"/>
-          <a:ext cx="0" cy="0"/>
-          <a:chOff x="0" y="0"/>
-          <a:chExt cx="0" cy="0"/>
-        </a:xfrm>
-      </p:grpSpPr>
-      <p:sp>
-        <p:nvSpPr>
-          <p:cNvPr id="2" name="제목 1"/>
-          <p:cNvSpPr>
-            <a:spLocks noGrp="1"/>
-          </p:cNvSpPr>
-          <p:nvPr>
-            <p:ph type="title"/>
-          </p:nvPr>
-        </p:nvSpPr>
-        <p:spPr/>
-        <p:txBody>
-          <a:bodyPr/>
-          <a:lstStyle/>
-          <a:p>
-            <a:r>
-              <a:rPr lang="ko-KR" altLang="en-US" dirty="0" err="1" smtClean="0"/>
-              <a:t>펀칭부</a:t>
-            </a:r>
-            <a:r>
-              <a:rPr lang="ko-KR" altLang="en-US" dirty="0" smtClean="0"/>
-              <a:t> </a:t>
-            </a:r>
-            <a:r>
-              <a:rPr lang="en-US" altLang="ko-KR" dirty="0" smtClean="0"/>
-              <a:t>– </a:t>
-            </a:r>
-            <a:r>
-              <a:rPr lang="ko-KR" altLang="en-US" dirty="0" err="1" smtClean="0"/>
-              <a:t>미마킹</a:t>
-            </a:r>
-            <a:r>
-              <a:rPr lang="ko-KR" altLang="en-US" dirty="0" smtClean="0"/>
-              <a:t> 여부 체크</a:t>
-            </a:r>
-            <a:endParaRPr lang="ko-KR" altLang="en-US" dirty="0"/>
-          </a:p>
-        </p:txBody>
-      </p:sp>
-      <p:grpSp>
-        <p:nvGrpSpPr>
-          <p:cNvPr id="27" name="그룹 26"/>
-          <p:cNvGrpSpPr/>
-          <p:nvPr/>
-        </p:nvGrpSpPr>
-        <p:grpSpPr>
-          <a:xfrm>
-            <a:off x="838200" y="1690688"/>
-            <a:ext cx="10118971" cy="4548980"/>
-            <a:chOff x="114739" y="365125"/>
-            <a:chExt cx="11239061" cy="5154781"/>
-          </a:xfrm>
-        </p:grpSpPr>
-        <p:sp>
-          <p:nvSpPr>
-            <p:cNvPr id="4" name="제목 1"/>
-            <p:cNvSpPr txBox="1">
-              <a:spLocks/>
-            </p:cNvSpPr>
-            <p:nvPr/>
-          </p:nvSpPr>
-          <p:spPr>
-            <a:xfrm>
-              <a:off x="838200" y="365125"/>
-              <a:ext cx="10515600" cy="1325563"/>
-            </a:xfrm>
-            <a:prstGeom prst="rect">
-              <a:avLst/>
-            </a:prstGeom>
-          </p:spPr>
-          <p:txBody>
-            <a:bodyPr vert="horz" lIns="91440" tIns="45720" rIns="91440" bIns="45720" rtlCol="0" anchor="ctr">
-              <a:normAutofit/>
-            </a:bodyPr>
-            <a:lstStyle>
-              <a:lvl1pPr algn="l" defTabSz="914400" rtl="0" eaLnBrk="1" latinLnBrk="1" hangingPunct="1">
-                <a:lnSpc>
-                  <a:spcPct val="90000"/>
-                </a:lnSpc>
-                <a:spcBef>
-                  <a:spcPct val="0"/>
-                </a:spcBef>
-                <a:buNone/>
-                <a:defRPr sz="4400" kern="1200">
-                  <a:solidFill>
-                    <a:schemeClr val="tx1"/>
-                  </a:solidFill>
-                  <a:latin typeface="+mj-lt"/>
-                  <a:ea typeface="+mj-ea"/>
-                  <a:cs typeface="+mj-cs"/>
-                </a:defRPr>
-              </a:lvl1pPr>
-            </a:lstStyle>
-            <a:p>
-              <a:r>
-                <a:rPr lang="ko-KR" altLang="en-US" dirty="0" smtClean="0"/>
-                <a:t>모델 비교로 </a:t>
-              </a:r>
-              <a:r>
-                <a:rPr lang="ko-KR" altLang="en-US" dirty="0" err="1" smtClean="0"/>
-                <a:t>미마킹</a:t>
-              </a:r>
-              <a:r>
-                <a:rPr lang="ko-KR" altLang="en-US" dirty="0" smtClean="0"/>
-                <a:t> 확인</a:t>
-              </a:r>
-              <a:endParaRPr lang="ko-KR" altLang="en-US" dirty="0"/>
-            </a:p>
-          </p:txBody>
-        </p:sp>
-        <p:pic>
-          <p:nvPicPr>
-            <p:cNvPr id="5" name="내용 개체 틀 3"/>
-            <p:cNvPicPr>
-              <a:picLocks noChangeAspect="1"/>
-            </p:cNvPicPr>
-            <p:nvPr/>
-          </p:nvPicPr>
-          <p:blipFill>
-            <a:blip r:embed="rId2" cstate="print">
-              <a:extLst>
-                <a:ext uri="{28A0092B-C50C-407E-A947-70E740481C1C}">
-                  <a14:useLocalDpi xmlns:a14="http://schemas.microsoft.com/office/drawing/2010/main" val="0"/>
-                </a:ext>
-              </a:extLst>
-            </a:blip>
-            <a:stretch>
-              <a:fillRect/>
-            </a:stretch>
-          </p:blipFill>
-          <p:spPr>
-            <a:xfrm>
-              <a:off x="838200" y="1690688"/>
-              <a:ext cx="3121152" cy="3121152"/>
-            </a:xfrm>
-            <a:prstGeom prst="rect">
-              <a:avLst/>
-            </a:prstGeom>
-          </p:spPr>
-        </p:pic>
-        <p:sp>
-          <p:nvSpPr>
-            <p:cNvPr id="6" name="직사각형 5"/>
-            <p:cNvSpPr/>
-            <p:nvPr/>
-          </p:nvSpPr>
-          <p:spPr>
-            <a:xfrm>
-              <a:off x="838200" y="1690688"/>
-              <a:ext cx="3121152" cy="3121152"/>
-            </a:xfrm>
-            <a:prstGeom prst="rect">
-              <a:avLst/>
-            </a:prstGeom>
-            <a:noFill/>
-            <a:ln>
-              <a:solidFill>
-                <a:schemeClr val="tx1"/>
-              </a:solidFill>
-            </a:ln>
-          </p:spPr>
-          <p:style>
-            <a:lnRef idx="2">
-              <a:schemeClr val="accent1">
-                <a:shade val="50000"/>
-              </a:schemeClr>
-            </a:lnRef>
-            <a:fillRef idx="1">
-              <a:schemeClr val="accent1"/>
-            </a:fillRef>
-            <a:effectRef idx="0">
-              <a:schemeClr val="accent1"/>
-            </a:effectRef>
-            <a:fontRef idx="minor">
-              <a:schemeClr val="lt1"/>
-            </a:fontRef>
-          </p:style>
-          <p:txBody>
-            <a:bodyPr rtlCol="0" anchor="ctr"/>
-            <a:lstStyle/>
-            <a:p>
-              <a:pPr algn="ctr"/>
-              <a:endParaRPr lang="ko-KR" altLang="en-US"/>
-            </a:p>
-          </p:txBody>
-        </p:sp>
-        <p:sp>
-          <p:nvSpPr>
-            <p:cNvPr id="7" name="TextBox 6"/>
-            <p:cNvSpPr txBox="1"/>
-            <p:nvPr/>
-          </p:nvSpPr>
-          <p:spPr>
-            <a:xfrm>
-              <a:off x="2031813" y="5101389"/>
-              <a:ext cx="929784" cy="418517"/>
-            </a:xfrm>
-            <a:prstGeom prst="rect">
-              <a:avLst/>
-            </a:prstGeom>
-            <a:noFill/>
-          </p:spPr>
-          <p:txBody>
-            <a:bodyPr wrap="square" rtlCol="0">
-              <a:spAutoFit/>
-            </a:bodyPr>
-            <a:lstStyle/>
-            <a:p>
-              <a:r>
-                <a:rPr lang="en-US" altLang="ko-KR" dirty="0" smtClean="0"/>
-                <a:t>1024</a:t>
-              </a:r>
-              <a:endParaRPr lang="ko-KR" altLang="en-US" dirty="0"/>
-            </a:p>
-          </p:txBody>
-        </p:sp>
-        <p:sp>
-          <p:nvSpPr>
-            <p:cNvPr id="8" name="TextBox 7"/>
-            <p:cNvSpPr txBox="1"/>
-            <p:nvPr/>
-          </p:nvSpPr>
-          <p:spPr>
-            <a:xfrm>
-              <a:off x="114739" y="3379302"/>
-              <a:ext cx="876469" cy="418517"/>
-            </a:xfrm>
-            <a:prstGeom prst="rect">
-              <a:avLst/>
-            </a:prstGeom>
-            <a:noFill/>
-          </p:spPr>
-          <p:txBody>
-            <a:bodyPr wrap="square" rtlCol="0">
-              <a:spAutoFit/>
-            </a:bodyPr>
-            <a:lstStyle/>
-            <a:p>
-              <a:r>
-                <a:rPr lang="en-US" altLang="ko-KR" dirty="0" smtClean="0"/>
-                <a:t>1024</a:t>
-              </a:r>
-              <a:endParaRPr lang="ko-KR" altLang="en-US" dirty="0"/>
-            </a:p>
-          </p:txBody>
-        </p:sp>
-        <p:cxnSp>
-          <p:nvCxnSpPr>
-            <p:cNvPr id="9" name="직선 연결선 8"/>
-            <p:cNvCxnSpPr>
-              <a:stCxn id="6" idx="0"/>
-              <a:endCxn id="5" idx="2"/>
-            </p:cNvCxnSpPr>
-            <p:nvPr/>
-          </p:nvCxnSpPr>
-          <p:spPr>
-            <a:xfrm>
-              <a:off x="2398776" y="1690688"/>
-              <a:ext cx="0" cy="3121152"/>
-            </a:xfrm>
-            <a:prstGeom prst="line">
-              <a:avLst/>
-            </a:prstGeom>
-            <a:ln>
-              <a:solidFill>
-                <a:srgbClr val="FF0000"/>
-              </a:solidFill>
-            </a:ln>
-          </p:spPr>
-          <p:style>
-            <a:lnRef idx="1">
-              <a:schemeClr val="accent1"/>
-            </a:lnRef>
-            <a:fillRef idx="0">
-              <a:schemeClr val="accent1"/>
-            </a:fillRef>
-            <a:effectRef idx="0">
-              <a:schemeClr val="accent1"/>
-            </a:effectRef>
-            <a:fontRef idx="minor">
-              <a:schemeClr val="tx1"/>
-            </a:fontRef>
-          </p:style>
-        </p:cxnSp>
-        <p:cxnSp>
-          <p:nvCxnSpPr>
-            <p:cNvPr id="10" name="직선 연결선 9"/>
-            <p:cNvCxnSpPr>
-              <a:stCxn id="5" idx="1"/>
-              <a:endCxn id="5" idx="3"/>
-            </p:cNvCxnSpPr>
-            <p:nvPr/>
-          </p:nvCxnSpPr>
-          <p:spPr>
-            <a:xfrm>
-              <a:off x="838200" y="3251264"/>
-              <a:ext cx="3121152" cy="0"/>
-            </a:xfrm>
-            <a:prstGeom prst="line">
-              <a:avLst/>
-            </a:prstGeom>
-            <a:ln>
-              <a:solidFill>
-                <a:srgbClr val="FF0000"/>
-              </a:solidFill>
-            </a:ln>
-          </p:spPr>
-          <p:style>
-            <a:lnRef idx="1">
-              <a:schemeClr val="accent1"/>
-            </a:lnRef>
-            <a:fillRef idx="0">
-              <a:schemeClr val="accent1"/>
-            </a:fillRef>
-            <a:effectRef idx="0">
-              <a:schemeClr val="accent1"/>
-            </a:effectRef>
-            <a:fontRef idx="minor">
-              <a:schemeClr val="tx1"/>
-            </a:fontRef>
-          </p:style>
-        </p:cxnSp>
-        <p:sp>
-          <p:nvSpPr>
-            <p:cNvPr id="11" name="직사각형 10"/>
-            <p:cNvSpPr/>
-            <p:nvPr/>
-          </p:nvSpPr>
-          <p:spPr>
-            <a:xfrm>
-              <a:off x="2168785" y="3037208"/>
-              <a:ext cx="439923" cy="428771"/>
-            </a:xfrm>
-            <a:prstGeom prst="rect">
-              <a:avLst/>
-            </a:prstGeom>
-            <a:noFill/>
-            <a:ln>
-              <a:solidFill>
-                <a:srgbClr val="FF0000"/>
-              </a:solidFill>
-            </a:ln>
-          </p:spPr>
-          <p:style>
-            <a:lnRef idx="2">
-              <a:schemeClr val="accent1">
-                <a:shade val="50000"/>
-              </a:schemeClr>
-            </a:lnRef>
-            <a:fillRef idx="1">
-              <a:schemeClr val="accent1"/>
-            </a:fillRef>
-            <a:effectRef idx="0">
-              <a:schemeClr val="accent1"/>
-            </a:effectRef>
-            <a:fontRef idx="minor">
-              <a:schemeClr val="lt1"/>
-            </a:fontRef>
-          </p:style>
-          <p:txBody>
-            <a:bodyPr rtlCol="0" anchor="ctr"/>
-            <a:lstStyle/>
-            <a:p>
-              <a:pPr algn="ctr"/>
-              <a:endParaRPr lang="ko-KR" altLang="en-US"/>
-            </a:p>
-          </p:txBody>
-        </p:sp>
-        <p:sp>
-          <p:nvSpPr>
-            <p:cNvPr id="12" name="TextBox 11"/>
-            <p:cNvSpPr txBox="1"/>
-            <p:nvPr/>
-          </p:nvSpPr>
-          <p:spPr>
-            <a:xfrm>
-              <a:off x="6490037" y="1824645"/>
-              <a:ext cx="842210" cy="369332"/>
-            </a:xfrm>
-            <a:prstGeom prst="rect">
-              <a:avLst/>
-            </a:prstGeom>
-            <a:noFill/>
-          </p:spPr>
-          <p:txBody>
-            <a:bodyPr wrap="square" rtlCol="0">
-              <a:spAutoFit/>
-            </a:bodyPr>
-            <a:lstStyle/>
-            <a:p>
-              <a:r>
-                <a:rPr lang="en-US" altLang="ko-KR" dirty="0" smtClean="0">
-                  <a:solidFill>
-                    <a:srgbClr val="FF0000"/>
-                  </a:solidFill>
-                </a:rPr>
-                <a:t>100</a:t>
-              </a:r>
-              <a:endParaRPr lang="ko-KR" altLang="en-US" dirty="0">
-                <a:solidFill>
-                  <a:srgbClr val="FF0000"/>
-                </a:solidFill>
-              </a:endParaRPr>
-            </a:p>
-          </p:txBody>
-        </p:sp>
-        <p:sp>
-          <p:nvSpPr>
-            <p:cNvPr id="13" name="TextBox 12"/>
-            <p:cNvSpPr txBox="1"/>
-            <p:nvPr/>
-          </p:nvSpPr>
-          <p:spPr>
-            <a:xfrm>
-              <a:off x="2010337" y="3379301"/>
-              <a:ext cx="842210" cy="276999"/>
-            </a:xfrm>
-            <a:prstGeom prst="rect">
-              <a:avLst/>
-            </a:prstGeom>
-            <a:noFill/>
-          </p:spPr>
-          <p:txBody>
-            <a:bodyPr wrap="square" rtlCol="0">
-              <a:spAutoFit/>
-            </a:bodyPr>
-            <a:lstStyle/>
-            <a:p>
-              <a:r>
-                <a:rPr lang="en-US" altLang="ko-KR" sz="1200" b="1" dirty="0" smtClean="0">
-                  <a:solidFill>
-                    <a:srgbClr val="FF0000"/>
-                  </a:solidFill>
-                </a:rPr>
-                <a:t>100</a:t>
-              </a:r>
-              <a:endParaRPr lang="ko-KR" altLang="en-US" sz="1200" b="1" dirty="0">
-                <a:solidFill>
-                  <a:srgbClr val="FF0000"/>
-                </a:solidFill>
-              </a:endParaRPr>
-            </a:p>
-          </p:txBody>
-        </p:sp>
-        <p:sp>
-          <p:nvSpPr>
-            <p:cNvPr id="14" name="TextBox 13"/>
-            <p:cNvSpPr txBox="1"/>
-            <p:nvPr/>
-          </p:nvSpPr>
-          <p:spPr>
-            <a:xfrm>
-              <a:off x="2441820" y="2978844"/>
-              <a:ext cx="842210" cy="276999"/>
-            </a:xfrm>
-            <a:prstGeom prst="rect">
-              <a:avLst/>
-            </a:prstGeom>
-            <a:noFill/>
-          </p:spPr>
-          <p:txBody>
-            <a:bodyPr wrap="square" rtlCol="0">
-              <a:spAutoFit/>
-            </a:bodyPr>
-            <a:lstStyle/>
-            <a:p>
-              <a:r>
-                <a:rPr lang="en-US" altLang="ko-KR" sz="1200" b="1" dirty="0" smtClean="0">
-                  <a:solidFill>
-                    <a:srgbClr val="FF0000"/>
-                  </a:solidFill>
-                </a:rPr>
-                <a:t>100</a:t>
-              </a:r>
-              <a:endParaRPr lang="ko-KR" altLang="en-US" sz="1200" b="1" dirty="0">
-                <a:solidFill>
-                  <a:srgbClr val="FF0000"/>
-                </a:solidFill>
-              </a:endParaRPr>
-            </a:p>
-          </p:txBody>
-        </p:sp>
-        <p:pic>
-          <p:nvPicPr>
-            <p:cNvPr id="15" name="그림 14"/>
-            <p:cNvPicPr>
-              <a:picLocks noChangeAspect="1"/>
-            </p:cNvPicPr>
-            <p:nvPr/>
-          </p:nvPicPr>
-          <p:blipFill>
-            <a:blip r:embed="rId3"/>
-            <a:stretch>
-              <a:fillRect/>
-            </a:stretch>
-          </p:blipFill>
-          <p:spPr>
-            <a:xfrm>
-              <a:off x="4979277" y="1752453"/>
-              <a:ext cx="1457528" cy="1495634"/>
-            </a:xfrm>
-            <a:prstGeom prst="rect">
-              <a:avLst/>
-            </a:prstGeom>
-          </p:spPr>
-        </p:pic>
-        <p:sp>
-          <p:nvSpPr>
-            <p:cNvPr id="16" name="직사각형 15"/>
-            <p:cNvSpPr/>
-            <p:nvPr/>
-          </p:nvSpPr>
-          <p:spPr>
-            <a:xfrm>
-              <a:off x="4975839" y="1762560"/>
-              <a:ext cx="1485863" cy="1488704"/>
-            </a:xfrm>
-            <a:prstGeom prst="rect">
-              <a:avLst/>
-            </a:prstGeom>
-            <a:noFill/>
-            <a:ln>
-              <a:solidFill>
-                <a:srgbClr val="FF0000"/>
-              </a:solidFill>
-            </a:ln>
-          </p:spPr>
-          <p:style>
-            <a:lnRef idx="2">
-              <a:schemeClr val="accent1">
-                <a:shade val="50000"/>
-              </a:schemeClr>
-            </a:lnRef>
-            <a:fillRef idx="1">
-              <a:schemeClr val="accent1"/>
-            </a:fillRef>
-            <a:effectRef idx="0">
-              <a:schemeClr val="accent1"/>
-            </a:effectRef>
-            <a:fontRef idx="minor">
-              <a:schemeClr val="lt1"/>
-            </a:fontRef>
-          </p:style>
-          <p:txBody>
-            <a:bodyPr rtlCol="0" anchor="ctr"/>
-            <a:lstStyle/>
-            <a:p>
-              <a:pPr algn="ctr"/>
-              <a:endParaRPr lang="ko-KR" altLang="en-US"/>
-            </a:p>
-          </p:txBody>
-        </p:sp>
-        <p:sp>
-          <p:nvSpPr>
-            <p:cNvPr id="17" name="TextBox 16"/>
-            <p:cNvSpPr txBox="1"/>
-            <p:nvPr/>
-          </p:nvSpPr>
-          <p:spPr>
-            <a:xfrm>
-              <a:off x="5840332" y="3280959"/>
-              <a:ext cx="842210" cy="369332"/>
-            </a:xfrm>
-            <a:prstGeom prst="rect">
-              <a:avLst/>
-            </a:prstGeom>
-            <a:noFill/>
-          </p:spPr>
-          <p:txBody>
-            <a:bodyPr wrap="square" rtlCol="0">
-              <a:spAutoFit/>
-            </a:bodyPr>
-            <a:lstStyle/>
-            <a:p>
-              <a:r>
-                <a:rPr lang="en-US" altLang="ko-KR" dirty="0" smtClean="0">
-                  <a:solidFill>
-                    <a:srgbClr val="FF0000"/>
-                  </a:solidFill>
-                </a:rPr>
-                <a:t>100</a:t>
-              </a:r>
-              <a:endParaRPr lang="ko-KR" altLang="en-US" dirty="0">
-                <a:solidFill>
-                  <a:srgbClr val="FF0000"/>
-                </a:solidFill>
-              </a:endParaRPr>
-            </a:p>
-          </p:txBody>
-        </p:sp>
-        <p:pic>
-          <p:nvPicPr>
-            <p:cNvPr id="18" name="그림 17"/>
-            <p:cNvPicPr>
-              <a:picLocks noChangeAspect="1"/>
-            </p:cNvPicPr>
-            <p:nvPr/>
-          </p:nvPicPr>
-          <p:blipFill>
-            <a:blip r:embed="rId4"/>
-            <a:stretch>
-              <a:fillRect/>
-            </a:stretch>
-          </p:blipFill>
-          <p:spPr>
-            <a:xfrm>
-              <a:off x="7756046" y="2015929"/>
-              <a:ext cx="866896" cy="895475"/>
-            </a:xfrm>
-            <a:prstGeom prst="rect">
-              <a:avLst/>
-            </a:prstGeom>
-          </p:spPr>
-        </p:pic>
-        <p:sp>
-          <p:nvSpPr>
-            <p:cNvPr id="19" name="TextBox 18"/>
-            <p:cNvSpPr txBox="1"/>
-            <p:nvPr/>
-          </p:nvSpPr>
-          <p:spPr>
-            <a:xfrm>
-              <a:off x="7615834" y="3041385"/>
-              <a:ext cx="1304125" cy="418517"/>
-            </a:xfrm>
-            <a:prstGeom prst="rect">
-              <a:avLst/>
-            </a:prstGeom>
-            <a:noFill/>
-          </p:spPr>
-          <p:txBody>
-            <a:bodyPr wrap="square" rtlCol="0">
-              <a:spAutoFit/>
-            </a:bodyPr>
-            <a:lstStyle/>
-            <a:p>
-              <a:r>
-                <a:rPr lang="ko-KR" altLang="en-US" dirty="0" smtClean="0"/>
-                <a:t>모델선택</a:t>
-              </a:r>
-              <a:endParaRPr lang="ko-KR" altLang="en-US" dirty="0"/>
-            </a:p>
-          </p:txBody>
-        </p:sp>
-        <p:pic>
-          <p:nvPicPr>
-            <p:cNvPr id="20" name="그림 19"/>
-            <p:cNvPicPr>
-              <a:picLocks noChangeAspect="1"/>
-            </p:cNvPicPr>
-            <p:nvPr/>
-          </p:nvPicPr>
-          <p:blipFill>
-            <a:blip r:embed="rId5">
-              <a:extLst>
-                <a:ext uri="{28A0092B-C50C-407E-A947-70E740481C1C}">
-                  <a14:useLocalDpi xmlns:a14="http://schemas.microsoft.com/office/drawing/2010/main" val="0"/>
-                </a:ext>
-              </a:extLst>
-            </a:blip>
-            <a:stretch>
-              <a:fillRect/>
-            </a:stretch>
-          </p:blipFill>
-          <p:spPr>
-            <a:xfrm>
-              <a:off x="9815400" y="1622822"/>
-              <a:ext cx="1494521" cy="1494521"/>
-            </a:xfrm>
-            <a:prstGeom prst="rect">
-              <a:avLst/>
-            </a:prstGeom>
-          </p:spPr>
-        </p:pic>
-        <p:sp>
-          <p:nvSpPr>
-            <p:cNvPr id="21" name="직사각형 20"/>
-            <p:cNvSpPr/>
-            <p:nvPr/>
-          </p:nvSpPr>
-          <p:spPr>
-            <a:xfrm>
-              <a:off x="9824058" y="1619596"/>
-              <a:ext cx="1485863" cy="1488704"/>
-            </a:xfrm>
-            <a:prstGeom prst="rect">
-              <a:avLst/>
-            </a:prstGeom>
-            <a:noFill/>
-            <a:ln>
-              <a:solidFill>
-                <a:srgbClr val="FF0000"/>
-              </a:solidFill>
-            </a:ln>
-          </p:spPr>
-          <p:style>
-            <a:lnRef idx="2">
-              <a:schemeClr val="accent1">
-                <a:shade val="50000"/>
-              </a:schemeClr>
-            </a:lnRef>
-            <a:fillRef idx="1">
-              <a:schemeClr val="accent1"/>
-            </a:fillRef>
-            <a:effectRef idx="0">
-              <a:schemeClr val="accent1"/>
-            </a:effectRef>
-            <a:fontRef idx="minor">
-              <a:schemeClr val="lt1"/>
-            </a:fontRef>
-          </p:style>
-          <p:txBody>
-            <a:bodyPr rtlCol="0" anchor="ctr"/>
-            <a:lstStyle/>
-            <a:p>
-              <a:pPr algn="ctr"/>
-              <a:endParaRPr lang="ko-KR" altLang="en-US"/>
-            </a:p>
-          </p:txBody>
-        </p:sp>
-        <p:sp>
-          <p:nvSpPr>
-            <p:cNvPr id="22" name="직사각형 21"/>
-            <p:cNvSpPr/>
-            <p:nvPr/>
-          </p:nvSpPr>
-          <p:spPr>
-            <a:xfrm>
-              <a:off x="7748966" y="2015929"/>
-              <a:ext cx="882633" cy="895475"/>
-            </a:xfrm>
-            <a:prstGeom prst="rect">
-              <a:avLst/>
-            </a:prstGeom>
-            <a:noFill/>
-            <a:ln>
-              <a:solidFill>
-                <a:srgbClr val="FF0000"/>
-              </a:solidFill>
-            </a:ln>
-          </p:spPr>
-          <p:style>
-            <a:lnRef idx="2">
-              <a:schemeClr val="accent1">
-                <a:shade val="50000"/>
-              </a:schemeClr>
-            </a:lnRef>
-            <a:fillRef idx="1">
-              <a:schemeClr val="accent1"/>
-            </a:fillRef>
-            <a:effectRef idx="0">
-              <a:schemeClr val="accent1"/>
-            </a:effectRef>
-            <a:fontRef idx="minor">
-              <a:schemeClr val="lt1"/>
-            </a:fontRef>
-          </p:style>
-          <p:txBody>
-            <a:bodyPr rtlCol="0" anchor="ctr"/>
-            <a:lstStyle/>
-            <a:p>
-              <a:pPr algn="ctr"/>
-              <a:endParaRPr lang="ko-KR" altLang="en-US"/>
-            </a:p>
-          </p:txBody>
-        </p:sp>
-        <p:sp>
-          <p:nvSpPr>
-            <p:cNvPr id="23" name="직사각형 22"/>
-            <p:cNvSpPr/>
-            <p:nvPr/>
-          </p:nvSpPr>
-          <p:spPr>
-            <a:xfrm>
-              <a:off x="10121343" y="1887028"/>
-              <a:ext cx="882633" cy="895475"/>
-            </a:xfrm>
-            <a:prstGeom prst="rect">
-              <a:avLst/>
-            </a:prstGeom>
-            <a:noFill/>
-            <a:ln>
-              <a:solidFill>
-                <a:srgbClr val="FF0000"/>
-              </a:solidFill>
-            </a:ln>
-          </p:spPr>
-          <p:style>
-            <a:lnRef idx="2">
-              <a:schemeClr val="accent1">
-                <a:shade val="50000"/>
-              </a:schemeClr>
-            </a:lnRef>
-            <a:fillRef idx="1">
-              <a:schemeClr val="accent1"/>
-            </a:fillRef>
-            <a:effectRef idx="0">
-              <a:schemeClr val="accent1"/>
-            </a:effectRef>
-            <a:fontRef idx="minor">
-              <a:schemeClr val="lt1"/>
-            </a:fontRef>
-          </p:style>
-          <p:txBody>
-            <a:bodyPr rtlCol="0" anchor="ctr"/>
-            <a:lstStyle/>
-            <a:p>
-              <a:pPr algn="ctr"/>
-              <a:endParaRPr lang="ko-KR" altLang="en-US"/>
-            </a:p>
-          </p:txBody>
-        </p:sp>
-        <p:sp>
-          <p:nvSpPr>
-            <p:cNvPr id="24" name="오른쪽 화살표 23"/>
-            <p:cNvSpPr/>
-            <p:nvPr/>
-          </p:nvSpPr>
-          <p:spPr>
-            <a:xfrm>
-              <a:off x="4211053" y="2506912"/>
-              <a:ext cx="469231" cy="404492"/>
-            </a:xfrm>
-            <a:prstGeom prst="rightArrow">
-              <a:avLst/>
-            </a:prstGeom>
-          </p:spPr>
-          <p:style>
-            <a:lnRef idx="2">
-              <a:schemeClr val="accent1">
-                <a:shade val="50000"/>
-              </a:schemeClr>
-            </a:lnRef>
-            <a:fillRef idx="1">
-              <a:schemeClr val="accent1"/>
-            </a:fillRef>
-            <a:effectRef idx="0">
-              <a:schemeClr val="accent1"/>
-            </a:effectRef>
-            <a:fontRef idx="minor">
-              <a:schemeClr val="lt1"/>
-            </a:fontRef>
-          </p:style>
-          <p:txBody>
-            <a:bodyPr rtlCol="0" anchor="ctr"/>
-            <a:lstStyle/>
-            <a:p>
-              <a:pPr algn="ctr"/>
-              <a:endParaRPr lang="ko-KR" altLang="en-US"/>
-            </a:p>
-          </p:txBody>
-        </p:sp>
-        <p:sp>
-          <p:nvSpPr>
-            <p:cNvPr id="25" name="오른쪽 화살표 24"/>
-            <p:cNvSpPr/>
-            <p:nvPr/>
-          </p:nvSpPr>
-          <p:spPr>
-            <a:xfrm>
-              <a:off x="6918122" y="2463666"/>
-              <a:ext cx="469231" cy="404492"/>
-            </a:xfrm>
-            <a:prstGeom prst="rightArrow">
-              <a:avLst/>
-            </a:prstGeom>
-          </p:spPr>
-          <p:style>
-            <a:lnRef idx="2">
-              <a:schemeClr val="accent1">
-                <a:shade val="50000"/>
-              </a:schemeClr>
-            </a:lnRef>
-            <a:fillRef idx="1">
-              <a:schemeClr val="accent1"/>
-            </a:fillRef>
-            <a:effectRef idx="0">
-              <a:schemeClr val="accent1"/>
-            </a:effectRef>
-            <a:fontRef idx="minor">
-              <a:schemeClr val="lt1"/>
-            </a:fontRef>
-          </p:style>
-          <p:txBody>
-            <a:bodyPr rtlCol="0" anchor="ctr"/>
-            <a:lstStyle/>
-            <a:p>
-              <a:pPr algn="ctr"/>
-              <a:endParaRPr lang="ko-KR" altLang="en-US"/>
-            </a:p>
-          </p:txBody>
-        </p:sp>
-        <p:sp>
-          <p:nvSpPr>
-            <p:cNvPr id="26" name="오른쪽 화살표 25"/>
-            <p:cNvSpPr/>
-            <p:nvPr/>
-          </p:nvSpPr>
-          <p:spPr>
-            <a:xfrm>
-              <a:off x="9040224" y="2463666"/>
-              <a:ext cx="469231" cy="404492"/>
-            </a:xfrm>
-            <a:prstGeom prst="rightArrow">
-              <a:avLst/>
-            </a:prstGeom>
-          </p:spPr>
-          <p:style>
-            <a:lnRef idx="2">
-              <a:schemeClr val="accent1">
-                <a:shade val="50000"/>
-              </a:schemeClr>
-            </a:lnRef>
-            <a:fillRef idx="1">
-              <a:schemeClr val="accent1"/>
-            </a:fillRef>
-            <a:effectRef idx="0">
-              <a:schemeClr val="accent1"/>
-            </a:effectRef>
-            <a:fontRef idx="minor">
-              <a:schemeClr val="lt1"/>
-            </a:fontRef>
-          </p:style>
-          <p:txBody>
-            <a:bodyPr rtlCol="0" anchor="ctr"/>
-            <a:lstStyle/>
-            <a:p>
-              <a:pPr algn="ctr"/>
-              <a:endParaRPr lang="ko-KR" altLang="en-US"/>
-            </a:p>
-          </p:txBody>
-        </p:sp>
-      </p:grpSp>
-      <p:grpSp>
-        <p:nvGrpSpPr>
-          <p:cNvPr id="41" name="그룹 40"/>
-          <p:cNvGrpSpPr/>
-          <p:nvPr/>
-        </p:nvGrpSpPr>
-        <p:grpSpPr>
-          <a:xfrm>
-            <a:off x="5468426" y="4858797"/>
-            <a:ext cx="6312569" cy="1698485"/>
-            <a:chOff x="838200" y="2681580"/>
-            <a:chExt cx="10515601" cy="3239989"/>
-          </a:xfrm>
-        </p:grpSpPr>
-        <p:sp>
-          <p:nvSpPr>
-            <p:cNvPr id="42" name="제목 1"/>
-            <p:cNvSpPr txBox="1">
-              <a:spLocks/>
-            </p:cNvSpPr>
-            <p:nvPr/>
-          </p:nvSpPr>
-          <p:spPr>
-            <a:xfrm>
-              <a:off x="838201" y="2681580"/>
-              <a:ext cx="10515600" cy="1325563"/>
-            </a:xfrm>
-            <a:prstGeom prst="rect">
-              <a:avLst/>
-            </a:prstGeom>
-          </p:spPr>
-          <p:txBody>
-            <a:bodyPr vert="horz" lIns="91440" tIns="45720" rIns="91440" bIns="45720" rtlCol="0" anchor="ctr">
-              <a:normAutofit lnSpcReduction="10000"/>
-            </a:bodyPr>
-            <a:lstStyle>
-              <a:lvl1pPr algn="l" defTabSz="914400" rtl="0" eaLnBrk="1" latinLnBrk="1" hangingPunct="1">
-                <a:lnSpc>
-                  <a:spcPct val="90000"/>
-                </a:lnSpc>
-                <a:spcBef>
-                  <a:spcPct val="0"/>
-                </a:spcBef>
-                <a:buNone/>
-                <a:defRPr sz="4400" kern="1200">
-                  <a:solidFill>
-                    <a:schemeClr val="tx1"/>
-                  </a:solidFill>
-                  <a:latin typeface="+mj-lt"/>
-                  <a:ea typeface="+mj-ea"/>
-                  <a:cs typeface="+mj-cs"/>
-                </a:defRPr>
-              </a:lvl1pPr>
-            </a:lstStyle>
-            <a:p>
-              <a:r>
-                <a:rPr lang="ko-KR" altLang="en-US" smtClean="0"/>
-                <a:t>모델선정이 않되는 경우</a:t>
-              </a:r>
-              <a:endParaRPr lang="ko-KR" altLang="en-US" dirty="0"/>
-            </a:p>
-          </p:txBody>
-        </p:sp>
-        <p:pic>
-          <p:nvPicPr>
-            <p:cNvPr id="43" name="내용 개체 틀 3"/>
-            <p:cNvPicPr>
-              <a:picLocks noChangeAspect="1"/>
-            </p:cNvPicPr>
-            <p:nvPr/>
-          </p:nvPicPr>
-          <p:blipFill>
-            <a:blip r:embed="rId6">
-              <a:extLst>
-                <a:ext uri="{28A0092B-C50C-407E-A947-70E740481C1C}">
-                  <a14:useLocalDpi xmlns:a14="http://schemas.microsoft.com/office/drawing/2010/main" val="0"/>
-                </a:ext>
-              </a:extLst>
-            </a:blip>
-            <a:stretch>
-              <a:fillRect/>
-            </a:stretch>
-          </p:blipFill>
-          <p:spPr>
-            <a:xfrm>
-              <a:off x="838200" y="4007142"/>
-              <a:ext cx="1914427" cy="1914427"/>
-            </a:xfrm>
-            <a:prstGeom prst="rect">
-              <a:avLst/>
-            </a:prstGeom>
-          </p:spPr>
-        </p:pic>
-        <p:pic>
-          <p:nvPicPr>
-            <p:cNvPr id="44" name="그림 43"/>
-            <p:cNvPicPr>
-              <a:picLocks noChangeAspect="1"/>
-            </p:cNvPicPr>
-            <p:nvPr/>
-          </p:nvPicPr>
-          <p:blipFill>
-            <a:blip r:embed="rId7">
-              <a:extLst>
-                <a:ext uri="{28A0092B-C50C-407E-A947-70E740481C1C}">
-                  <a14:useLocalDpi xmlns:a14="http://schemas.microsoft.com/office/drawing/2010/main" val="0"/>
-                </a:ext>
-              </a:extLst>
-            </a:blip>
-            <a:stretch>
-              <a:fillRect/>
-            </a:stretch>
-          </p:blipFill>
-          <p:spPr>
-            <a:xfrm>
-              <a:off x="2923684" y="4007141"/>
-              <a:ext cx="1914427" cy="1914427"/>
-            </a:xfrm>
-            <a:prstGeom prst="rect">
-              <a:avLst/>
-            </a:prstGeom>
-          </p:spPr>
-        </p:pic>
-        <p:pic>
-          <p:nvPicPr>
-            <p:cNvPr id="45" name="그림 44"/>
-            <p:cNvPicPr>
-              <a:picLocks noChangeAspect="1"/>
-            </p:cNvPicPr>
-            <p:nvPr/>
-          </p:nvPicPr>
-          <p:blipFill>
-            <a:blip r:embed="rId8">
-              <a:extLst>
-                <a:ext uri="{28A0092B-C50C-407E-A947-70E740481C1C}">
-                  <a14:useLocalDpi xmlns:a14="http://schemas.microsoft.com/office/drawing/2010/main" val="0"/>
-                </a:ext>
-              </a:extLst>
-            </a:blip>
-            <a:stretch>
-              <a:fillRect/>
-            </a:stretch>
-          </p:blipFill>
-          <p:spPr>
-            <a:xfrm>
-              <a:off x="5009167" y="4007140"/>
-              <a:ext cx="1914427" cy="1914427"/>
-            </a:xfrm>
-            <a:prstGeom prst="rect">
-              <a:avLst/>
-            </a:prstGeom>
-          </p:spPr>
-        </p:pic>
-        <p:pic>
-          <p:nvPicPr>
-            <p:cNvPr id="46" name="그림 45"/>
-            <p:cNvPicPr>
-              <a:picLocks noChangeAspect="1"/>
-            </p:cNvPicPr>
-            <p:nvPr/>
-          </p:nvPicPr>
-          <p:blipFill>
-            <a:blip r:embed="rId9">
-              <a:extLst>
-                <a:ext uri="{28A0092B-C50C-407E-A947-70E740481C1C}">
-                  <a14:useLocalDpi xmlns:a14="http://schemas.microsoft.com/office/drawing/2010/main" val="0"/>
-                </a:ext>
-              </a:extLst>
-            </a:blip>
-            <a:stretch>
-              <a:fillRect/>
-            </a:stretch>
-          </p:blipFill>
-          <p:spPr>
-            <a:xfrm>
-              <a:off x="6923593" y="4011855"/>
-              <a:ext cx="1909712" cy="1909712"/>
-            </a:xfrm>
-            <a:prstGeom prst="rect">
-              <a:avLst/>
-            </a:prstGeom>
-          </p:spPr>
-        </p:pic>
-        <p:pic>
-          <p:nvPicPr>
-            <p:cNvPr id="47" name="그림 46"/>
-            <p:cNvPicPr>
-              <a:picLocks noChangeAspect="1"/>
-            </p:cNvPicPr>
-            <p:nvPr/>
-          </p:nvPicPr>
-          <p:blipFill>
-            <a:blip r:embed="rId10">
-              <a:extLst>
-                <a:ext uri="{28A0092B-C50C-407E-A947-70E740481C1C}">
-                  <a14:useLocalDpi xmlns:a14="http://schemas.microsoft.com/office/drawing/2010/main" val="0"/>
-                </a:ext>
-              </a:extLst>
-            </a:blip>
-            <a:stretch>
-              <a:fillRect/>
-            </a:stretch>
-          </p:blipFill>
-          <p:spPr>
-            <a:xfrm>
-              <a:off x="9009077" y="4007140"/>
-              <a:ext cx="1909714" cy="1909714"/>
-            </a:xfrm>
-            <a:prstGeom prst="rect">
-              <a:avLst/>
-            </a:prstGeom>
-          </p:spPr>
-        </p:pic>
-      </p:grpSp>
-    </p:spTree>
-    <p:extLst>
-      <p:ext uri="{BB962C8B-B14F-4D97-AF65-F5344CB8AC3E}">
-        <p14:creationId xmlns:p14="http://schemas.microsoft.com/office/powerpoint/2010/main" val="2380020911"/>
-      </p:ext>
-    </p:extLst>
-  </p:cSld>
-  <p:clrMapOvr>
-    <a:masterClrMapping/>
-  </p:clrMapOvr>
-</p:sld>
-</file>
-
 <file path=ppt/slides/slide3.xml><?xml version="1.0" encoding="utf-8"?>
 <p:sld xmlns:a="http://schemas.openxmlformats.org/drawingml/2006/main" xmlns:r="http://schemas.openxmlformats.org/officeDocument/2006/relationships" xmlns:p="http://schemas.openxmlformats.org/presentationml/2006/main">
   <p:cSld>
@@ -20643,25 +19748,6 @@
               <a:rPr lang="ko-KR" altLang="en-US" dirty="0" smtClean="0"/>
               <a:t>시스템 구성</a:t>
             </a:r>
-            <a:endParaRPr lang="ko-KR" altLang="en-US" dirty="0"/>
-          </a:p>
-        </p:txBody>
-      </p:sp>
-      <p:sp>
-        <p:nvSpPr>
-          <p:cNvPr id="3" name="내용 개체 틀 2"/>
-          <p:cNvSpPr>
-            <a:spLocks noGrp="1"/>
-          </p:cNvSpPr>
-          <p:nvPr>
-            <p:ph idx="1"/>
-          </p:nvPr>
-        </p:nvSpPr>
-        <p:spPr/>
-        <p:txBody>
-          <a:bodyPr/>
-          <a:lstStyle/>
-          <a:p>
             <a:endParaRPr lang="ko-KR" altLang="en-US" dirty="0"/>
           </a:p>
         </p:txBody>
@@ -22400,6 +21486,1183 @@
       </p:sp>
       <p:grpSp>
         <p:nvGrpSpPr>
+          <p:cNvPr id="27" name="그룹 26"/>
+          <p:cNvGrpSpPr/>
+          <p:nvPr/>
+        </p:nvGrpSpPr>
+        <p:grpSpPr>
+          <a:xfrm>
+            <a:off x="838200" y="1690688"/>
+            <a:ext cx="10118971" cy="4548980"/>
+            <a:chOff x="114739" y="365125"/>
+            <a:chExt cx="11239061" cy="5154781"/>
+          </a:xfrm>
+        </p:grpSpPr>
+        <p:sp>
+          <p:nvSpPr>
+            <p:cNvPr id="4" name="제목 1"/>
+            <p:cNvSpPr txBox="1">
+              <a:spLocks/>
+            </p:cNvSpPr>
+            <p:nvPr/>
+          </p:nvSpPr>
+          <p:spPr>
+            <a:xfrm>
+              <a:off x="838200" y="365125"/>
+              <a:ext cx="10515600" cy="1325563"/>
+            </a:xfrm>
+            <a:prstGeom prst="rect">
+              <a:avLst/>
+            </a:prstGeom>
+          </p:spPr>
+          <p:txBody>
+            <a:bodyPr vert="horz" lIns="91440" tIns="45720" rIns="91440" bIns="45720" rtlCol="0" anchor="ctr">
+              <a:normAutofit/>
+            </a:bodyPr>
+            <a:lstStyle>
+              <a:lvl1pPr algn="l" defTabSz="914400" rtl="0" eaLnBrk="1" latinLnBrk="1" hangingPunct="1">
+                <a:lnSpc>
+                  <a:spcPct val="90000"/>
+                </a:lnSpc>
+                <a:spcBef>
+                  <a:spcPct val="0"/>
+                </a:spcBef>
+                <a:buNone/>
+                <a:defRPr sz="4400" kern="1200">
+                  <a:solidFill>
+                    <a:schemeClr val="tx1"/>
+                  </a:solidFill>
+                  <a:latin typeface="+mj-lt"/>
+                  <a:ea typeface="+mj-ea"/>
+                  <a:cs typeface="+mj-cs"/>
+                </a:defRPr>
+              </a:lvl1pPr>
+            </a:lstStyle>
+            <a:p>
+              <a:r>
+                <a:rPr lang="ko-KR" altLang="en-US" dirty="0" smtClean="0"/>
+                <a:t>모델 비교로 </a:t>
+              </a:r>
+              <a:r>
+                <a:rPr lang="ko-KR" altLang="en-US" dirty="0" err="1" smtClean="0"/>
+                <a:t>미마킹</a:t>
+              </a:r>
+              <a:r>
+                <a:rPr lang="ko-KR" altLang="en-US" dirty="0" smtClean="0"/>
+                <a:t> 확인</a:t>
+              </a:r>
+              <a:endParaRPr lang="ko-KR" altLang="en-US" dirty="0"/>
+            </a:p>
+          </p:txBody>
+        </p:sp>
+        <p:pic>
+          <p:nvPicPr>
+            <p:cNvPr id="5" name="내용 개체 틀 3"/>
+            <p:cNvPicPr>
+              <a:picLocks noChangeAspect="1"/>
+            </p:cNvPicPr>
+            <p:nvPr/>
+          </p:nvPicPr>
+          <p:blipFill>
+            <a:blip r:embed="rId2" cstate="print">
+              <a:extLst>
+                <a:ext uri="{28A0092B-C50C-407E-A947-70E740481C1C}">
+                  <a14:useLocalDpi xmlns:a14="http://schemas.microsoft.com/office/drawing/2010/main" val="0"/>
+                </a:ext>
+              </a:extLst>
+            </a:blip>
+            <a:stretch>
+              <a:fillRect/>
+            </a:stretch>
+          </p:blipFill>
+          <p:spPr>
+            <a:xfrm>
+              <a:off x="838200" y="1690688"/>
+              <a:ext cx="3121152" cy="3121152"/>
+            </a:xfrm>
+            <a:prstGeom prst="rect">
+              <a:avLst/>
+            </a:prstGeom>
+          </p:spPr>
+        </p:pic>
+        <p:sp>
+          <p:nvSpPr>
+            <p:cNvPr id="6" name="직사각형 5"/>
+            <p:cNvSpPr/>
+            <p:nvPr/>
+          </p:nvSpPr>
+          <p:spPr>
+            <a:xfrm>
+              <a:off x="838200" y="1690688"/>
+              <a:ext cx="3121152" cy="3121152"/>
+            </a:xfrm>
+            <a:prstGeom prst="rect">
+              <a:avLst/>
+            </a:prstGeom>
+            <a:noFill/>
+            <a:ln>
+              <a:solidFill>
+                <a:schemeClr val="tx1"/>
+              </a:solidFill>
+            </a:ln>
+          </p:spPr>
+          <p:style>
+            <a:lnRef idx="2">
+              <a:schemeClr val="accent1">
+                <a:shade val="50000"/>
+              </a:schemeClr>
+            </a:lnRef>
+            <a:fillRef idx="1">
+              <a:schemeClr val="accent1"/>
+            </a:fillRef>
+            <a:effectRef idx="0">
+              <a:schemeClr val="accent1"/>
+            </a:effectRef>
+            <a:fontRef idx="minor">
+              <a:schemeClr val="lt1"/>
+            </a:fontRef>
+          </p:style>
+          <p:txBody>
+            <a:bodyPr rtlCol="0" anchor="ctr"/>
+            <a:lstStyle/>
+            <a:p>
+              <a:pPr algn="ctr"/>
+              <a:endParaRPr lang="ko-KR" altLang="en-US"/>
+            </a:p>
+          </p:txBody>
+        </p:sp>
+        <p:sp>
+          <p:nvSpPr>
+            <p:cNvPr id="7" name="TextBox 6"/>
+            <p:cNvSpPr txBox="1"/>
+            <p:nvPr/>
+          </p:nvSpPr>
+          <p:spPr>
+            <a:xfrm>
+              <a:off x="2031813" y="5101389"/>
+              <a:ext cx="929784" cy="418517"/>
+            </a:xfrm>
+            <a:prstGeom prst="rect">
+              <a:avLst/>
+            </a:prstGeom>
+            <a:noFill/>
+          </p:spPr>
+          <p:txBody>
+            <a:bodyPr wrap="square" rtlCol="0">
+              <a:spAutoFit/>
+            </a:bodyPr>
+            <a:lstStyle/>
+            <a:p>
+              <a:r>
+                <a:rPr lang="en-US" altLang="ko-KR" dirty="0" smtClean="0"/>
+                <a:t>1024</a:t>
+              </a:r>
+              <a:endParaRPr lang="ko-KR" altLang="en-US" dirty="0"/>
+            </a:p>
+          </p:txBody>
+        </p:sp>
+        <p:sp>
+          <p:nvSpPr>
+            <p:cNvPr id="8" name="TextBox 7"/>
+            <p:cNvSpPr txBox="1"/>
+            <p:nvPr/>
+          </p:nvSpPr>
+          <p:spPr>
+            <a:xfrm>
+              <a:off x="114739" y="3379302"/>
+              <a:ext cx="876469" cy="418517"/>
+            </a:xfrm>
+            <a:prstGeom prst="rect">
+              <a:avLst/>
+            </a:prstGeom>
+            <a:noFill/>
+          </p:spPr>
+          <p:txBody>
+            <a:bodyPr wrap="square" rtlCol="0">
+              <a:spAutoFit/>
+            </a:bodyPr>
+            <a:lstStyle/>
+            <a:p>
+              <a:r>
+                <a:rPr lang="en-US" altLang="ko-KR" dirty="0" smtClean="0"/>
+                <a:t>1024</a:t>
+              </a:r>
+              <a:endParaRPr lang="ko-KR" altLang="en-US" dirty="0"/>
+            </a:p>
+          </p:txBody>
+        </p:sp>
+        <p:cxnSp>
+          <p:nvCxnSpPr>
+            <p:cNvPr id="9" name="직선 연결선 8"/>
+            <p:cNvCxnSpPr>
+              <a:stCxn id="6" idx="0"/>
+              <a:endCxn id="5" idx="2"/>
+            </p:cNvCxnSpPr>
+            <p:nvPr/>
+          </p:nvCxnSpPr>
+          <p:spPr>
+            <a:xfrm>
+              <a:off x="2398776" y="1690688"/>
+              <a:ext cx="0" cy="3121152"/>
+            </a:xfrm>
+            <a:prstGeom prst="line">
+              <a:avLst/>
+            </a:prstGeom>
+            <a:ln>
+              <a:solidFill>
+                <a:srgbClr val="FF0000"/>
+              </a:solidFill>
+            </a:ln>
+          </p:spPr>
+          <p:style>
+            <a:lnRef idx="1">
+              <a:schemeClr val="accent1"/>
+            </a:lnRef>
+            <a:fillRef idx="0">
+              <a:schemeClr val="accent1"/>
+            </a:fillRef>
+            <a:effectRef idx="0">
+              <a:schemeClr val="accent1"/>
+            </a:effectRef>
+            <a:fontRef idx="minor">
+              <a:schemeClr val="tx1"/>
+            </a:fontRef>
+          </p:style>
+        </p:cxnSp>
+        <p:cxnSp>
+          <p:nvCxnSpPr>
+            <p:cNvPr id="10" name="직선 연결선 9"/>
+            <p:cNvCxnSpPr>
+              <a:stCxn id="5" idx="1"/>
+              <a:endCxn id="5" idx="3"/>
+            </p:cNvCxnSpPr>
+            <p:nvPr/>
+          </p:nvCxnSpPr>
+          <p:spPr>
+            <a:xfrm>
+              <a:off x="838200" y="3251264"/>
+              <a:ext cx="3121152" cy="0"/>
+            </a:xfrm>
+            <a:prstGeom prst="line">
+              <a:avLst/>
+            </a:prstGeom>
+            <a:ln>
+              <a:solidFill>
+                <a:srgbClr val="FF0000"/>
+              </a:solidFill>
+            </a:ln>
+          </p:spPr>
+          <p:style>
+            <a:lnRef idx="1">
+              <a:schemeClr val="accent1"/>
+            </a:lnRef>
+            <a:fillRef idx="0">
+              <a:schemeClr val="accent1"/>
+            </a:fillRef>
+            <a:effectRef idx="0">
+              <a:schemeClr val="accent1"/>
+            </a:effectRef>
+            <a:fontRef idx="minor">
+              <a:schemeClr val="tx1"/>
+            </a:fontRef>
+          </p:style>
+        </p:cxnSp>
+        <p:sp>
+          <p:nvSpPr>
+            <p:cNvPr id="11" name="직사각형 10"/>
+            <p:cNvSpPr/>
+            <p:nvPr/>
+          </p:nvSpPr>
+          <p:spPr>
+            <a:xfrm>
+              <a:off x="2168785" y="3037208"/>
+              <a:ext cx="439923" cy="428771"/>
+            </a:xfrm>
+            <a:prstGeom prst="rect">
+              <a:avLst/>
+            </a:prstGeom>
+            <a:noFill/>
+            <a:ln>
+              <a:solidFill>
+                <a:srgbClr val="FF0000"/>
+              </a:solidFill>
+            </a:ln>
+          </p:spPr>
+          <p:style>
+            <a:lnRef idx="2">
+              <a:schemeClr val="accent1">
+                <a:shade val="50000"/>
+              </a:schemeClr>
+            </a:lnRef>
+            <a:fillRef idx="1">
+              <a:schemeClr val="accent1"/>
+            </a:fillRef>
+            <a:effectRef idx="0">
+              <a:schemeClr val="accent1"/>
+            </a:effectRef>
+            <a:fontRef idx="minor">
+              <a:schemeClr val="lt1"/>
+            </a:fontRef>
+          </p:style>
+          <p:txBody>
+            <a:bodyPr rtlCol="0" anchor="ctr"/>
+            <a:lstStyle/>
+            <a:p>
+              <a:pPr algn="ctr"/>
+              <a:endParaRPr lang="ko-KR" altLang="en-US"/>
+            </a:p>
+          </p:txBody>
+        </p:sp>
+        <p:sp>
+          <p:nvSpPr>
+            <p:cNvPr id="12" name="TextBox 11"/>
+            <p:cNvSpPr txBox="1"/>
+            <p:nvPr/>
+          </p:nvSpPr>
+          <p:spPr>
+            <a:xfrm>
+              <a:off x="6490037" y="1824645"/>
+              <a:ext cx="842210" cy="369332"/>
+            </a:xfrm>
+            <a:prstGeom prst="rect">
+              <a:avLst/>
+            </a:prstGeom>
+            <a:noFill/>
+          </p:spPr>
+          <p:txBody>
+            <a:bodyPr wrap="square" rtlCol="0">
+              <a:spAutoFit/>
+            </a:bodyPr>
+            <a:lstStyle/>
+            <a:p>
+              <a:r>
+                <a:rPr lang="en-US" altLang="ko-KR" dirty="0" smtClean="0">
+                  <a:solidFill>
+                    <a:srgbClr val="FF0000"/>
+                  </a:solidFill>
+                </a:rPr>
+                <a:t>100</a:t>
+              </a:r>
+              <a:endParaRPr lang="ko-KR" altLang="en-US" dirty="0">
+                <a:solidFill>
+                  <a:srgbClr val="FF0000"/>
+                </a:solidFill>
+              </a:endParaRPr>
+            </a:p>
+          </p:txBody>
+        </p:sp>
+        <p:sp>
+          <p:nvSpPr>
+            <p:cNvPr id="13" name="TextBox 12"/>
+            <p:cNvSpPr txBox="1"/>
+            <p:nvPr/>
+          </p:nvSpPr>
+          <p:spPr>
+            <a:xfrm>
+              <a:off x="2010337" y="3379301"/>
+              <a:ext cx="842210" cy="276999"/>
+            </a:xfrm>
+            <a:prstGeom prst="rect">
+              <a:avLst/>
+            </a:prstGeom>
+            <a:noFill/>
+          </p:spPr>
+          <p:txBody>
+            <a:bodyPr wrap="square" rtlCol="0">
+              <a:spAutoFit/>
+            </a:bodyPr>
+            <a:lstStyle/>
+            <a:p>
+              <a:r>
+                <a:rPr lang="en-US" altLang="ko-KR" sz="1200" b="1" dirty="0" smtClean="0">
+                  <a:solidFill>
+                    <a:srgbClr val="FF0000"/>
+                  </a:solidFill>
+                </a:rPr>
+                <a:t>100</a:t>
+              </a:r>
+              <a:endParaRPr lang="ko-KR" altLang="en-US" sz="1200" b="1" dirty="0">
+                <a:solidFill>
+                  <a:srgbClr val="FF0000"/>
+                </a:solidFill>
+              </a:endParaRPr>
+            </a:p>
+          </p:txBody>
+        </p:sp>
+        <p:sp>
+          <p:nvSpPr>
+            <p:cNvPr id="14" name="TextBox 13"/>
+            <p:cNvSpPr txBox="1"/>
+            <p:nvPr/>
+          </p:nvSpPr>
+          <p:spPr>
+            <a:xfrm>
+              <a:off x="2441820" y="2978844"/>
+              <a:ext cx="842210" cy="276999"/>
+            </a:xfrm>
+            <a:prstGeom prst="rect">
+              <a:avLst/>
+            </a:prstGeom>
+            <a:noFill/>
+          </p:spPr>
+          <p:txBody>
+            <a:bodyPr wrap="square" rtlCol="0">
+              <a:spAutoFit/>
+            </a:bodyPr>
+            <a:lstStyle/>
+            <a:p>
+              <a:r>
+                <a:rPr lang="en-US" altLang="ko-KR" sz="1200" b="1" dirty="0" smtClean="0">
+                  <a:solidFill>
+                    <a:srgbClr val="FF0000"/>
+                  </a:solidFill>
+                </a:rPr>
+                <a:t>100</a:t>
+              </a:r>
+              <a:endParaRPr lang="ko-KR" altLang="en-US" sz="1200" b="1" dirty="0">
+                <a:solidFill>
+                  <a:srgbClr val="FF0000"/>
+                </a:solidFill>
+              </a:endParaRPr>
+            </a:p>
+          </p:txBody>
+        </p:sp>
+        <p:pic>
+          <p:nvPicPr>
+            <p:cNvPr id="15" name="그림 14"/>
+            <p:cNvPicPr>
+              <a:picLocks noChangeAspect="1"/>
+            </p:cNvPicPr>
+            <p:nvPr/>
+          </p:nvPicPr>
+          <p:blipFill>
+            <a:blip r:embed="rId3"/>
+            <a:stretch>
+              <a:fillRect/>
+            </a:stretch>
+          </p:blipFill>
+          <p:spPr>
+            <a:xfrm>
+              <a:off x="4979277" y="1752453"/>
+              <a:ext cx="1457528" cy="1495634"/>
+            </a:xfrm>
+            <a:prstGeom prst="rect">
+              <a:avLst/>
+            </a:prstGeom>
+          </p:spPr>
+        </p:pic>
+        <p:sp>
+          <p:nvSpPr>
+            <p:cNvPr id="16" name="직사각형 15"/>
+            <p:cNvSpPr/>
+            <p:nvPr/>
+          </p:nvSpPr>
+          <p:spPr>
+            <a:xfrm>
+              <a:off x="4975839" y="1762560"/>
+              <a:ext cx="1485863" cy="1488704"/>
+            </a:xfrm>
+            <a:prstGeom prst="rect">
+              <a:avLst/>
+            </a:prstGeom>
+            <a:noFill/>
+            <a:ln>
+              <a:solidFill>
+                <a:srgbClr val="FF0000"/>
+              </a:solidFill>
+            </a:ln>
+          </p:spPr>
+          <p:style>
+            <a:lnRef idx="2">
+              <a:schemeClr val="accent1">
+                <a:shade val="50000"/>
+              </a:schemeClr>
+            </a:lnRef>
+            <a:fillRef idx="1">
+              <a:schemeClr val="accent1"/>
+            </a:fillRef>
+            <a:effectRef idx="0">
+              <a:schemeClr val="accent1"/>
+            </a:effectRef>
+            <a:fontRef idx="minor">
+              <a:schemeClr val="lt1"/>
+            </a:fontRef>
+          </p:style>
+          <p:txBody>
+            <a:bodyPr rtlCol="0" anchor="ctr"/>
+            <a:lstStyle/>
+            <a:p>
+              <a:pPr algn="ctr"/>
+              <a:endParaRPr lang="ko-KR" altLang="en-US"/>
+            </a:p>
+          </p:txBody>
+        </p:sp>
+        <p:sp>
+          <p:nvSpPr>
+            <p:cNvPr id="17" name="TextBox 16"/>
+            <p:cNvSpPr txBox="1"/>
+            <p:nvPr/>
+          </p:nvSpPr>
+          <p:spPr>
+            <a:xfrm>
+              <a:off x="5840332" y="3280959"/>
+              <a:ext cx="842210" cy="369332"/>
+            </a:xfrm>
+            <a:prstGeom prst="rect">
+              <a:avLst/>
+            </a:prstGeom>
+            <a:noFill/>
+          </p:spPr>
+          <p:txBody>
+            <a:bodyPr wrap="square" rtlCol="0">
+              <a:spAutoFit/>
+            </a:bodyPr>
+            <a:lstStyle/>
+            <a:p>
+              <a:r>
+                <a:rPr lang="en-US" altLang="ko-KR" dirty="0" smtClean="0">
+                  <a:solidFill>
+                    <a:srgbClr val="FF0000"/>
+                  </a:solidFill>
+                </a:rPr>
+                <a:t>100</a:t>
+              </a:r>
+              <a:endParaRPr lang="ko-KR" altLang="en-US" dirty="0">
+                <a:solidFill>
+                  <a:srgbClr val="FF0000"/>
+                </a:solidFill>
+              </a:endParaRPr>
+            </a:p>
+          </p:txBody>
+        </p:sp>
+        <p:pic>
+          <p:nvPicPr>
+            <p:cNvPr id="18" name="그림 17"/>
+            <p:cNvPicPr>
+              <a:picLocks noChangeAspect="1"/>
+            </p:cNvPicPr>
+            <p:nvPr/>
+          </p:nvPicPr>
+          <p:blipFill>
+            <a:blip r:embed="rId4"/>
+            <a:stretch>
+              <a:fillRect/>
+            </a:stretch>
+          </p:blipFill>
+          <p:spPr>
+            <a:xfrm>
+              <a:off x="7756046" y="2015929"/>
+              <a:ext cx="866896" cy="895475"/>
+            </a:xfrm>
+            <a:prstGeom prst="rect">
+              <a:avLst/>
+            </a:prstGeom>
+          </p:spPr>
+        </p:pic>
+        <p:sp>
+          <p:nvSpPr>
+            <p:cNvPr id="19" name="TextBox 18"/>
+            <p:cNvSpPr txBox="1"/>
+            <p:nvPr/>
+          </p:nvSpPr>
+          <p:spPr>
+            <a:xfrm>
+              <a:off x="7615834" y="3041385"/>
+              <a:ext cx="1304125" cy="418517"/>
+            </a:xfrm>
+            <a:prstGeom prst="rect">
+              <a:avLst/>
+            </a:prstGeom>
+            <a:noFill/>
+          </p:spPr>
+          <p:txBody>
+            <a:bodyPr wrap="square" rtlCol="0">
+              <a:spAutoFit/>
+            </a:bodyPr>
+            <a:lstStyle/>
+            <a:p>
+              <a:r>
+                <a:rPr lang="ko-KR" altLang="en-US" dirty="0" smtClean="0"/>
+                <a:t>모델선택</a:t>
+              </a:r>
+              <a:endParaRPr lang="ko-KR" altLang="en-US" dirty="0"/>
+            </a:p>
+          </p:txBody>
+        </p:sp>
+        <p:pic>
+          <p:nvPicPr>
+            <p:cNvPr id="20" name="그림 19"/>
+            <p:cNvPicPr>
+              <a:picLocks noChangeAspect="1"/>
+            </p:cNvPicPr>
+            <p:nvPr/>
+          </p:nvPicPr>
+          <p:blipFill>
+            <a:blip r:embed="rId5">
+              <a:extLst>
+                <a:ext uri="{28A0092B-C50C-407E-A947-70E740481C1C}">
+                  <a14:useLocalDpi xmlns:a14="http://schemas.microsoft.com/office/drawing/2010/main" val="0"/>
+                </a:ext>
+              </a:extLst>
+            </a:blip>
+            <a:stretch>
+              <a:fillRect/>
+            </a:stretch>
+          </p:blipFill>
+          <p:spPr>
+            <a:xfrm>
+              <a:off x="9815400" y="1622822"/>
+              <a:ext cx="1494521" cy="1494521"/>
+            </a:xfrm>
+            <a:prstGeom prst="rect">
+              <a:avLst/>
+            </a:prstGeom>
+          </p:spPr>
+        </p:pic>
+        <p:sp>
+          <p:nvSpPr>
+            <p:cNvPr id="21" name="직사각형 20"/>
+            <p:cNvSpPr/>
+            <p:nvPr/>
+          </p:nvSpPr>
+          <p:spPr>
+            <a:xfrm>
+              <a:off x="9824058" y="1619596"/>
+              <a:ext cx="1485863" cy="1488704"/>
+            </a:xfrm>
+            <a:prstGeom prst="rect">
+              <a:avLst/>
+            </a:prstGeom>
+            <a:noFill/>
+            <a:ln>
+              <a:solidFill>
+                <a:srgbClr val="FF0000"/>
+              </a:solidFill>
+            </a:ln>
+          </p:spPr>
+          <p:style>
+            <a:lnRef idx="2">
+              <a:schemeClr val="accent1">
+                <a:shade val="50000"/>
+              </a:schemeClr>
+            </a:lnRef>
+            <a:fillRef idx="1">
+              <a:schemeClr val="accent1"/>
+            </a:fillRef>
+            <a:effectRef idx="0">
+              <a:schemeClr val="accent1"/>
+            </a:effectRef>
+            <a:fontRef idx="minor">
+              <a:schemeClr val="lt1"/>
+            </a:fontRef>
+          </p:style>
+          <p:txBody>
+            <a:bodyPr rtlCol="0" anchor="ctr"/>
+            <a:lstStyle/>
+            <a:p>
+              <a:pPr algn="ctr"/>
+              <a:endParaRPr lang="ko-KR" altLang="en-US"/>
+            </a:p>
+          </p:txBody>
+        </p:sp>
+        <p:sp>
+          <p:nvSpPr>
+            <p:cNvPr id="22" name="직사각형 21"/>
+            <p:cNvSpPr/>
+            <p:nvPr/>
+          </p:nvSpPr>
+          <p:spPr>
+            <a:xfrm>
+              <a:off x="7748966" y="2015929"/>
+              <a:ext cx="882633" cy="895475"/>
+            </a:xfrm>
+            <a:prstGeom prst="rect">
+              <a:avLst/>
+            </a:prstGeom>
+            <a:noFill/>
+            <a:ln>
+              <a:solidFill>
+                <a:srgbClr val="FF0000"/>
+              </a:solidFill>
+            </a:ln>
+          </p:spPr>
+          <p:style>
+            <a:lnRef idx="2">
+              <a:schemeClr val="accent1">
+                <a:shade val="50000"/>
+              </a:schemeClr>
+            </a:lnRef>
+            <a:fillRef idx="1">
+              <a:schemeClr val="accent1"/>
+            </a:fillRef>
+            <a:effectRef idx="0">
+              <a:schemeClr val="accent1"/>
+            </a:effectRef>
+            <a:fontRef idx="minor">
+              <a:schemeClr val="lt1"/>
+            </a:fontRef>
+          </p:style>
+          <p:txBody>
+            <a:bodyPr rtlCol="0" anchor="ctr"/>
+            <a:lstStyle/>
+            <a:p>
+              <a:pPr algn="ctr"/>
+              <a:endParaRPr lang="ko-KR" altLang="en-US"/>
+            </a:p>
+          </p:txBody>
+        </p:sp>
+        <p:sp>
+          <p:nvSpPr>
+            <p:cNvPr id="23" name="직사각형 22"/>
+            <p:cNvSpPr/>
+            <p:nvPr/>
+          </p:nvSpPr>
+          <p:spPr>
+            <a:xfrm>
+              <a:off x="10121343" y="1887028"/>
+              <a:ext cx="882633" cy="895475"/>
+            </a:xfrm>
+            <a:prstGeom prst="rect">
+              <a:avLst/>
+            </a:prstGeom>
+            <a:noFill/>
+            <a:ln>
+              <a:solidFill>
+                <a:srgbClr val="FF0000"/>
+              </a:solidFill>
+            </a:ln>
+          </p:spPr>
+          <p:style>
+            <a:lnRef idx="2">
+              <a:schemeClr val="accent1">
+                <a:shade val="50000"/>
+              </a:schemeClr>
+            </a:lnRef>
+            <a:fillRef idx="1">
+              <a:schemeClr val="accent1"/>
+            </a:fillRef>
+            <a:effectRef idx="0">
+              <a:schemeClr val="accent1"/>
+            </a:effectRef>
+            <a:fontRef idx="minor">
+              <a:schemeClr val="lt1"/>
+            </a:fontRef>
+          </p:style>
+          <p:txBody>
+            <a:bodyPr rtlCol="0" anchor="ctr"/>
+            <a:lstStyle/>
+            <a:p>
+              <a:pPr algn="ctr"/>
+              <a:endParaRPr lang="ko-KR" altLang="en-US"/>
+            </a:p>
+          </p:txBody>
+        </p:sp>
+        <p:sp>
+          <p:nvSpPr>
+            <p:cNvPr id="24" name="오른쪽 화살표 23"/>
+            <p:cNvSpPr/>
+            <p:nvPr/>
+          </p:nvSpPr>
+          <p:spPr>
+            <a:xfrm>
+              <a:off x="4211053" y="2506912"/>
+              <a:ext cx="469231" cy="404492"/>
+            </a:xfrm>
+            <a:prstGeom prst="rightArrow">
+              <a:avLst/>
+            </a:prstGeom>
+          </p:spPr>
+          <p:style>
+            <a:lnRef idx="2">
+              <a:schemeClr val="accent1">
+                <a:shade val="50000"/>
+              </a:schemeClr>
+            </a:lnRef>
+            <a:fillRef idx="1">
+              <a:schemeClr val="accent1"/>
+            </a:fillRef>
+            <a:effectRef idx="0">
+              <a:schemeClr val="accent1"/>
+            </a:effectRef>
+            <a:fontRef idx="minor">
+              <a:schemeClr val="lt1"/>
+            </a:fontRef>
+          </p:style>
+          <p:txBody>
+            <a:bodyPr rtlCol="0" anchor="ctr"/>
+            <a:lstStyle/>
+            <a:p>
+              <a:pPr algn="ctr"/>
+              <a:endParaRPr lang="ko-KR" altLang="en-US"/>
+            </a:p>
+          </p:txBody>
+        </p:sp>
+        <p:sp>
+          <p:nvSpPr>
+            <p:cNvPr id="25" name="오른쪽 화살표 24"/>
+            <p:cNvSpPr/>
+            <p:nvPr/>
+          </p:nvSpPr>
+          <p:spPr>
+            <a:xfrm>
+              <a:off x="6918122" y="2463666"/>
+              <a:ext cx="469231" cy="404492"/>
+            </a:xfrm>
+            <a:prstGeom prst="rightArrow">
+              <a:avLst/>
+            </a:prstGeom>
+          </p:spPr>
+          <p:style>
+            <a:lnRef idx="2">
+              <a:schemeClr val="accent1">
+                <a:shade val="50000"/>
+              </a:schemeClr>
+            </a:lnRef>
+            <a:fillRef idx="1">
+              <a:schemeClr val="accent1"/>
+            </a:fillRef>
+            <a:effectRef idx="0">
+              <a:schemeClr val="accent1"/>
+            </a:effectRef>
+            <a:fontRef idx="minor">
+              <a:schemeClr val="lt1"/>
+            </a:fontRef>
+          </p:style>
+          <p:txBody>
+            <a:bodyPr rtlCol="0" anchor="ctr"/>
+            <a:lstStyle/>
+            <a:p>
+              <a:pPr algn="ctr"/>
+              <a:endParaRPr lang="ko-KR" altLang="en-US"/>
+            </a:p>
+          </p:txBody>
+        </p:sp>
+        <p:sp>
+          <p:nvSpPr>
+            <p:cNvPr id="26" name="오른쪽 화살표 25"/>
+            <p:cNvSpPr/>
+            <p:nvPr/>
+          </p:nvSpPr>
+          <p:spPr>
+            <a:xfrm>
+              <a:off x="9040224" y="2463666"/>
+              <a:ext cx="469231" cy="404492"/>
+            </a:xfrm>
+            <a:prstGeom prst="rightArrow">
+              <a:avLst/>
+            </a:prstGeom>
+          </p:spPr>
+          <p:style>
+            <a:lnRef idx="2">
+              <a:schemeClr val="accent1">
+                <a:shade val="50000"/>
+              </a:schemeClr>
+            </a:lnRef>
+            <a:fillRef idx="1">
+              <a:schemeClr val="accent1"/>
+            </a:fillRef>
+            <a:effectRef idx="0">
+              <a:schemeClr val="accent1"/>
+            </a:effectRef>
+            <a:fontRef idx="minor">
+              <a:schemeClr val="lt1"/>
+            </a:fontRef>
+          </p:style>
+          <p:txBody>
+            <a:bodyPr rtlCol="0" anchor="ctr"/>
+            <a:lstStyle/>
+            <a:p>
+              <a:pPr algn="ctr"/>
+              <a:endParaRPr lang="ko-KR" altLang="en-US"/>
+            </a:p>
+          </p:txBody>
+        </p:sp>
+      </p:grpSp>
+      <p:grpSp>
+        <p:nvGrpSpPr>
+          <p:cNvPr id="41" name="그룹 40"/>
+          <p:cNvGrpSpPr/>
+          <p:nvPr/>
+        </p:nvGrpSpPr>
+        <p:grpSpPr>
+          <a:xfrm>
+            <a:off x="5468426" y="4858797"/>
+            <a:ext cx="6312569" cy="1698485"/>
+            <a:chOff x="838200" y="2681580"/>
+            <a:chExt cx="10515601" cy="3239989"/>
+          </a:xfrm>
+        </p:grpSpPr>
+        <p:sp>
+          <p:nvSpPr>
+            <p:cNvPr id="42" name="제목 1"/>
+            <p:cNvSpPr txBox="1">
+              <a:spLocks/>
+            </p:cNvSpPr>
+            <p:nvPr/>
+          </p:nvSpPr>
+          <p:spPr>
+            <a:xfrm>
+              <a:off x="838201" y="2681580"/>
+              <a:ext cx="10515600" cy="1325563"/>
+            </a:xfrm>
+            <a:prstGeom prst="rect">
+              <a:avLst/>
+            </a:prstGeom>
+          </p:spPr>
+          <p:txBody>
+            <a:bodyPr vert="horz" lIns="91440" tIns="45720" rIns="91440" bIns="45720" rtlCol="0" anchor="ctr">
+              <a:normAutofit lnSpcReduction="10000"/>
+            </a:bodyPr>
+            <a:lstStyle>
+              <a:lvl1pPr algn="l" defTabSz="914400" rtl="0" eaLnBrk="1" latinLnBrk="1" hangingPunct="1">
+                <a:lnSpc>
+                  <a:spcPct val="90000"/>
+                </a:lnSpc>
+                <a:spcBef>
+                  <a:spcPct val="0"/>
+                </a:spcBef>
+                <a:buNone/>
+                <a:defRPr sz="4400" kern="1200">
+                  <a:solidFill>
+                    <a:schemeClr val="tx1"/>
+                  </a:solidFill>
+                  <a:latin typeface="+mj-lt"/>
+                  <a:ea typeface="+mj-ea"/>
+                  <a:cs typeface="+mj-cs"/>
+                </a:defRPr>
+              </a:lvl1pPr>
+            </a:lstStyle>
+            <a:p>
+              <a:r>
+                <a:rPr lang="ko-KR" altLang="en-US" smtClean="0"/>
+                <a:t>모델선정이 않되는 경우</a:t>
+              </a:r>
+              <a:endParaRPr lang="ko-KR" altLang="en-US" dirty="0"/>
+            </a:p>
+          </p:txBody>
+        </p:sp>
+        <p:pic>
+          <p:nvPicPr>
+            <p:cNvPr id="43" name="내용 개체 틀 3"/>
+            <p:cNvPicPr>
+              <a:picLocks noChangeAspect="1"/>
+            </p:cNvPicPr>
+            <p:nvPr/>
+          </p:nvPicPr>
+          <p:blipFill>
+            <a:blip r:embed="rId6">
+              <a:extLst>
+                <a:ext uri="{28A0092B-C50C-407E-A947-70E740481C1C}">
+                  <a14:useLocalDpi xmlns:a14="http://schemas.microsoft.com/office/drawing/2010/main" val="0"/>
+                </a:ext>
+              </a:extLst>
+            </a:blip>
+            <a:stretch>
+              <a:fillRect/>
+            </a:stretch>
+          </p:blipFill>
+          <p:spPr>
+            <a:xfrm>
+              <a:off x="838200" y="4007142"/>
+              <a:ext cx="1914427" cy="1914427"/>
+            </a:xfrm>
+            <a:prstGeom prst="rect">
+              <a:avLst/>
+            </a:prstGeom>
+          </p:spPr>
+        </p:pic>
+        <p:pic>
+          <p:nvPicPr>
+            <p:cNvPr id="44" name="그림 43"/>
+            <p:cNvPicPr>
+              <a:picLocks noChangeAspect="1"/>
+            </p:cNvPicPr>
+            <p:nvPr/>
+          </p:nvPicPr>
+          <p:blipFill>
+            <a:blip r:embed="rId7">
+              <a:extLst>
+                <a:ext uri="{28A0092B-C50C-407E-A947-70E740481C1C}">
+                  <a14:useLocalDpi xmlns:a14="http://schemas.microsoft.com/office/drawing/2010/main" val="0"/>
+                </a:ext>
+              </a:extLst>
+            </a:blip>
+            <a:stretch>
+              <a:fillRect/>
+            </a:stretch>
+          </p:blipFill>
+          <p:spPr>
+            <a:xfrm>
+              <a:off x="2923684" y="4007141"/>
+              <a:ext cx="1914427" cy="1914427"/>
+            </a:xfrm>
+            <a:prstGeom prst="rect">
+              <a:avLst/>
+            </a:prstGeom>
+          </p:spPr>
+        </p:pic>
+        <p:pic>
+          <p:nvPicPr>
+            <p:cNvPr id="45" name="그림 44"/>
+            <p:cNvPicPr>
+              <a:picLocks noChangeAspect="1"/>
+            </p:cNvPicPr>
+            <p:nvPr/>
+          </p:nvPicPr>
+          <p:blipFill>
+            <a:blip r:embed="rId8">
+              <a:extLst>
+                <a:ext uri="{28A0092B-C50C-407E-A947-70E740481C1C}">
+                  <a14:useLocalDpi xmlns:a14="http://schemas.microsoft.com/office/drawing/2010/main" val="0"/>
+                </a:ext>
+              </a:extLst>
+            </a:blip>
+            <a:stretch>
+              <a:fillRect/>
+            </a:stretch>
+          </p:blipFill>
+          <p:spPr>
+            <a:xfrm>
+              <a:off x="5009167" y="4007140"/>
+              <a:ext cx="1914427" cy="1914427"/>
+            </a:xfrm>
+            <a:prstGeom prst="rect">
+              <a:avLst/>
+            </a:prstGeom>
+          </p:spPr>
+        </p:pic>
+        <p:pic>
+          <p:nvPicPr>
+            <p:cNvPr id="46" name="그림 45"/>
+            <p:cNvPicPr>
+              <a:picLocks noChangeAspect="1"/>
+            </p:cNvPicPr>
+            <p:nvPr/>
+          </p:nvPicPr>
+          <p:blipFill>
+            <a:blip r:embed="rId9">
+              <a:extLst>
+                <a:ext uri="{28A0092B-C50C-407E-A947-70E740481C1C}">
+                  <a14:useLocalDpi xmlns:a14="http://schemas.microsoft.com/office/drawing/2010/main" val="0"/>
+                </a:ext>
+              </a:extLst>
+            </a:blip>
+            <a:stretch>
+              <a:fillRect/>
+            </a:stretch>
+          </p:blipFill>
+          <p:spPr>
+            <a:xfrm>
+              <a:off x="6923593" y="4011855"/>
+              <a:ext cx="1909712" cy="1909712"/>
+            </a:xfrm>
+            <a:prstGeom prst="rect">
+              <a:avLst/>
+            </a:prstGeom>
+          </p:spPr>
+        </p:pic>
+        <p:pic>
+          <p:nvPicPr>
+            <p:cNvPr id="47" name="그림 46"/>
+            <p:cNvPicPr>
+              <a:picLocks noChangeAspect="1"/>
+            </p:cNvPicPr>
+            <p:nvPr/>
+          </p:nvPicPr>
+          <p:blipFill>
+            <a:blip r:embed="rId10">
+              <a:extLst>
+                <a:ext uri="{28A0092B-C50C-407E-A947-70E740481C1C}">
+                  <a14:useLocalDpi xmlns:a14="http://schemas.microsoft.com/office/drawing/2010/main" val="0"/>
+                </a:ext>
+              </a:extLst>
+            </a:blip>
+            <a:stretch>
+              <a:fillRect/>
+            </a:stretch>
+          </p:blipFill>
+          <p:spPr>
+            <a:xfrm>
+              <a:off x="9009077" y="4007140"/>
+              <a:ext cx="1909714" cy="1909714"/>
+            </a:xfrm>
+            <a:prstGeom prst="rect">
+              <a:avLst/>
+            </a:prstGeom>
+          </p:spPr>
+        </p:pic>
+      </p:grpSp>
+    </p:spTree>
+    <p:extLst>
+      <p:ext uri="{BB962C8B-B14F-4D97-AF65-F5344CB8AC3E}">
+        <p14:creationId xmlns:p14="http://schemas.microsoft.com/office/powerpoint/2010/main" val="2380020911"/>
+      </p:ext>
+    </p:extLst>
+  </p:cSld>
+  <p:clrMapOvr>
+    <a:masterClrMapping/>
+  </p:clrMapOvr>
+</p:sld>
+</file>
+
+<file path=ppt/slides/slide31.xml><?xml version="1.0" encoding="utf-8"?>
+<p:sld xmlns:a="http://schemas.openxmlformats.org/drawingml/2006/main" xmlns:r="http://schemas.openxmlformats.org/officeDocument/2006/relationships" xmlns:p="http://schemas.openxmlformats.org/presentationml/2006/main">
+  <p:cSld>
+    <p:spTree>
+      <p:nvGrpSpPr>
+        <p:cNvPr id="1" name=""/>
+        <p:cNvGrpSpPr/>
+        <p:nvPr/>
+      </p:nvGrpSpPr>
+      <p:grpSpPr>
+        <a:xfrm>
+          <a:off x="0" y="0"/>
+          <a:ext cx="0" cy="0"/>
+          <a:chOff x="0" y="0"/>
+          <a:chExt cx="0" cy="0"/>
+        </a:xfrm>
+      </p:grpSpPr>
+      <p:sp>
+        <p:nvSpPr>
+          <p:cNvPr id="2" name="제목 1"/>
+          <p:cNvSpPr>
+            <a:spLocks noGrp="1"/>
+          </p:cNvSpPr>
+          <p:nvPr>
+            <p:ph type="title"/>
+          </p:nvPr>
+        </p:nvSpPr>
+        <p:spPr/>
+        <p:txBody>
+          <a:bodyPr/>
+          <a:lstStyle/>
+          <a:p>
+            <a:r>
+              <a:rPr lang="ko-KR" altLang="en-US" dirty="0" err="1" smtClean="0"/>
+              <a:t>펀칭부</a:t>
+            </a:r>
+            <a:r>
+              <a:rPr lang="ko-KR" altLang="en-US" dirty="0" smtClean="0"/>
+              <a:t> </a:t>
+            </a:r>
+            <a:r>
+              <a:rPr lang="en-US" altLang="ko-KR" dirty="0" smtClean="0"/>
+              <a:t>– </a:t>
+            </a:r>
+            <a:r>
+              <a:rPr lang="ko-KR" altLang="en-US" dirty="0" err="1" smtClean="0"/>
+              <a:t>미마킹</a:t>
+            </a:r>
+            <a:r>
+              <a:rPr lang="ko-KR" altLang="en-US" dirty="0" smtClean="0"/>
+              <a:t> 여부 체크</a:t>
+            </a:r>
+            <a:endParaRPr lang="ko-KR" altLang="en-US" dirty="0"/>
+          </a:p>
+        </p:txBody>
+      </p:sp>
+      <p:grpSp>
+        <p:nvGrpSpPr>
           <p:cNvPr id="19" name="그룹 18"/>
           <p:cNvGrpSpPr/>
           <p:nvPr/>
@@ -22966,7 +23229,7 @@
 </p:sld>
 </file>
 
-<file path=ppt/slides/slide31.xml><?xml version="1.0" encoding="utf-8"?>
+<file path=ppt/slides/slide32.xml><?xml version="1.0" encoding="utf-8"?>
 <p:sld xmlns:a="http://schemas.openxmlformats.org/drawingml/2006/main" xmlns:r="http://schemas.openxmlformats.org/officeDocument/2006/relationships" xmlns:p="http://schemas.openxmlformats.org/presentationml/2006/main">
   <p:cSld>
     <p:spTree>
@@ -25021,7 +25284,7 @@
 </p:sld>
 </file>
 
-<file path=ppt/slides/slide32.xml><?xml version="1.0" encoding="utf-8"?>
+<file path=ppt/slides/slide33.xml><?xml version="1.0" encoding="utf-8"?>
 <p:sld xmlns:a="http://schemas.openxmlformats.org/drawingml/2006/main" xmlns:r="http://schemas.openxmlformats.org/officeDocument/2006/relationships" xmlns:p="http://schemas.openxmlformats.org/presentationml/2006/main">
   <p:cSld>
     <p:spTree>
@@ -25156,7 +25419,7 @@
 </p:sld>
 </file>
 
-<file path=ppt/slides/slide33.xml><?xml version="1.0" encoding="utf-8"?>
+<file path=ppt/slides/slide34.xml><?xml version="1.0" encoding="utf-8"?>
 <p:sld xmlns:a="http://schemas.openxmlformats.org/drawingml/2006/main" xmlns:r="http://schemas.openxmlformats.org/officeDocument/2006/relationships" xmlns:p="http://schemas.openxmlformats.org/presentationml/2006/main">
   <p:cSld>
     <p:spTree>
@@ -25295,6 +25558,1824 @@
 </file>
 
 <file path=ppt/slides/slide4.xml><?xml version="1.0" encoding="utf-8"?>
+<p:sld xmlns:a="http://schemas.openxmlformats.org/drawingml/2006/main" xmlns:r="http://schemas.openxmlformats.org/officeDocument/2006/relationships" xmlns:p="http://schemas.openxmlformats.org/presentationml/2006/main">
+  <p:cSld>
+    <p:spTree>
+      <p:nvGrpSpPr>
+        <p:cNvPr id="1" name=""/>
+        <p:cNvGrpSpPr/>
+        <p:nvPr/>
+      </p:nvGrpSpPr>
+      <p:grpSpPr>
+        <a:xfrm>
+          <a:off x="0" y="0"/>
+          <a:ext cx="0" cy="0"/>
+          <a:chOff x="0" y="0"/>
+          <a:chExt cx="0" cy="0"/>
+        </a:xfrm>
+      </p:grpSpPr>
+      <p:sp>
+        <p:nvSpPr>
+          <p:cNvPr id="2" name="제목 1"/>
+          <p:cNvSpPr>
+            <a:spLocks noGrp="1"/>
+          </p:cNvSpPr>
+          <p:nvPr>
+            <p:ph type="title"/>
+          </p:nvPr>
+        </p:nvSpPr>
+        <p:spPr>
+          <a:xfrm>
+            <a:off x="2675374" y="484745"/>
+            <a:ext cx="2929932" cy="1325563"/>
+          </a:xfrm>
+        </p:spPr>
+        <p:txBody>
+          <a:bodyPr>
+            <a:normAutofit/>
+          </a:bodyPr>
+          <a:lstStyle/>
+          <a:p>
+            <a:r>
+              <a:rPr lang="ko-KR" altLang="en-US" sz="2000" dirty="0" smtClean="0"/>
+              <a:t>시스템 </a:t>
+            </a:r>
+            <a:r>
+              <a:rPr lang="ko-KR" altLang="en-US" sz="2000" dirty="0" smtClean="0"/>
+              <a:t>구성 </a:t>
+            </a:r>
+            <a:r>
+              <a:rPr lang="en-US" altLang="ko-KR" sz="2000" dirty="0" smtClean="0"/>
+              <a:t>(RTR14)</a:t>
+            </a:r>
+            <a:endParaRPr lang="ko-KR" altLang="en-US" sz="2000" dirty="0"/>
+          </a:p>
+        </p:txBody>
+      </p:sp>
+      <p:sp>
+        <p:nvSpPr>
+          <p:cNvPr id="6" name="직사각형 5"/>
+          <p:cNvSpPr/>
+          <p:nvPr/>
+        </p:nvSpPr>
+        <p:spPr>
+          <a:xfrm>
+            <a:off x="2507168" y="1690688"/>
+            <a:ext cx="1184279" cy="317324"/>
+          </a:xfrm>
+          <a:prstGeom prst="rect">
+            <a:avLst/>
+          </a:prstGeom>
+        </p:spPr>
+        <p:style>
+          <a:lnRef idx="2">
+            <a:schemeClr val="accent1">
+              <a:shade val="50000"/>
+            </a:schemeClr>
+          </a:lnRef>
+          <a:fillRef idx="1">
+            <a:schemeClr val="accent1"/>
+          </a:fillRef>
+          <a:effectRef idx="0">
+            <a:schemeClr val="accent1"/>
+          </a:effectRef>
+          <a:fontRef idx="minor">
+            <a:schemeClr val="lt1"/>
+          </a:fontRef>
+        </p:style>
+        <p:txBody>
+          <a:bodyPr rtlCol="0" anchor="ctr"/>
+          <a:lstStyle/>
+          <a:p>
+            <a:pPr algn="ctr"/>
+            <a:r>
+              <a:rPr lang="en-US" altLang="ko-KR" dirty="0" err="1" smtClean="0"/>
+              <a:t>GvisCAM</a:t>
+            </a:r>
+            <a:endParaRPr lang="ko-KR" altLang="en-US" dirty="0"/>
+          </a:p>
+        </p:txBody>
+      </p:sp>
+      <p:sp>
+        <p:nvSpPr>
+          <p:cNvPr id="7" name="직사각형 6"/>
+          <p:cNvSpPr/>
+          <p:nvPr/>
+        </p:nvSpPr>
+        <p:spPr>
+          <a:xfrm>
+            <a:off x="2504428" y="2491676"/>
+            <a:ext cx="1178821" cy="321333"/>
+          </a:xfrm>
+          <a:prstGeom prst="rect">
+            <a:avLst/>
+          </a:prstGeom>
+        </p:spPr>
+        <p:style>
+          <a:lnRef idx="2">
+            <a:schemeClr val="accent1">
+              <a:shade val="50000"/>
+            </a:schemeClr>
+          </a:lnRef>
+          <a:fillRef idx="1">
+            <a:schemeClr val="accent1"/>
+          </a:fillRef>
+          <a:effectRef idx="0">
+            <a:schemeClr val="accent1"/>
+          </a:effectRef>
+          <a:fontRef idx="minor">
+            <a:schemeClr val="lt1"/>
+          </a:fontRef>
+        </p:style>
+        <p:txBody>
+          <a:bodyPr rtlCol="0" anchor="ctr"/>
+          <a:lstStyle/>
+          <a:p>
+            <a:pPr algn="ctr"/>
+            <a:r>
+              <a:rPr lang="en-US" altLang="ko-KR" dirty="0" smtClean="0"/>
+              <a:t>VS</a:t>
+            </a:r>
+            <a:endParaRPr lang="ko-KR" altLang="en-US" dirty="0"/>
+          </a:p>
+        </p:txBody>
+      </p:sp>
+      <p:sp>
+        <p:nvSpPr>
+          <p:cNvPr id="8" name="직사각형 7"/>
+          <p:cNvSpPr/>
+          <p:nvPr/>
+        </p:nvSpPr>
+        <p:spPr>
+          <a:xfrm>
+            <a:off x="1556558" y="3514749"/>
+            <a:ext cx="963980" cy="427803"/>
+          </a:xfrm>
+          <a:prstGeom prst="rect">
+            <a:avLst/>
+          </a:prstGeom>
+        </p:spPr>
+        <p:style>
+          <a:lnRef idx="2">
+            <a:schemeClr val="accent1">
+              <a:shade val="50000"/>
+            </a:schemeClr>
+          </a:lnRef>
+          <a:fillRef idx="1">
+            <a:schemeClr val="accent1"/>
+          </a:fillRef>
+          <a:effectRef idx="0">
+            <a:schemeClr val="accent1"/>
+          </a:effectRef>
+          <a:fontRef idx="minor">
+            <a:schemeClr val="lt1"/>
+          </a:fontRef>
+        </p:style>
+        <p:txBody>
+          <a:bodyPr rtlCol="0" anchor="ctr"/>
+          <a:lstStyle/>
+          <a:p>
+            <a:pPr algn="ctr"/>
+            <a:r>
+              <a:rPr lang="ko-KR" altLang="en-US" smtClean="0"/>
+              <a:t>펀칭기</a:t>
+            </a:r>
+            <a:endParaRPr lang="ko-KR" altLang="en-US" dirty="0"/>
+          </a:p>
+        </p:txBody>
+      </p:sp>
+      <p:sp>
+        <p:nvSpPr>
+          <p:cNvPr id="9" name="직사각형 8"/>
+          <p:cNvSpPr/>
+          <p:nvPr/>
+        </p:nvSpPr>
+        <p:spPr>
+          <a:xfrm>
+            <a:off x="1546508" y="4304653"/>
+            <a:ext cx="974030" cy="311285"/>
+          </a:xfrm>
+          <a:prstGeom prst="rect">
+            <a:avLst/>
+          </a:prstGeom>
+        </p:spPr>
+        <p:style>
+          <a:lnRef idx="2">
+            <a:schemeClr val="accent1">
+              <a:shade val="50000"/>
+            </a:schemeClr>
+          </a:lnRef>
+          <a:fillRef idx="1">
+            <a:schemeClr val="accent1"/>
+          </a:fillRef>
+          <a:effectRef idx="0">
+            <a:schemeClr val="accent1"/>
+          </a:effectRef>
+          <a:fontRef idx="minor">
+            <a:schemeClr val="lt1"/>
+          </a:fontRef>
+        </p:style>
+        <p:txBody>
+          <a:bodyPr rtlCol="0" anchor="ctr"/>
+          <a:lstStyle/>
+          <a:p>
+            <a:pPr algn="ctr"/>
+            <a:r>
+              <a:rPr lang="en-US" altLang="ko-KR" dirty="0" smtClean="0"/>
+              <a:t>PLC</a:t>
+            </a:r>
+            <a:endParaRPr lang="ko-KR" altLang="en-US" dirty="0"/>
+          </a:p>
+        </p:txBody>
+      </p:sp>
+      <p:sp>
+        <p:nvSpPr>
+          <p:cNvPr id="10" name="직사각형 9"/>
+          <p:cNvSpPr/>
+          <p:nvPr/>
+        </p:nvSpPr>
+        <p:spPr>
+          <a:xfrm>
+            <a:off x="3008492" y="3525304"/>
+            <a:ext cx="1107899" cy="427803"/>
+          </a:xfrm>
+          <a:prstGeom prst="rect">
+            <a:avLst/>
+          </a:prstGeom>
+        </p:spPr>
+        <p:style>
+          <a:lnRef idx="2">
+            <a:schemeClr val="accent1">
+              <a:shade val="50000"/>
+            </a:schemeClr>
+          </a:lnRef>
+          <a:fillRef idx="1">
+            <a:schemeClr val="accent1"/>
+          </a:fillRef>
+          <a:effectRef idx="0">
+            <a:schemeClr val="accent1"/>
+          </a:effectRef>
+          <a:fontRef idx="minor">
+            <a:schemeClr val="lt1"/>
+          </a:fontRef>
+        </p:style>
+        <p:txBody>
+          <a:bodyPr rtlCol="0" anchor="ctr"/>
+          <a:lstStyle/>
+          <a:p>
+            <a:pPr algn="ctr"/>
+            <a:r>
+              <a:rPr lang="ko-KR" altLang="en-US" dirty="0" smtClean="0"/>
+              <a:t>하부</a:t>
+            </a:r>
+            <a:r>
+              <a:rPr lang="en-US" altLang="ko-KR" dirty="0" smtClean="0"/>
+              <a:t>AOI</a:t>
+            </a:r>
+            <a:endParaRPr lang="ko-KR" altLang="en-US" dirty="0"/>
+          </a:p>
+        </p:txBody>
+      </p:sp>
+      <p:sp>
+        <p:nvSpPr>
+          <p:cNvPr id="11" name="직사각형 10"/>
+          <p:cNvSpPr/>
+          <p:nvPr/>
+        </p:nvSpPr>
+        <p:spPr>
+          <a:xfrm>
+            <a:off x="4497751" y="3493733"/>
+            <a:ext cx="1107555" cy="425959"/>
+          </a:xfrm>
+          <a:prstGeom prst="rect">
+            <a:avLst/>
+          </a:prstGeom>
+        </p:spPr>
+        <p:style>
+          <a:lnRef idx="2">
+            <a:schemeClr val="accent1">
+              <a:shade val="50000"/>
+            </a:schemeClr>
+          </a:lnRef>
+          <a:fillRef idx="1">
+            <a:schemeClr val="accent1"/>
+          </a:fillRef>
+          <a:effectRef idx="0">
+            <a:schemeClr val="accent1"/>
+          </a:effectRef>
+          <a:fontRef idx="minor">
+            <a:schemeClr val="lt1"/>
+          </a:fontRef>
+        </p:style>
+        <p:txBody>
+          <a:bodyPr rtlCol="0" anchor="ctr"/>
+          <a:lstStyle/>
+          <a:p>
+            <a:pPr algn="ctr"/>
+            <a:r>
+              <a:rPr lang="ko-KR" altLang="en-US" dirty="0" smtClean="0"/>
+              <a:t>상부</a:t>
+            </a:r>
+            <a:r>
+              <a:rPr lang="en-US" altLang="ko-KR" dirty="0" smtClean="0"/>
+              <a:t>AOI</a:t>
+            </a:r>
+            <a:endParaRPr lang="ko-KR" altLang="en-US" dirty="0"/>
+          </a:p>
+        </p:txBody>
+      </p:sp>
+      <p:sp>
+        <p:nvSpPr>
+          <p:cNvPr id="12" name="직사각형 11"/>
+          <p:cNvSpPr/>
+          <p:nvPr/>
+        </p:nvSpPr>
+        <p:spPr>
+          <a:xfrm>
+            <a:off x="5882138" y="3523569"/>
+            <a:ext cx="1026670" cy="427803"/>
+          </a:xfrm>
+          <a:prstGeom prst="rect">
+            <a:avLst/>
+          </a:prstGeom>
+        </p:spPr>
+        <p:style>
+          <a:lnRef idx="2">
+            <a:schemeClr val="accent1">
+              <a:shade val="50000"/>
+            </a:schemeClr>
+          </a:lnRef>
+          <a:fillRef idx="1">
+            <a:schemeClr val="accent1"/>
+          </a:fillRef>
+          <a:effectRef idx="0">
+            <a:schemeClr val="accent1"/>
+          </a:effectRef>
+          <a:fontRef idx="minor">
+            <a:schemeClr val="lt1"/>
+          </a:fontRef>
+        </p:style>
+        <p:txBody>
+          <a:bodyPr rtlCol="0" anchor="ctr"/>
+          <a:lstStyle/>
+          <a:p>
+            <a:pPr algn="ctr"/>
+            <a:r>
+              <a:rPr lang="ko-KR" altLang="en-US" dirty="0" err="1" smtClean="0"/>
+              <a:t>각인기</a:t>
+            </a:r>
+            <a:endParaRPr lang="ko-KR" altLang="en-US" dirty="0"/>
+          </a:p>
+        </p:txBody>
+      </p:sp>
+      <p:cxnSp>
+        <p:nvCxnSpPr>
+          <p:cNvPr id="18" name="꺾인 연결선 17"/>
+          <p:cNvCxnSpPr/>
+          <p:nvPr/>
+        </p:nvCxnSpPr>
+        <p:spPr>
+          <a:xfrm>
+            <a:off x="3639531" y="1867852"/>
+            <a:ext cx="912533" cy="416214"/>
+          </a:xfrm>
+          <a:prstGeom prst="bentConnector3">
+            <a:avLst/>
+          </a:prstGeom>
+          <a:ln w="25400"/>
+        </p:spPr>
+        <p:style>
+          <a:lnRef idx="1">
+            <a:schemeClr val="accent1"/>
+          </a:lnRef>
+          <a:fillRef idx="0">
+            <a:schemeClr val="accent1"/>
+          </a:fillRef>
+          <a:effectRef idx="0">
+            <a:schemeClr val="accent1"/>
+          </a:effectRef>
+          <a:fontRef idx="minor">
+            <a:schemeClr val="tx1"/>
+          </a:fontRef>
+        </p:style>
+      </p:cxnSp>
+      <p:cxnSp>
+        <p:nvCxnSpPr>
+          <p:cNvPr id="25" name="꺾인 연결선 24"/>
+          <p:cNvCxnSpPr/>
+          <p:nvPr/>
+        </p:nvCxnSpPr>
+        <p:spPr>
+          <a:xfrm flipV="1">
+            <a:off x="3619325" y="2284066"/>
+            <a:ext cx="932739" cy="298377"/>
+          </a:xfrm>
+          <a:prstGeom prst="bentConnector3">
+            <a:avLst>
+              <a:gd name="adj1" fmla="val 50000"/>
+            </a:avLst>
+          </a:prstGeom>
+          <a:ln w="25400"/>
+        </p:spPr>
+        <p:style>
+          <a:lnRef idx="1">
+            <a:schemeClr val="accent1"/>
+          </a:lnRef>
+          <a:fillRef idx="0">
+            <a:schemeClr val="accent1"/>
+          </a:fillRef>
+          <a:effectRef idx="0">
+            <a:schemeClr val="accent1"/>
+          </a:effectRef>
+          <a:fontRef idx="minor">
+            <a:schemeClr val="tx1"/>
+          </a:fontRef>
+        </p:style>
+      </p:cxnSp>
+      <p:cxnSp>
+        <p:nvCxnSpPr>
+          <p:cNvPr id="38" name="직선 연결선 37"/>
+          <p:cNvCxnSpPr/>
+          <p:nvPr/>
+        </p:nvCxnSpPr>
+        <p:spPr>
+          <a:xfrm flipV="1">
+            <a:off x="2049116" y="3089063"/>
+            <a:ext cx="0" cy="427530"/>
+          </a:xfrm>
+          <a:prstGeom prst="line">
+            <a:avLst/>
+          </a:prstGeom>
+          <a:ln w="25400"/>
+        </p:spPr>
+        <p:style>
+          <a:lnRef idx="1">
+            <a:schemeClr val="accent1"/>
+          </a:lnRef>
+          <a:fillRef idx="0">
+            <a:schemeClr val="accent1"/>
+          </a:fillRef>
+          <a:effectRef idx="0">
+            <a:schemeClr val="accent1"/>
+          </a:effectRef>
+          <a:fontRef idx="minor">
+            <a:schemeClr val="tx1"/>
+          </a:fontRef>
+        </p:style>
+      </p:cxnSp>
+      <p:cxnSp>
+        <p:nvCxnSpPr>
+          <p:cNvPr id="39" name="직선 연결선 38"/>
+          <p:cNvCxnSpPr/>
+          <p:nvPr/>
+        </p:nvCxnSpPr>
+        <p:spPr>
+          <a:xfrm flipV="1">
+            <a:off x="2049116" y="3086946"/>
+            <a:ext cx="4337715" cy="2117"/>
+          </a:xfrm>
+          <a:prstGeom prst="line">
+            <a:avLst/>
+          </a:prstGeom>
+          <a:ln w="25400"/>
+        </p:spPr>
+        <p:style>
+          <a:lnRef idx="1">
+            <a:schemeClr val="accent1"/>
+          </a:lnRef>
+          <a:fillRef idx="0">
+            <a:schemeClr val="accent1"/>
+          </a:fillRef>
+          <a:effectRef idx="0">
+            <a:schemeClr val="accent1"/>
+          </a:effectRef>
+          <a:fontRef idx="minor">
+            <a:schemeClr val="tx1"/>
+          </a:fontRef>
+        </p:style>
+      </p:cxnSp>
+      <p:cxnSp>
+        <p:nvCxnSpPr>
+          <p:cNvPr id="43" name="직선 연결선 42"/>
+          <p:cNvCxnSpPr/>
+          <p:nvPr/>
+        </p:nvCxnSpPr>
+        <p:spPr>
+          <a:xfrm flipV="1">
+            <a:off x="6386831" y="3096039"/>
+            <a:ext cx="0" cy="427530"/>
+          </a:xfrm>
+          <a:prstGeom prst="line">
+            <a:avLst/>
+          </a:prstGeom>
+          <a:ln w="25400"/>
+        </p:spPr>
+        <p:style>
+          <a:lnRef idx="1">
+            <a:schemeClr val="accent1"/>
+          </a:lnRef>
+          <a:fillRef idx="0">
+            <a:schemeClr val="accent1"/>
+          </a:fillRef>
+          <a:effectRef idx="0">
+            <a:schemeClr val="accent1"/>
+          </a:effectRef>
+          <a:fontRef idx="minor">
+            <a:schemeClr val="tx1"/>
+          </a:fontRef>
+        </p:style>
+      </p:cxnSp>
+      <p:cxnSp>
+        <p:nvCxnSpPr>
+          <p:cNvPr id="44" name="직선 연결선 43"/>
+          <p:cNvCxnSpPr/>
+          <p:nvPr/>
+        </p:nvCxnSpPr>
+        <p:spPr>
+          <a:xfrm flipV="1">
+            <a:off x="3619325" y="3096039"/>
+            <a:ext cx="0" cy="427530"/>
+          </a:xfrm>
+          <a:prstGeom prst="line">
+            <a:avLst/>
+          </a:prstGeom>
+          <a:ln w="25400"/>
+        </p:spPr>
+        <p:style>
+          <a:lnRef idx="1">
+            <a:schemeClr val="accent1"/>
+          </a:lnRef>
+          <a:fillRef idx="0">
+            <a:schemeClr val="accent1"/>
+          </a:fillRef>
+          <a:effectRef idx="0">
+            <a:schemeClr val="accent1"/>
+          </a:effectRef>
+          <a:fontRef idx="minor">
+            <a:schemeClr val="tx1"/>
+          </a:fontRef>
+        </p:style>
+      </p:cxnSp>
+      <p:cxnSp>
+        <p:nvCxnSpPr>
+          <p:cNvPr id="45" name="직선 연결선 44"/>
+          <p:cNvCxnSpPr/>
+          <p:nvPr/>
+        </p:nvCxnSpPr>
+        <p:spPr>
+          <a:xfrm flipV="1">
+            <a:off x="5056157" y="3096039"/>
+            <a:ext cx="0" cy="427530"/>
+          </a:xfrm>
+          <a:prstGeom prst="line">
+            <a:avLst/>
+          </a:prstGeom>
+          <a:ln w="25400"/>
+        </p:spPr>
+        <p:style>
+          <a:lnRef idx="1">
+            <a:schemeClr val="accent1"/>
+          </a:lnRef>
+          <a:fillRef idx="0">
+            <a:schemeClr val="accent1"/>
+          </a:fillRef>
+          <a:effectRef idx="0">
+            <a:schemeClr val="accent1"/>
+          </a:effectRef>
+          <a:fontRef idx="minor">
+            <a:schemeClr val="tx1"/>
+          </a:fontRef>
+        </p:style>
+      </p:cxnSp>
+      <p:cxnSp>
+        <p:nvCxnSpPr>
+          <p:cNvPr id="46" name="직선 연결선 45"/>
+          <p:cNvCxnSpPr/>
+          <p:nvPr/>
+        </p:nvCxnSpPr>
+        <p:spPr>
+          <a:xfrm flipV="1">
+            <a:off x="4543691" y="2284066"/>
+            <a:ext cx="8374" cy="811973"/>
+          </a:xfrm>
+          <a:prstGeom prst="line">
+            <a:avLst/>
+          </a:prstGeom>
+          <a:ln w="25400"/>
+        </p:spPr>
+        <p:style>
+          <a:lnRef idx="1">
+            <a:schemeClr val="accent1"/>
+          </a:lnRef>
+          <a:fillRef idx="0">
+            <a:schemeClr val="accent1"/>
+          </a:fillRef>
+          <a:effectRef idx="0">
+            <a:schemeClr val="accent1"/>
+          </a:effectRef>
+          <a:fontRef idx="minor">
+            <a:schemeClr val="tx1"/>
+          </a:fontRef>
+        </p:style>
+      </p:cxnSp>
+      <p:cxnSp>
+        <p:nvCxnSpPr>
+          <p:cNvPr id="52" name="직선 연결선 51"/>
+          <p:cNvCxnSpPr/>
+          <p:nvPr/>
+        </p:nvCxnSpPr>
+        <p:spPr>
+          <a:xfrm flipV="1">
+            <a:off x="2044512" y="3903005"/>
+            <a:ext cx="4604" cy="477858"/>
+          </a:xfrm>
+          <a:prstGeom prst="line">
+            <a:avLst/>
+          </a:prstGeom>
+          <a:ln w="25400"/>
+        </p:spPr>
+        <p:style>
+          <a:lnRef idx="1">
+            <a:schemeClr val="accent1"/>
+          </a:lnRef>
+          <a:fillRef idx="0">
+            <a:schemeClr val="accent1"/>
+          </a:fillRef>
+          <a:effectRef idx="0">
+            <a:schemeClr val="accent1"/>
+          </a:effectRef>
+          <a:fontRef idx="minor">
+            <a:schemeClr val="tx1"/>
+          </a:fontRef>
+        </p:style>
+      </p:cxnSp>
+      <p:sp>
+        <p:nvSpPr>
+          <p:cNvPr id="57" name="직사각형 56"/>
+          <p:cNvSpPr/>
+          <p:nvPr/>
+        </p:nvSpPr>
+        <p:spPr>
+          <a:xfrm>
+            <a:off x="2507167" y="2101090"/>
+            <a:ext cx="1184280" cy="309839"/>
+          </a:xfrm>
+          <a:prstGeom prst="rect">
+            <a:avLst/>
+          </a:prstGeom>
+        </p:spPr>
+        <p:style>
+          <a:lnRef idx="2">
+            <a:schemeClr val="accent1">
+              <a:shade val="50000"/>
+            </a:schemeClr>
+          </a:lnRef>
+          <a:fillRef idx="1">
+            <a:schemeClr val="accent1"/>
+          </a:fillRef>
+          <a:effectRef idx="0">
+            <a:schemeClr val="accent1"/>
+          </a:effectRef>
+          <a:fontRef idx="minor">
+            <a:schemeClr val="lt1"/>
+          </a:fontRef>
+        </p:style>
+        <p:txBody>
+          <a:bodyPr rtlCol="0" anchor="ctr"/>
+          <a:lstStyle/>
+          <a:p>
+            <a:pPr algn="ctr"/>
+            <a:r>
+              <a:rPr lang="en-US" altLang="ko-KR" dirty="0" smtClean="0"/>
+              <a:t>DTS</a:t>
+            </a:r>
+            <a:endParaRPr lang="ko-KR" altLang="en-US" dirty="0"/>
+          </a:p>
+        </p:txBody>
+      </p:sp>
+      <p:cxnSp>
+        <p:nvCxnSpPr>
+          <p:cNvPr id="26" name="직선 연결선 25"/>
+          <p:cNvCxnSpPr/>
+          <p:nvPr/>
+        </p:nvCxnSpPr>
+        <p:spPr>
+          <a:xfrm>
+            <a:off x="3691448" y="2284066"/>
+            <a:ext cx="860616" cy="0"/>
+          </a:xfrm>
+          <a:prstGeom prst="line">
+            <a:avLst/>
+          </a:prstGeom>
+          <a:ln w="25400"/>
+        </p:spPr>
+        <p:style>
+          <a:lnRef idx="1">
+            <a:schemeClr val="accent1"/>
+          </a:lnRef>
+          <a:fillRef idx="0">
+            <a:schemeClr val="accent1"/>
+          </a:fillRef>
+          <a:effectRef idx="0">
+            <a:schemeClr val="accent1"/>
+          </a:effectRef>
+          <a:fontRef idx="minor">
+            <a:schemeClr val="tx1"/>
+          </a:fontRef>
+        </p:style>
+      </p:cxnSp>
+      <p:sp>
+        <p:nvSpPr>
+          <p:cNvPr id="30" name="TextBox 407"/>
+          <p:cNvSpPr txBox="1">
+            <a:spLocks noChangeArrowheads="1"/>
+          </p:cNvSpPr>
+          <p:nvPr/>
+        </p:nvSpPr>
+        <p:spPr bwMode="auto">
+          <a:xfrm>
+            <a:off x="7398998" y="5282010"/>
+            <a:ext cx="860798" cy="216694"/>
+          </a:xfrm>
+          <a:prstGeom prst="rect">
+            <a:avLst/>
+          </a:prstGeom>
+          <a:solidFill>
+            <a:srgbClr val="000080"/>
+          </a:solidFill>
+          <a:ln w="9525">
+            <a:solidFill>
+              <a:srgbClr val="000000"/>
+            </a:solidFill>
+            <a:miter lim="800000"/>
+            <a:headEnd/>
+            <a:tailEnd/>
+          </a:ln>
+          <a:scene3d>
+            <a:camera prst="orthographicFront"/>
+            <a:lightRig rig="threePt" dir="t"/>
+          </a:scene3d>
+          <a:sp3d>
+            <a:bevelT/>
+          </a:sp3d>
+        </p:spPr>
+        <p:txBody>
+          <a:bodyPr wrap="square" lIns="0" tIns="0" rIns="0" bIns="36000" anchor="ctr">
+            <a:spAutoFit/>
+          </a:bodyPr>
+          <a:lstStyle>
+            <a:lvl1pPr marL="0" indent="0">
+              <a:defRPr sz="1100">
+                <a:latin typeface="+mn-lt"/>
+                <a:ea typeface="+mn-ea"/>
+                <a:cs typeface="+mn-cs"/>
+              </a:defRPr>
+            </a:lvl1pPr>
+            <a:lvl2pPr marL="457200" indent="0">
+              <a:defRPr sz="1100">
+                <a:latin typeface="+mn-lt"/>
+                <a:ea typeface="+mn-ea"/>
+                <a:cs typeface="+mn-cs"/>
+              </a:defRPr>
+            </a:lvl2pPr>
+            <a:lvl3pPr marL="914400" indent="0">
+              <a:defRPr sz="1100">
+                <a:latin typeface="+mn-lt"/>
+                <a:ea typeface="+mn-ea"/>
+                <a:cs typeface="+mn-cs"/>
+              </a:defRPr>
+            </a:lvl3pPr>
+            <a:lvl4pPr marL="1371600" indent="0">
+              <a:defRPr sz="1100">
+                <a:latin typeface="+mn-lt"/>
+                <a:ea typeface="+mn-ea"/>
+                <a:cs typeface="+mn-cs"/>
+              </a:defRPr>
+            </a:lvl4pPr>
+            <a:lvl5pPr marL="1828800" indent="0">
+              <a:defRPr sz="1100">
+                <a:latin typeface="+mn-lt"/>
+                <a:ea typeface="+mn-ea"/>
+                <a:cs typeface="+mn-cs"/>
+              </a:defRPr>
+            </a:lvl5pPr>
+            <a:lvl6pPr marL="2286000" indent="0">
+              <a:defRPr sz="1100">
+                <a:latin typeface="+mn-lt"/>
+                <a:ea typeface="+mn-ea"/>
+                <a:cs typeface="+mn-cs"/>
+              </a:defRPr>
+            </a:lvl6pPr>
+            <a:lvl7pPr marL="2743200" indent="0">
+              <a:defRPr sz="1100">
+                <a:latin typeface="+mn-lt"/>
+                <a:ea typeface="+mn-ea"/>
+                <a:cs typeface="+mn-cs"/>
+              </a:defRPr>
+            </a:lvl7pPr>
+            <a:lvl8pPr marL="3200400" indent="0">
+              <a:defRPr sz="1100">
+                <a:latin typeface="+mn-lt"/>
+                <a:ea typeface="+mn-ea"/>
+                <a:cs typeface="+mn-cs"/>
+              </a:defRPr>
+            </a:lvl8pPr>
+            <a:lvl9pPr marL="3657600" indent="0">
+              <a:defRPr sz="1100">
+                <a:latin typeface="+mn-lt"/>
+                <a:ea typeface="+mn-ea"/>
+                <a:cs typeface="+mn-cs"/>
+              </a:defRPr>
+            </a:lvl9pPr>
+          </a:lstStyle>
+          <a:p>
+            <a:pPr algn="ctr" eaLnBrk="1" hangingPunct="1">
+              <a:lnSpc>
+                <a:spcPct val="130000"/>
+              </a:lnSpc>
+              <a:defRPr/>
+            </a:pPr>
+            <a:r>
+              <a:rPr lang="en-US" altLang="ko-KR" sz="1000" b="1" dirty="0">
+                <a:solidFill>
+                  <a:schemeClr val="bg1"/>
+                </a:solidFill>
+                <a:latin typeface="굴림" pitchFamily="50" charset="-127"/>
+                <a:ea typeface="굴림" pitchFamily="50" charset="-127"/>
+              </a:rPr>
+              <a:t>Un-Coiler</a:t>
+            </a:r>
+            <a:endParaRPr lang="ko-KR" altLang="en-US" sz="1000" b="1" dirty="0">
+              <a:solidFill>
+                <a:schemeClr val="bg1"/>
+              </a:solidFill>
+              <a:latin typeface="굴림" pitchFamily="50" charset="-127"/>
+              <a:ea typeface="굴림" pitchFamily="50" charset="-127"/>
+            </a:endParaRPr>
+          </a:p>
+        </p:txBody>
+      </p:sp>
+      <p:sp>
+        <p:nvSpPr>
+          <p:cNvPr id="31" name="TextBox 408"/>
+          <p:cNvSpPr txBox="1">
+            <a:spLocks noChangeArrowheads="1"/>
+          </p:cNvSpPr>
+          <p:nvPr/>
+        </p:nvSpPr>
+        <p:spPr bwMode="auto">
+          <a:xfrm>
+            <a:off x="177095" y="5268091"/>
+            <a:ext cx="956422" cy="216694"/>
+          </a:xfrm>
+          <a:prstGeom prst="rect">
+            <a:avLst/>
+          </a:prstGeom>
+          <a:solidFill>
+            <a:srgbClr val="000080"/>
+          </a:solidFill>
+          <a:ln w="9525">
+            <a:solidFill>
+              <a:srgbClr val="000000"/>
+            </a:solidFill>
+            <a:miter lim="800000"/>
+            <a:headEnd/>
+            <a:tailEnd/>
+          </a:ln>
+          <a:scene3d>
+            <a:camera prst="orthographicFront"/>
+            <a:lightRig rig="threePt" dir="t"/>
+          </a:scene3d>
+          <a:sp3d>
+            <a:bevelT/>
+          </a:sp3d>
+        </p:spPr>
+        <p:txBody>
+          <a:bodyPr wrap="square" lIns="0" tIns="0" rIns="0" bIns="36000" anchor="ctr">
+            <a:spAutoFit/>
+          </a:bodyPr>
+          <a:lstStyle>
+            <a:lvl1pPr marL="0" indent="0">
+              <a:defRPr sz="1100">
+                <a:latin typeface="+mn-lt"/>
+                <a:ea typeface="+mn-ea"/>
+                <a:cs typeface="+mn-cs"/>
+              </a:defRPr>
+            </a:lvl1pPr>
+            <a:lvl2pPr marL="457200" indent="0">
+              <a:defRPr sz="1100">
+                <a:latin typeface="+mn-lt"/>
+                <a:ea typeface="+mn-ea"/>
+                <a:cs typeface="+mn-cs"/>
+              </a:defRPr>
+            </a:lvl2pPr>
+            <a:lvl3pPr marL="914400" indent="0">
+              <a:defRPr sz="1100">
+                <a:latin typeface="+mn-lt"/>
+                <a:ea typeface="+mn-ea"/>
+                <a:cs typeface="+mn-cs"/>
+              </a:defRPr>
+            </a:lvl3pPr>
+            <a:lvl4pPr marL="1371600" indent="0">
+              <a:defRPr sz="1100">
+                <a:latin typeface="+mn-lt"/>
+                <a:ea typeface="+mn-ea"/>
+                <a:cs typeface="+mn-cs"/>
+              </a:defRPr>
+            </a:lvl4pPr>
+            <a:lvl5pPr marL="1828800" indent="0">
+              <a:defRPr sz="1100">
+                <a:latin typeface="+mn-lt"/>
+                <a:ea typeface="+mn-ea"/>
+                <a:cs typeface="+mn-cs"/>
+              </a:defRPr>
+            </a:lvl5pPr>
+            <a:lvl6pPr marL="2286000" indent="0">
+              <a:defRPr sz="1100">
+                <a:latin typeface="+mn-lt"/>
+                <a:ea typeface="+mn-ea"/>
+                <a:cs typeface="+mn-cs"/>
+              </a:defRPr>
+            </a:lvl6pPr>
+            <a:lvl7pPr marL="2743200" indent="0">
+              <a:defRPr sz="1100">
+                <a:latin typeface="+mn-lt"/>
+                <a:ea typeface="+mn-ea"/>
+                <a:cs typeface="+mn-cs"/>
+              </a:defRPr>
+            </a:lvl7pPr>
+            <a:lvl8pPr marL="3200400" indent="0">
+              <a:defRPr sz="1100">
+                <a:latin typeface="+mn-lt"/>
+                <a:ea typeface="+mn-ea"/>
+                <a:cs typeface="+mn-cs"/>
+              </a:defRPr>
+            </a:lvl8pPr>
+            <a:lvl9pPr marL="3657600" indent="0">
+              <a:defRPr sz="1100">
+                <a:latin typeface="+mn-lt"/>
+                <a:ea typeface="+mn-ea"/>
+                <a:cs typeface="+mn-cs"/>
+              </a:defRPr>
+            </a:lvl9pPr>
+          </a:lstStyle>
+          <a:p>
+            <a:pPr algn="ctr" eaLnBrk="1" hangingPunct="1">
+              <a:lnSpc>
+                <a:spcPct val="130000"/>
+              </a:lnSpc>
+              <a:defRPr/>
+            </a:pPr>
+            <a:r>
+              <a:rPr lang="en-US" altLang="ko-KR" sz="1000" b="1" dirty="0">
+                <a:solidFill>
+                  <a:schemeClr val="bg1"/>
+                </a:solidFill>
+                <a:latin typeface="굴림" pitchFamily="50" charset="-127"/>
+                <a:ea typeface="굴림" pitchFamily="50" charset="-127"/>
+              </a:rPr>
+              <a:t>Re-Coiler</a:t>
+            </a:r>
+            <a:endParaRPr lang="ko-KR" altLang="en-US" sz="1000" b="1" dirty="0">
+              <a:solidFill>
+                <a:schemeClr val="bg1"/>
+              </a:solidFill>
+              <a:latin typeface="굴림" pitchFamily="50" charset="-127"/>
+              <a:ea typeface="굴림" pitchFamily="50" charset="-127"/>
+            </a:endParaRPr>
+          </a:p>
+        </p:txBody>
+      </p:sp>
+      <p:sp>
+        <p:nvSpPr>
+          <p:cNvPr id="32" name="TextBox 388"/>
+          <p:cNvSpPr txBox="1">
+            <a:spLocks noChangeArrowheads="1"/>
+          </p:cNvSpPr>
+          <p:nvPr/>
+        </p:nvSpPr>
+        <p:spPr bwMode="auto">
+          <a:xfrm>
+            <a:off x="3309775" y="5274925"/>
+            <a:ext cx="748086" cy="216694"/>
+          </a:xfrm>
+          <a:prstGeom prst="rect">
+            <a:avLst/>
+          </a:prstGeom>
+          <a:solidFill>
+            <a:srgbClr val="000080"/>
+          </a:solidFill>
+          <a:ln w="9525">
+            <a:solidFill>
+              <a:srgbClr val="000000"/>
+            </a:solidFill>
+            <a:miter lim="800000"/>
+            <a:headEnd/>
+            <a:tailEnd/>
+          </a:ln>
+          <a:scene3d>
+            <a:camera prst="orthographicFront"/>
+            <a:lightRig rig="threePt" dir="t"/>
+          </a:scene3d>
+          <a:sp3d>
+            <a:bevelT/>
+          </a:sp3d>
+        </p:spPr>
+        <p:txBody>
+          <a:bodyPr wrap="square" lIns="0" tIns="0" rIns="0" bIns="36000" anchor="ctr">
+            <a:spAutoFit/>
+          </a:bodyPr>
+          <a:lstStyle>
+            <a:lvl1pPr marL="0" indent="0">
+              <a:defRPr sz="1100">
+                <a:latin typeface="+mn-lt"/>
+                <a:ea typeface="+mn-ea"/>
+                <a:cs typeface="+mn-cs"/>
+              </a:defRPr>
+            </a:lvl1pPr>
+            <a:lvl2pPr marL="457200" indent="0">
+              <a:defRPr sz="1100">
+                <a:latin typeface="+mn-lt"/>
+                <a:ea typeface="+mn-ea"/>
+                <a:cs typeface="+mn-cs"/>
+              </a:defRPr>
+            </a:lvl2pPr>
+            <a:lvl3pPr marL="914400" indent="0">
+              <a:defRPr sz="1100">
+                <a:latin typeface="+mn-lt"/>
+                <a:ea typeface="+mn-ea"/>
+                <a:cs typeface="+mn-cs"/>
+              </a:defRPr>
+            </a:lvl3pPr>
+            <a:lvl4pPr marL="1371600" indent="0">
+              <a:defRPr sz="1100">
+                <a:latin typeface="+mn-lt"/>
+                <a:ea typeface="+mn-ea"/>
+                <a:cs typeface="+mn-cs"/>
+              </a:defRPr>
+            </a:lvl4pPr>
+            <a:lvl5pPr marL="1828800" indent="0">
+              <a:defRPr sz="1100">
+                <a:latin typeface="+mn-lt"/>
+                <a:ea typeface="+mn-ea"/>
+                <a:cs typeface="+mn-cs"/>
+              </a:defRPr>
+            </a:lvl5pPr>
+            <a:lvl6pPr marL="2286000" indent="0">
+              <a:defRPr sz="1100">
+                <a:latin typeface="+mn-lt"/>
+                <a:ea typeface="+mn-ea"/>
+                <a:cs typeface="+mn-cs"/>
+              </a:defRPr>
+            </a:lvl6pPr>
+            <a:lvl7pPr marL="2743200" indent="0">
+              <a:defRPr sz="1100">
+                <a:latin typeface="+mn-lt"/>
+                <a:ea typeface="+mn-ea"/>
+                <a:cs typeface="+mn-cs"/>
+              </a:defRPr>
+            </a:lvl7pPr>
+            <a:lvl8pPr marL="3200400" indent="0">
+              <a:defRPr sz="1100">
+                <a:latin typeface="+mn-lt"/>
+                <a:ea typeface="+mn-ea"/>
+                <a:cs typeface="+mn-cs"/>
+              </a:defRPr>
+            </a:lvl8pPr>
+            <a:lvl9pPr marL="3657600" indent="0">
+              <a:defRPr sz="1100">
+                <a:latin typeface="+mn-lt"/>
+                <a:ea typeface="+mn-ea"/>
+                <a:cs typeface="+mn-cs"/>
+              </a:defRPr>
+            </a:lvl9pPr>
+          </a:lstStyle>
+          <a:p>
+            <a:pPr algn="ctr" eaLnBrk="1" hangingPunct="1">
+              <a:lnSpc>
+                <a:spcPct val="130000"/>
+              </a:lnSpc>
+              <a:defRPr/>
+            </a:pPr>
+            <a:r>
+              <a:rPr lang="en-US" altLang="ko-KR" sz="1000" b="1" dirty="0">
+                <a:solidFill>
+                  <a:schemeClr val="bg1"/>
+                </a:solidFill>
+                <a:latin typeface="굴림" pitchFamily="50" charset="-127"/>
+                <a:ea typeface="굴림" pitchFamily="50" charset="-127"/>
+              </a:rPr>
+              <a:t>AOI-</a:t>
+            </a:r>
+            <a:r>
+              <a:rPr lang="ko-KR" altLang="en-US" sz="1000" b="1" dirty="0">
+                <a:solidFill>
+                  <a:schemeClr val="bg1"/>
+                </a:solidFill>
+                <a:latin typeface="굴림" pitchFamily="50" charset="-127"/>
+                <a:ea typeface="굴림" pitchFamily="50" charset="-127"/>
+              </a:rPr>
+              <a:t>하면</a:t>
+            </a:r>
+          </a:p>
+        </p:txBody>
+      </p:sp>
+      <p:sp>
+        <p:nvSpPr>
+          <p:cNvPr id="33" name="TextBox 388"/>
+          <p:cNvSpPr txBox="1">
+            <a:spLocks noChangeArrowheads="1"/>
+          </p:cNvSpPr>
+          <p:nvPr/>
+        </p:nvSpPr>
+        <p:spPr bwMode="auto">
+          <a:xfrm>
+            <a:off x="4699825" y="5274046"/>
+            <a:ext cx="748086" cy="216694"/>
+          </a:xfrm>
+          <a:prstGeom prst="rect">
+            <a:avLst/>
+          </a:prstGeom>
+          <a:solidFill>
+            <a:srgbClr val="000080"/>
+          </a:solidFill>
+          <a:ln w="9525">
+            <a:solidFill>
+              <a:srgbClr val="000000"/>
+            </a:solidFill>
+            <a:miter lim="800000"/>
+            <a:headEnd/>
+            <a:tailEnd/>
+          </a:ln>
+          <a:scene3d>
+            <a:camera prst="orthographicFront"/>
+            <a:lightRig rig="threePt" dir="t"/>
+          </a:scene3d>
+          <a:sp3d>
+            <a:bevelT/>
+          </a:sp3d>
+        </p:spPr>
+        <p:txBody>
+          <a:bodyPr wrap="square" lIns="0" tIns="0" rIns="0" bIns="36000" anchor="ctr">
+            <a:spAutoFit/>
+          </a:bodyPr>
+          <a:lstStyle>
+            <a:lvl1pPr marL="0" indent="0">
+              <a:defRPr sz="1100">
+                <a:latin typeface="+mn-lt"/>
+                <a:ea typeface="+mn-ea"/>
+                <a:cs typeface="+mn-cs"/>
+              </a:defRPr>
+            </a:lvl1pPr>
+            <a:lvl2pPr marL="457200" indent="0">
+              <a:defRPr sz="1100">
+                <a:latin typeface="+mn-lt"/>
+                <a:ea typeface="+mn-ea"/>
+                <a:cs typeface="+mn-cs"/>
+              </a:defRPr>
+            </a:lvl2pPr>
+            <a:lvl3pPr marL="914400" indent="0">
+              <a:defRPr sz="1100">
+                <a:latin typeface="+mn-lt"/>
+                <a:ea typeface="+mn-ea"/>
+                <a:cs typeface="+mn-cs"/>
+              </a:defRPr>
+            </a:lvl3pPr>
+            <a:lvl4pPr marL="1371600" indent="0">
+              <a:defRPr sz="1100">
+                <a:latin typeface="+mn-lt"/>
+                <a:ea typeface="+mn-ea"/>
+                <a:cs typeface="+mn-cs"/>
+              </a:defRPr>
+            </a:lvl4pPr>
+            <a:lvl5pPr marL="1828800" indent="0">
+              <a:defRPr sz="1100">
+                <a:latin typeface="+mn-lt"/>
+                <a:ea typeface="+mn-ea"/>
+                <a:cs typeface="+mn-cs"/>
+              </a:defRPr>
+            </a:lvl5pPr>
+            <a:lvl6pPr marL="2286000" indent="0">
+              <a:defRPr sz="1100">
+                <a:latin typeface="+mn-lt"/>
+                <a:ea typeface="+mn-ea"/>
+                <a:cs typeface="+mn-cs"/>
+              </a:defRPr>
+            </a:lvl6pPr>
+            <a:lvl7pPr marL="2743200" indent="0">
+              <a:defRPr sz="1100">
+                <a:latin typeface="+mn-lt"/>
+                <a:ea typeface="+mn-ea"/>
+                <a:cs typeface="+mn-cs"/>
+              </a:defRPr>
+            </a:lvl7pPr>
+            <a:lvl8pPr marL="3200400" indent="0">
+              <a:defRPr sz="1100">
+                <a:latin typeface="+mn-lt"/>
+                <a:ea typeface="+mn-ea"/>
+                <a:cs typeface="+mn-cs"/>
+              </a:defRPr>
+            </a:lvl8pPr>
+            <a:lvl9pPr marL="3657600" indent="0">
+              <a:defRPr sz="1100">
+                <a:latin typeface="+mn-lt"/>
+                <a:ea typeface="+mn-ea"/>
+                <a:cs typeface="+mn-cs"/>
+              </a:defRPr>
+            </a:lvl9pPr>
+          </a:lstStyle>
+          <a:p>
+            <a:pPr algn="ctr" eaLnBrk="1" hangingPunct="1">
+              <a:lnSpc>
+                <a:spcPct val="130000"/>
+              </a:lnSpc>
+              <a:defRPr/>
+            </a:pPr>
+            <a:r>
+              <a:rPr lang="en-US" altLang="ko-KR" sz="1000" b="1" dirty="0">
+                <a:solidFill>
+                  <a:schemeClr val="bg1"/>
+                </a:solidFill>
+                <a:latin typeface="굴림" pitchFamily="50" charset="-127"/>
+                <a:ea typeface="굴림" pitchFamily="50" charset="-127"/>
+              </a:rPr>
+              <a:t>AOI-</a:t>
+            </a:r>
+            <a:r>
+              <a:rPr lang="ko-KR" altLang="en-US" sz="1000" b="1" dirty="0">
+                <a:solidFill>
+                  <a:schemeClr val="bg1"/>
+                </a:solidFill>
+                <a:latin typeface="굴림" pitchFamily="50" charset="-127"/>
+                <a:ea typeface="굴림" pitchFamily="50" charset="-127"/>
+              </a:rPr>
+              <a:t>상면</a:t>
+            </a:r>
+          </a:p>
+        </p:txBody>
+      </p:sp>
+      <p:cxnSp>
+        <p:nvCxnSpPr>
+          <p:cNvPr id="34" name="직선 화살표 연결선 33"/>
+          <p:cNvCxnSpPr>
+            <a:cxnSpLocks noChangeShapeType="1"/>
+            <a:stCxn id="41" idx="1"/>
+            <a:endCxn id="33" idx="3"/>
+          </p:cNvCxnSpPr>
+          <p:nvPr/>
+        </p:nvCxnSpPr>
+        <p:spPr bwMode="auto">
+          <a:xfrm flipH="1" flipV="1">
+            <a:off x="5447911" y="5382393"/>
+            <a:ext cx="600591" cy="3115"/>
+          </a:xfrm>
+          <a:prstGeom prst="straightConnector1">
+            <a:avLst/>
+          </a:prstGeom>
+          <a:noFill/>
+          <a:ln w="38100" algn="ctr">
+            <a:solidFill>
+              <a:schemeClr val="tx1"/>
+            </a:solidFill>
+            <a:round/>
+            <a:headEnd/>
+            <a:tailEnd type="triangle" w="med" len="med"/>
+          </a:ln>
+        </p:spPr>
+      </p:cxnSp>
+      <p:cxnSp>
+        <p:nvCxnSpPr>
+          <p:cNvPr id="35" name="직선 화살표 연결선 34"/>
+          <p:cNvCxnSpPr>
+            <a:cxnSpLocks noChangeShapeType="1"/>
+            <a:stCxn id="33" idx="1"/>
+            <a:endCxn id="32" idx="3"/>
+          </p:cNvCxnSpPr>
+          <p:nvPr/>
+        </p:nvCxnSpPr>
+        <p:spPr bwMode="auto">
+          <a:xfrm flipH="1">
+            <a:off x="4057861" y="5382393"/>
+            <a:ext cx="641964" cy="879"/>
+          </a:xfrm>
+          <a:prstGeom prst="straightConnector1">
+            <a:avLst/>
+          </a:prstGeom>
+          <a:noFill/>
+          <a:ln w="38100" algn="ctr">
+            <a:solidFill>
+              <a:schemeClr val="tx1"/>
+            </a:solidFill>
+            <a:round/>
+            <a:headEnd/>
+            <a:tailEnd type="triangle" w="med" len="med"/>
+          </a:ln>
+        </p:spPr>
+      </p:cxnSp>
+      <p:sp>
+        <p:nvSpPr>
+          <p:cNvPr id="36" name="TextBox 408"/>
+          <p:cNvSpPr txBox="1">
+            <a:spLocks noChangeArrowheads="1"/>
+          </p:cNvSpPr>
+          <p:nvPr/>
+        </p:nvSpPr>
+        <p:spPr bwMode="auto">
+          <a:xfrm>
+            <a:off x="1556558" y="5256953"/>
+            <a:ext cx="1111254" cy="249492"/>
+          </a:xfrm>
+          <a:prstGeom prst="rect">
+            <a:avLst/>
+          </a:prstGeom>
+          <a:solidFill>
+            <a:srgbClr val="FF0000"/>
+          </a:solidFill>
+          <a:ln w="9525">
+            <a:solidFill>
+              <a:srgbClr val="000000"/>
+            </a:solidFill>
+            <a:miter lim="800000"/>
+            <a:headEnd/>
+            <a:tailEnd/>
+          </a:ln>
+          <a:scene3d>
+            <a:camera prst="orthographicFront"/>
+            <a:lightRig rig="threePt" dir="t"/>
+          </a:scene3d>
+          <a:sp3d>
+            <a:bevelT/>
+          </a:sp3d>
+        </p:spPr>
+        <p:txBody>
+          <a:bodyPr wrap="square" lIns="0" tIns="0" rIns="0" bIns="36000" anchor="ctr">
+            <a:spAutoFit/>
+          </a:bodyPr>
+          <a:lstStyle>
+            <a:lvl1pPr marL="0" indent="0">
+              <a:defRPr sz="1100">
+                <a:latin typeface="+mn-lt"/>
+                <a:ea typeface="+mn-ea"/>
+                <a:cs typeface="+mn-cs"/>
+              </a:defRPr>
+            </a:lvl1pPr>
+            <a:lvl2pPr marL="457200" indent="0">
+              <a:defRPr sz="1100">
+                <a:latin typeface="+mn-lt"/>
+                <a:ea typeface="+mn-ea"/>
+                <a:cs typeface="+mn-cs"/>
+              </a:defRPr>
+            </a:lvl2pPr>
+            <a:lvl3pPr marL="914400" indent="0">
+              <a:defRPr sz="1100">
+                <a:latin typeface="+mn-lt"/>
+                <a:ea typeface="+mn-ea"/>
+                <a:cs typeface="+mn-cs"/>
+              </a:defRPr>
+            </a:lvl3pPr>
+            <a:lvl4pPr marL="1371600" indent="0">
+              <a:defRPr sz="1100">
+                <a:latin typeface="+mn-lt"/>
+                <a:ea typeface="+mn-ea"/>
+                <a:cs typeface="+mn-cs"/>
+              </a:defRPr>
+            </a:lvl4pPr>
+            <a:lvl5pPr marL="1828800" indent="0">
+              <a:defRPr sz="1100">
+                <a:latin typeface="+mn-lt"/>
+                <a:ea typeface="+mn-ea"/>
+                <a:cs typeface="+mn-cs"/>
+              </a:defRPr>
+            </a:lvl5pPr>
+            <a:lvl6pPr marL="2286000" indent="0">
+              <a:defRPr sz="1100">
+                <a:latin typeface="+mn-lt"/>
+                <a:ea typeface="+mn-ea"/>
+                <a:cs typeface="+mn-cs"/>
+              </a:defRPr>
+            </a:lvl6pPr>
+            <a:lvl7pPr marL="2743200" indent="0">
+              <a:defRPr sz="1100">
+                <a:latin typeface="+mn-lt"/>
+                <a:ea typeface="+mn-ea"/>
+                <a:cs typeface="+mn-cs"/>
+              </a:defRPr>
+            </a:lvl7pPr>
+            <a:lvl8pPr marL="3200400" indent="0">
+              <a:defRPr sz="1100">
+                <a:latin typeface="+mn-lt"/>
+                <a:ea typeface="+mn-ea"/>
+                <a:cs typeface="+mn-cs"/>
+              </a:defRPr>
+            </a:lvl8pPr>
+            <a:lvl9pPr marL="3657600" indent="0">
+              <a:defRPr sz="1100">
+                <a:latin typeface="+mn-lt"/>
+                <a:ea typeface="+mn-ea"/>
+                <a:cs typeface="+mn-cs"/>
+              </a:defRPr>
+            </a:lvl9pPr>
+          </a:lstStyle>
+          <a:p>
+            <a:pPr algn="ctr" eaLnBrk="1" hangingPunct="1">
+              <a:lnSpc>
+                <a:spcPct val="130000"/>
+              </a:lnSpc>
+              <a:defRPr/>
+            </a:pPr>
+            <a:r>
+              <a:rPr lang="en-US" altLang="ko-KR" sz="1000" b="1" dirty="0">
+                <a:solidFill>
+                  <a:schemeClr val="bg1"/>
+                </a:solidFill>
+                <a:latin typeface="굴림" pitchFamily="50" charset="-127"/>
+                <a:ea typeface="굴림" pitchFamily="50" charset="-127"/>
+              </a:rPr>
+              <a:t>Reject Marking</a:t>
+            </a:r>
+            <a:endParaRPr lang="ko-KR" altLang="en-US" sz="1000" b="1" dirty="0">
+              <a:solidFill>
+                <a:schemeClr val="bg1"/>
+              </a:solidFill>
+              <a:latin typeface="굴림" pitchFamily="50" charset="-127"/>
+              <a:ea typeface="굴림" pitchFamily="50" charset="-127"/>
+            </a:endParaRPr>
+          </a:p>
+        </p:txBody>
+      </p:sp>
+      <p:cxnSp>
+        <p:nvCxnSpPr>
+          <p:cNvPr id="37" name="직선 화살표 연결선 36"/>
+          <p:cNvCxnSpPr>
+            <a:cxnSpLocks noChangeShapeType="1"/>
+            <a:stCxn id="36" idx="1"/>
+            <a:endCxn id="31" idx="3"/>
+          </p:cNvCxnSpPr>
+          <p:nvPr/>
+        </p:nvCxnSpPr>
+        <p:spPr bwMode="auto">
+          <a:xfrm flipH="1" flipV="1">
+            <a:off x="1133517" y="5376438"/>
+            <a:ext cx="423041" cy="5261"/>
+          </a:xfrm>
+          <a:prstGeom prst="straightConnector1">
+            <a:avLst/>
+          </a:prstGeom>
+          <a:noFill/>
+          <a:ln w="38100" algn="ctr">
+            <a:solidFill>
+              <a:schemeClr val="tx1"/>
+            </a:solidFill>
+            <a:round/>
+            <a:headEnd/>
+            <a:tailEnd type="triangle" w="med" len="med"/>
+          </a:ln>
+        </p:spPr>
+      </p:cxnSp>
+      <p:cxnSp>
+        <p:nvCxnSpPr>
+          <p:cNvPr id="40" name="직선 화살표 연결선 39"/>
+          <p:cNvCxnSpPr>
+            <a:cxnSpLocks noChangeShapeType="1"/>
+            <a:stCxn id="32" idx="1"/>
+            <a:endCxn id="36" idx="3"/>
+          </p:cNvCxnSpPr>
+          <p:nvPr/>
+        </p:nvCxnSpPr>
+        <p:spPr bwMode="auto">
+          <a:xfrm flipH="1" flipV="1">
+            <a:off x="2667812" y="5381699"/>
+            <a:ext cx="641963" cy="1573"/>
+          </a:xfrm>
+          <a:prstGeom prst="straightConnector1">
+            <a:avLst/>
+          </a:prstGeom>
+          <a:noFill/>
+          <a:ln w="38100" algn="ctr">
+            <a:solidFill>
+              <a:schemeClr val="tx1"/>
+            </a:solidFill>
+            <a:round/>
+            <a:headEnd/>
+            <a:tailEnd type="triangle" w="med" len="med"/>
+          </a:ln>
+        </p:spPr>
+      </p:cxnSp>
+      <p:sp>
+        <p:nvSpPr>
+          <p:cNvPr id="41" name="TextBox 408"/>
+          <p:cNvSpPr txBox="1">
+            <a:spLocks noChangeArrowheads="1"/>
+          </p:cNvSpPr>
+          <p:nvPr/>
+        </p:nvSpPr>
+        <p:spPr bwMode="auto">
+          <a:xfrm>
+            <a:off x="6048502" y="5267305"/>
+            <a:ext cx="749905" cy="236406"/>
+          </a:xfrm>
+          <a:prstGeom prst="rect">
+            <a:avLst/>
+          </a:prstGeom>
+          <a:solidFill>
+            <a:srgbClr val="FF0000"/>
+          </a:solidFill>
+          <a:ln w="9525">
+            <a:solidFill>
+              <a:srgbClr val="000000"/>
+            </a:solidFill>
+            <a:miter lim="800000"/>
+            <a:headEnd/>
+            <a:tailEnd/>
+          </a:ln>
+          <a:scene3d>
+            <a:camera prst="orthographicFront"/>
+            <a:lightRig rig="threePt" dir="t"/>
+          </a:scene3d>
+          <a:sp3d>
+            <a:bevelT/>
+          </a:sp3d>
+        </p:spPr>
+        <p:txBody>
+          <a:bodyPr wrap="square" lIns="0" tIns="0" rIns="0" bIns="36000" anchor="ctr">
+            <a:spAutoFit/>
+          </a:bodyPr>
+          <a:lstStyle>
+            <a:lvl1pPr marL="0" indent="0">
+              <a:defRPr sz="1100">
+                <a:latin typeface="+mn-lt"/>
+                <a:ea typeface="+mn-ea"/>
+                <a:cs typeface="+mn-cs"/>
+              </a:defRPr>
+            </a:lvl1pPr>
+            <a:lvl2pPr marL="457200" indent="0">
+              <a:defRPr sz="1100">
+                <a:latin typeface="+mn-lt"/>
+                <a:ea typeface="+mn-ea"/>
+                <a:cs typeface="+mn-cs"/>
+              </a:defRPr>
+            </a:lvl2pPr>
+            <a:lvl3pPr marL="914400" indent="0">
+              <a:defRPr sz="1100">
+                <a:latin typeface="+mn-lt"/>
+                <a:ea typeface="+mn-ea"/>
+                <a:cs typeface="+mn-cs"/>
+              </a:defRPr>
+            </a:lvl3pPr>
+            <a:lvl4pPr marL="1371600" indent="0">
+              <a:defRPr sz="1100">
+                <a:latin typeface="+mn-lt"/>
+                <a:ea typeface="+mn-ea"/>
+                <a:cs typeface="+mn-cs"/>
+              </a:defRPr>
+            </a:lvl4pPr>
+            <a:lvl5pPr marL="1828800" indent="0">
+              <a:defRPr sz="1100">
+                <a:latin typeface="+mn-lt"/>
+                <a:ea typeface="+mn-ea"/>
+                <a:cs typeface="+mn-cs"/>
+              </a:defRPr>
+            </a:lvl5pPr>
+            <a:lvl6pPr marL="2286000" indent="0">
+              <a:defRPr sz="1100">
+                <a:latin typeface="+mn-lt"/>
+                <a:ea typeface="+mn-ea"/>
+                <a:cs typeface="+mn-cs"/>
+              </a:defRPr>
+            </a:lvl6pPr>
+            <a:lvl7pPr marL="2743200" indent="0">
+              <a:defRPr sz="1100">
+                <a:latin typeface="+mn-lt"/>
+                <a:ea typeface="+mn-ea"/>
+                <a:cs typeface="+mn-cs"/>
+              </a:defRPr>
+            </a:lvl7pPr>
+            <a:lvl8pPr marL="3200400" indent="0">
+              <a:defRPr sz="1100">
+                <a:latin typeface="+mn-lt"/>
+                <a:ea typeface="+mn-ea"/>
+                <a:cs typeface="+mn-cs"/>
+              </a:defRPr>
+            </a:lvl8pPr>
+            <a:lvl9pPr marL="3657600" indent="0">
+              <a:defRPr sz="1100">
+                <a:latin typeface="+mn-lt"/>
+                <a:ea typeface="+mn-ea"/>
+                <a:cs typeface="+mn-cs"/>
+              </a:defRPr>
+            </a:lvl9pPr>
+          </a:lstStyle>
+          <a:p>
+            <a:pPr algn="ctr" eaLnBrk="1" hangingPunct="1">
+              <a:lnSpc>
+                <a:spcPct val="130000"/>
+              </a:lnSpc>
+              <a:defRPr/>
+            </a:pPr>
+            <a:r>
+              <a:rPr lang="en-US" altLang="ko-KR" sz="1000" b="1" dirty="0" smtClean="0">
+                <a:solidFill>
+                  <a:schemeClr val="bg1"/>
+                </a:solidFill>
+                <a:latin typeface="굴림" pitchFamily="50" charset="-127"/>
+                <a:ea typeface="굴림" pitchFamily="50" charset="-127"/>
+              </a:rPr>
+              <a:t>2D </a:t>
+            </a:r>
+            <a:r>
+              <a:rPr lang="ko-KR" altLang="en-US" sz="1000" b="1" dirty="0" err="1" smtClean="0">
+                <a:solidFill>
+                  <a:schemeClr val="bg1"/>
+                </a:solidFill>
+                <a:latin typeface="굴림" pitchFamily="50" charset="-127"/>
+                <a:ea typeface="굴림" pitchFamily="50" charset="-127"/>
+              </a:rPr>
+              <a:t>각인기</a:t>
+            </a:r>
+            <a:endParaRPr lang="ko-KR" altLang="en-US" sz="1000" b="1" dirty="0">
+              <a:solidFill>
+                <a:schemeClr val="bg1"/>
+              </a:solidFill>
+              <a:latin typeface="굴림" pitchFamily="50" charset="-127"/>
+              <a:ea typeface="굴림" pitchFamily="50" charset="-127"/>
+            </a:endParaRPr>
+          </a:p>
+        </p:txBody>
+      </p:sp>
+      <p:cxnSp>
+        <p:nvCxnSpPr>
+          <p:cNvPr id="42" name="직선 화살표 연결선 41"/>
+          <p:cNvCxnSpPr>
+            <a:cxnSpLocks noChangeShapeType="1"/>
+            <a:stCxn id="30" idx="1"/>
+            <a:endCxn id="41" idx="3"/>
+          </p:cNvCxnSpPr>
+          <p:nvPr/>
+        </p:nvCxnSpPr>
+        <p:spPr bwMode="auto">
+          <a:xfrm flipH="1" flipV="1">
+            <a:off x="6798407" y="5385508"/>
+            <a:ext cx="600591" cy="4849"/>
+          </a:xfrm>
+          <a:prstGeom prst="straightConnector1">
+            <a:avLst/>
+          </a:prstGeom>
+          <a:noFill/>
+          <a:ln w="38100" algn="ctr">
+            <a:solidFill>
+              <a:schemeClr val="tx1"/>
+            </a:solidFill>
+            <a:round/>
+            <a:headEnd/>
+            <a:tailEnd type="triangle" w="med" len="med"/>
+          </a:ln>
+        </p:spPr>
+      </p:cxnSp>
+      <p:sp>
+        <p:nvSpPr>
+          <p:cNvPr id="49" name="TextBox 408"/>
+          <p:cNvSpPr txBox="1">
+            <a:spLocks noChangeArrowheads="1"/>
+          </p:cNvSpPr>
+          <p:nvPr/>
+        </p:nvSpPr>
+        <p:spPr bwMode="auto">
+          <a:xfrm>
+            <a:off x="2667812" y="4971798"/>
+            <a:ext cx="749905" cy="236406"/>
+          </a:xfrm>
+          <a:prstGeom prst="rect">
+            <a:avLst/>
+          </a:prstGeom>
+          <a:solidFill>
+            <a:srgbClr val="FF0000"/>
+          </a:solidFill>
+          <a:ln w="9525">
+            <a:solidFill>
+              <a:srgbClr val="000000"/>
+            </a:solidFill>
+            <a:miter lim="800000"/>
+            <a:headEnd/>
+            <a:tailEnd/>
+          </a:ln>
+          <a:scene3d>
+            <a:camera prst="orthographicFront"/>
+            <a:lightRig rig="threePt" dir="t"/>
+          </a:scene3d>
+          <a:sp3d>
+            <a:bevelT/>
+          </a:sp3d>
+        </p:spPr>
+        <p:txBody>
+          <a:bodyPr wrap="square" lIns="0" tIns="0" rIns="0" bIns="36000" anchor="ctr">
+            <a:spAutoFit/>
+          </a:bodyPr>
+          <a:lstStyle>
+            <a:lvl1pPr marL="0" indent="0">
+              <a:defRPr sz="1100">
+                <a:latin typeface="+mn-lt"/>
+                <a:ea typeface="+mn-ea"/>
+                <a:cs typeface="+mn-cs"/>
+              </a:defRPr>
+            </a:lvl1pPr>
+            <a:lvl2pPr marL="457200" indent="0">
+              <a:defRPr sz="1100">
+                <a:latin typeface="+mn-lt"/>
+                <a:ea typeface="+mn-ea"/>
+                <a:cs typeface="+mn-cs"/>
+              </a:defRPr>
+            </a:lvl2pPr>
+            <a:lvl3pPr marL="914400" indent="0">
+              <a:defRPr sz="1100">
+                <a:latin typeface="+mn-lt"/>
+                <a:ea typeface="+mn-ea"/>
+                <a:cs typeface="+mn-cs"/>
+              </a:defRPr>
+            </a:lvl3pPr>
+            <a:lvl4pPr marL="1371600" indent="0">
+              <a:defRPr sz="1100">
+                <a:latin typeface="+mn-lt"/>
+                <a:ea typeface="+mn-ea"/>
+                <a:cs typeface="+mn-cs"/>
+              </a:defRPr>
+            </a:lvl4pPr>
+            <a:lvl5pPr marL="1828800" indent="0">
+              <a:defRPr sz="1100">
+                <a:latin typeface="+mn-lt"/>
+                <a:ea typeface="+mn-ea"/>
+                <a:cs typeface="+mn-cs"/>
+              </a:defRPr>
+            </a:lvl5pPr>
+            <a:lvl6pPr marL="2286000" indent="0">
+              <a:defRPr sz="1100">
+                <a:latin typeface="+mn-lt"/>
+                <a:ea typeface="+mn-ea"/>
+                <a:cs typeface="+mn-cs"/>
+              </a:defRPr>
+            </a:lvl6pPr>
+            <a:lvl7pPr marL="2743200" indent="0">
+              <a:defRPr sz="1100">
+                <a:latin typeface="+mn-lt"/>
+                <a:ea typeface="+mn-ea"/>
+                <a:cs typeface="+mn-cs"/>
+              </a:defRPr>
+            </a:lvl7pPr>
+            <a:lvl8pPr marL="3200400" indent="0">
+              <a:defRPr sz="1100">
+                <a:latin typeface="+mn-lt"/>
+                <a:ea typeface="+mn-ea"/>
+                <a:cs typeface="+mn-cs"/>
+              </a:defRPr>
+            </a:lvl8pPr>
+            <a:lvl9pPr marL="3657600" indent="0">
+              <a:defRPr sz="1100">
+                <a:latin typeface="+mn-lt"/>
+                <a:ea typeface="+mn-ea"/>
+                <a:cs typeface="+mn-cs"/>
+              </a:defRPr>
+            </a:lvl9pPr>
+          </a:lstStyle>
+          <a:p>
+            <a:pPr algn="ctr" eaLnBrk="1" hangingPunct="1">
+              <a:lnSpc>
+                <a:spcPct val="130000"/>
+              </a:lnSpc>
+              <a:defRPr/>
+            </a:pPr>
+            <a:r>
+              <a:rPr lang="en-US" altLang="ko-KR" sz="1000" b="1" dirty="0" smtClean="0">
+                <a:solidFill>
+                  <a:schemeClr val="bg1"/>
+                </a:solidFill>
+                <a:latin typeface="굴림" pitchFamily="50" charset="-127"/>
+                <a:ea typeface="굴림" pitchFamily="50" charset="-127"/>
+              </a:rPr>
+              <a:t>VS</a:t>
+            </a:r>
+            <a:endParaRPr lang="ko-KR" altLang="en-US" sz="1000" b="1" dirty="0">
+              <a:solidFill>
+                <a:schemeClr val="bg1"/>
+              </a:solidFill>
+              <a:latin typeface="굴림" pitchFamily="50" charset="-127"/>
+              <a:ea typeface="굴림" pitchFamily="50" charset="-127"/>
+            </a:endParaRPr>
+          </a:p>
+        </p:txBody>
+      </p:sp>
+    </p:spTree>
+    <p:extLst>
+      <p:ext uri="{BB962C8B-B14F-4D97-AF65-F5344CB8AC3E}">
+        <p14:creationId xmlns:p14="http://schemas.microsoft.com/office/powerpoint/2010/main" val="2030676247"/>
+      </p:ext>
+    </p:extLst>
+  </p:cSld>
+  <p:clrMapOvr>
+    <a:masterClrMapping/>
+  </p:clrMapOvr>
+</p:sld>
+</file>
+
+<file path=ppt/slides/slide5.xml><?xml version="1.0" encoding="utf-8"?>
 <p:sld xmlns:a="http://schemas.openxmlformats.org/drawingml/2006/main" xmlns:r="http://schemas.openxmlformats.org/officeDocument/2006/relationships" xmlns:p="http://schemas.openxmlformats.org/presentationml/2006/main">
   <p:cSld>
     <p:spTree>
@@ -26264,7 +28345,7 @@
 </p:sld>
 </file>
 
-<file path=ppt/slides/slide5.xml><?xml version="1.0" encoding="utf-8"?>
+<file path=ppt/slides/slide6.xml><?xml version="1.0" encoding="utf-8"?>
 <p:sld xmlns:a="http://schemas.openxmlformats.org/drawingml/2006/main" xmlns:r="http://schemas.openxmlformats.org/officeDocument/2006/relationships" xmlns:p="http://schemas.openxmlformats.org/presentationml/2006/main">
   <p:cSld>
     <p:spTree>
@@ -29383,7 +31464,7 @@
 </p:sld>
 </file>
 
-<file path=ppt/slides/slide6.xml><?xml version="1.0" encoding="utf-8"?>
+<file path=ppt/slides/slide7.xml><?xml version="1.0" encoding="utf-8"?>
 <p:sld xmlns:a="http://schemas.openxmlformats.org/drawingml/2006/main" xmlns:r="http://schemas.openxmlformats.org/officeDocument/2006/relationships" xmlns:p="http://schemas.openxmlformats.org/presentationml/2006/main">
   <p:cSld>
     <p:spTree>
@@ -31753,199 +33834,6 @@
 </p:sld>
 </file>
 
-<file path=ppt/slides/slide7.xml><?xml version="1.0" encoding="utf-8"?>
-<p:sld xmlns:a="http://schemas.openxmlformats.org/drawingml/2006/main" xmlns:r="http://schemas.openxmlformats.org/officeDocument/2006/relationships" xmlns:p="http://schemas.openxmlformats.org/presentationml/2006/main">
-  <p:cSld>
-    <p:spTree>
-      <p:nvGrpSpPr>
-        <p:cNvPr id="1" name=""/>
-        <p:cNvGrpSpPr/>
-        <p:nvPr/>
-      </p:nvGrpSpPr>
-      <p:grpSpPr>
-        <a:xfrm>
-          <a:off x="0" y="0"/>
-          <a:ext cx="0" cy="0"/>
-          <a:chOff x="0" y="0"/>
-          <a:chExt cx="0" cy="0"/>
-        </a:xfrm>
-      </p:grpSpPr>
-      <p:sp>
-        <p:nvSpPr>
-          <p:cNvPr id="2" name="제목 1"/>
-          <p:cNvSpPr>
-            <a:spLocks noGrp="1"/>
-          </p:cNvSpPr>
-          <p:nvPr>
-            <p:ph type="title"/>
-          </p:nvPr>
-        </p:nvSpPr>
-        <p:spPr/>
-        <p:txBody>
-          <a:bodyPr/>
-          <a:lstStyle/>
-          <a:p>
-            <a:r>
-              <a:rPr lang="en-US" altLang="ko-KR" dirty="0" smtClean="0"/>
-              <a:t>Device</a:t>
-            </a:r>
-            <a:r>
-              <a:rPr lang="ko-KR" altLang="en-US" dirty="0" smtClean="0"/>
-              <a:t>간 통신구성</a:t>
-            </a:r>
-            <a:endParaRPr lang="ko-KR" altLang="en-US" dirty="0"/>
-          </a:p>
-        </p:txBody>
-      </p:sp>
-      <p:sp>
-        <p:nvSpPr>
-          <p:cNvPr id="3" name="내용 개체 틀 2"/>
-          <p:cNvSpPr>
-            <a:spLocks noGrp="1"/>
-          </p:cNvSpPr>
-          <p:nvPr>
-            <p:ph idx="1"/>
-          </p:nvPr>
-        </p:nvSpPr>
-        <p:spPr/>
-        <p:txBody>
-          <a:bodyPr/>
-          <a:lstStyle/>
-          <a:p>
-            <a:r>
-              <a:rPr lang="en-US" altLang="ko-KR" dirty="0" smtClean="0"/>
-              <a:t>SMAC</a:t>
-            </a:r>
-          </a:p>
-          <a:p>
-            <a:pPr lvl="1"/>
-            <a:r>
-              <a:rPr lang="en-US" altLang="ko-KR" dirty="0" smtClean="0"/>
-              <a:t>RS232</a:t>
-            </a:r>
-            <a:r>
-              <a:rPr lang="ko-KR" altLang="en-US" dirty="0" smtClean="0"/>
-              <a:t>통신</a:t>
-            </a:r>
-            <a:endParaRPr lang="en-US" altLang="ko-KR" dirty="0" smtClean="0"/>
-          </a:p>
-          <a:p>
-            <a:r>
-              <a:rPr lang="en-US" altLang="ko-KR" dirty="0" smtClean="0"/>
-              <a:t>Vision Camera</a:t>
-            </a:r>
-          </a:p>
-          <a:p>
-            <a:pPr lvl="1"/>
-            <a:r>
-              <a:rPr lang="en-US" altLang="ko-KR" dirty="0" smtClean="0"/>
-              <a:t>TCP/IP</a:t>
-            </a:r>
-            <a:r>
-              <a:rPr lang="ko-KR" altLang="en-US" dirty="0" smtClean="0"/>
-              <a:t>통신</a:t>
-            </a:r>
-            <a:endParaRPr lang="en-US" altLang="ko-KR" dirty="0" smtClean="0"/>
-          </a:p>
-          <a:p>
-            <a:r>
-              <a:rPr lang="en-US" altLang="ko-KR" dirty="0" smtClean="0"/>
-              <a:t>PLC</a:t>
-            </a:r>
-          </a:p>
-          <a:p>
-            <a:pPr lvl="1"/>
-            <a:r>
-              <a:rPr lang="en-US" altLang="ko-KR" dirty="0" err="1" smtClean="0"/>
-              <a:t>MotionAPI</a:t>
-            </a:r>
-            <a:r>
-              <a:rPr lang="en-US" altLang="ko-KR" dirty="0"/>
-              <a:t> </a:t>
-            </a:r>
-            <a:r>
-              <a:rPr lang="en-US" altLang="ko-KR" dirty="0" smtClean="0"/>
-              <a:t>(</a:t>
-            </a:r>
-            <a:r>
-              <a:rPr lang="en-US" altLang="ko-KR" dirty="0" err="1" smtClean="0"/>
-              <a:t>dll</a:t>
-            </a:r>
-            <a:r>
-              <a:rPr lang="en-US" altLang="ko-KR" dirty="0" smtClean="0"/>
-              <a:t> </a:t>
-            </a:r>
-            <a:r>
-              <a:rPr lang="ko-KR" altLang="en-US" dirty="0" smtClean="0"/>
-              <a:t>라이브러리</a:t>
-            </a:r>
-            <a:r>
-              <a:rPr lang="en-US" altLang="ko-KR" dirty="0" smtClean="0"/>
-              <a:t>) – </a:t>
-            </a:r>
-            <a:r>
-              <a:rPr lang="ko-KR" altLang="en-US" dirty="0" err="1" smtClean="0"/>
-              <a:t>메카트로링크</a:t>
-            </a:r>
-            <a:r>
-              <a:rPr lang="ko-KR" altLang="en-US" dirty="0" smtClean="0"/>
-              <a:t> 통신</a:t>
-            </a:r>
-            <a:endParaRPr lang="en-US" altLang="ko-KR" dirty="0" smtClean="0"/>
-          </a:p>
-          <a:p>
-            <a:r>
-              <a:rPr lang="en-US" altLang="ko-KR" dirty="0" smtClean="0"/>
-              <a:t>Motion</a:t>
-            </a:r>
-          </a:p>
-          <a:p>
-            <a:pPr lvl="1"/>
-            <a:r>
-              <a:rPr lang="en-US" altLang="ko-KR" dirty="0" err="1" smtClean="0"/>
-              <a:t>EtherCAT</a:t>
-            </a:r>
-            <a:r>
-              <a:rPr lang="ko-KR" altLang="en-US" dirty="0" smtClean="0"/>
-              <a:t>통신</a:t>
-            </a:r>
-            <a:r>
-              <a:rPr lang="en-US" altLang="ko-KR" dirty="0"/>
-              <a:t> (</a:t>
-            </a:r>
-            <a:r>
-              <a:rPr lang="en-US" altLang="ko-KR" dirty="0" err="1"/>
-              <a:t>dll</a:t>
-            </a:r>
-            <a:r>
-              <a:rPr lang="en-US" altLang="ko-KR" dirty="0"/>
-              <a:t> </a:t>
-            </a:r>
-            <a:r>
-              <a:rPr lang="ko-KR" altLang="en-US" dirty="0"/>
-              <a:t>라이브러리</a:t>
-            </a:r>
-            <a:r>
-              <a:rPr lang="en-US" altLang="ko-KR" dirty="0"/>
-              <a:t>)</a:t>
-            </a:r>
-            <a:endParaRPr lang="ko-KR" altLang="en-US" dirty="0"/>
-          </a:p>
-        </p:txBody>
-      </p:sp>
-    </p:spTree>
-    <p:extLst>
-      <p:ext uri="{BB962C8B-B14F-4D97-AF65-F5344CB8AC3E}">
-        <p14:creationId xmlns:p14="http://schemas.microsoft.com/office/powerpoint/2010/main" val="1801071818"/>
-      </p:ext>
-    </p:extLst>
-  </p:cSld>
-  <p:clrMapOvr>
-    <a:masterClrMapping/>
-  </p:clrMapOvr>
-</p:sld>
-</file>
-
 <file path=ppt/slides/slide8.xml><?xml version="1.0" encoding="utf-8"?>
 <p:sld xmlns:a="http://schemas.openxmlformats.org/drawingml/2006/main" xmlns:r="http://schemas.openxmlformats.org/officeDocument/2006/relationships" xmlns:p="http://schemas.openxmlformats.org/presentationml/2006/main">
   <p:cSld>
@@ -31979,8 +33867,12 @@
           <a:lstStyle/>
           <a:p>
             <a:r>
+              <a:rPr lang="en-US" altLang="ko-KR" dirty="0" smtClean="0"/>
+              <a:t>Device</a:t>
+            </a:r>
+            <a:r>
               <a:rPr lang="ko-KR" altLang="en-US" dirty="0" smtClean="0"/>
-              <a:t>파일처리 프로시저</a:t>
+              <a:t>간 통신구성</a:t>
             </a:r>
             <a:endParaRPr lang="ko-KR" altLang="en-US" dirty="0"/>
           </a:p>
@@ -32002,60 +33894,121 @@
           <a:lstStyle/>
           <a:p>
             <a:r>
+              <a:rPr lang="en-US" altLang="ko-KR" dirty="0" smtClean="0"/>
+              <a:t>SMAC</a:t>
+            </a:r>
+          </a:p>
+          <a:p>
+            <a:pPr lvl="1"/>
+            <a:r>
+              <a:rPr lang="en-US" altLang="ko-KR" dirty="0" smtClean="0"/>
+              <a:t>RS232</a:t>
+            </a:r>
+            <a:r>
               <a:rPr lang="ko-KR" altLang="en-US" dirty="0" smtClean="0"/>
-              <a:t>프로그램의 실행에서 파일처리</a:t>
+              <a:t>통신</a:t>
+            </a:r>
+            <a:endParaRPr lang="en-US" altLang="ko-KR" dirty="0" smtClean="0"/>
+          </a:p>
+          <a:p>
+            <a:r>
+              <a:rPr lang="en-US" altLang="ko-KR" dirty="0" smtClean="0"/>
+              <a:t>Vision Camera</a:t>
+            </a:r>
+          </a:p>
+          <a:p>
+            <a:pPr lvl="1"/>
+            <a:r>
+              <a:rPr lang="en-US" altLang="ko-KR" dirty="0" smtClean="0"/>
+              <a:t>TCP/IP</a:t>
+            </a:r>
+            <a:r>
+              <a:rPr lang="ko-KR" altLang="en-US" dirty="0" smtClean="0"/>
+              <a:t>통신</a:t>
+            </a:r>
+            <a:endParaRPr lang="en-US" altLang="ko-KR" dirty="0" smtClean="0"/>
+          </a:p>
+          <a:p>
+            <a:r>
+              <a:rPr lang="en-US" altLang="ko-KR" dirty="0" smtClean="0"/>
+              <a:t>PLC</a:t>
+            </a:r>
+          </a:p>
+          <a:p>
+            <a:pPr lvl="1"/>
+            <a:r>
+              <a:rPr lang="en-US" altLang="ko-KR" dirty="0" err="1" smtClean="0"/>
+              <a:t>MotionAPI</a:t>
+            </a:r>
+            <a:r>
+              <a:rPr lang="en-US" altLang="ko-KR" dirty="0"/>
+              <a:t> </a:t>
             </a:r>
             <a:r>
               <a:rPr lang="en-US" altLang="ko-KR" dirty="0" smtClean="0"/>
               <a:t>(</a:t>
             </a:r>
             <a:r>
+              <a:rPr lang="en-US" altLang="ko-KR" dirty="0" err="1" smtClean="0"/>
+              <a:t>dll</a:t>
+            </a:r>
+            <a:r>
+              <a:rPr lang="en-US" altLang="ko-KR" dirty="0" smtClean="0"/>
+              <a:t> </a:t>
+            </a:r>
+            <a:r>
+              <a:rPr lang="ko-KR" altLang="en-US" dirty="0" smtClean="0"/>
+              <a:t>라이브러리</a:t>
+            </a:r>
+            <a:r>
+              <a:rPr lang="en-US" altLang="ko-KR" dirty="0" smtClean="0"/>
+              <a:t>) – </a:t>
+            </a:r>
+            <a:r>
               <a:rPr lang="ko-KR" altLang="en-US" dirty="0" err="1" smtClean="0"/>
-              <a:t>릴맵</a:t>
-            </a:r>
-            <a:r>
-              <a:rPr lang="en-US" altLang="ko-KR" smtClean="0"/>
+              <a:t>메카트로링크</a:t>
+            </a:r>
+            <a:r>
+              <a:rPr lang="ko-KR" altLang="en-US" dirty="0" smtClean="0"/>
+              <a:t> 통신</a:t>
+            </a:r>
+            <a:endParaRPr lang="en-US" altLang="ko-KR" dirty="0" smtClean="0"/>
+          </a:p>
+          <a:p>
+            <a:r>
+              <a:rPr lang="en-US" altLang="ko-KR" dirty="0" smtClean="0"/>
+              <a:t>Motion</a:t>
+            </a:r>
+          </a:p>
+          <a:p>
+            <a:pPr lvl="1"/>
+            <a:r>
+              <a:rPr lang="en-US" altLang="ko-KR" dirty="0" err="1" smtClean="0"/>
+              <a:t>EtherCAT</a:t>
+            </a:r>
+            <a:r>
+              <a:rPr lang="ko-KR" altLang="en-US" dirty="0" smtClean="0"/>
+              <a:t>통신</a:t>
+            </a:r>
+            <a:r>
+              <a:rPr lang="en-US" altLang="ko-KR" dirty="0"/>
+              <a:t> (</a:t>
+            </a:r>
+            <a:r>
+              <a:rPr lang="en-US" altLang="ko-KR" dirty="0" err="1"/>
+              <a:t>dll</a:t>
+            </a:r>
+            <a:r>
+              <a:rPr lang="en-US" altLang="ko-KR" dirty="0"/>
+              <a:t> </a:t>
+            </a:r>
+            <a:r>
+              <a:rPr lang="ko-KR" altLang="en-US" dirty="0"/>
+              <a:t>라이브러리</a:t>
+            </a:r>
+            <a:r>
+              <a:rPr lang="en-US" altLang="ko-KR" dirty="0"/>
               <a:t>)</a:t>
-            </a:r>
-            <a:r>
-              <a:rPr lang="ko-KR" altLang="en-US" smtClean="0"/>
-              <a:t>를 </a:t>
-            </a:r>
-            <a:r>
-              <a:rPr lang="ko-KR" altLang="en-US" dirty="0" smtClean="0"/>
-              <a:t>독립시킴</a:t>
-            </a:r>
-            <a:endParaRPr lang="en-US" altLang="ko-KR" dirty="0" smtClean="0"/>
-          </a:p>
-          <a:p>
-            <a:pPr lvl="1"/>
-            <a:r>
-              <a:rPr lang="ko-KR" altLang="en-US" dirty="0" smtClean="0"/>
-              <a:t>프로그램 속도 향상</a:t>
-            </a:r>
-            <a:endParaRPr lang="en-US" altLang="ko-KR" dirty="0" smtClean="0"/>
-          </a:p>
-          <a:p>
-            <a:pPr lvl="1"/>
-            <a:r>
-              <a:rPr lang="ko-KR" altLang="en-US" dirty="0" smtClean="0"/>
-              <a:t>프로그램 안정성</a:t>
-            </a:r>
-            <a:endParaRPr lang="en-US" altLang="ko-KR" dirty="0" smtClean="0"/>
-          </a:p>
-          <a:p>
-            <a:pPr lvl="1"/>
-            <a:r>
-              <a:rPr lang="ko-KR" altLang="en-US" dirty="0" smtClean="0"/>
-              <a:t>프로그램 단순화</a:t>
-            </a:r>
-            <a:endParaRPr lang="en-US" altLang="ko-KR" dirty="0" smtClean="0"/>
-          </a:p>
-          <a:p>
-            <a:pPr lvl="1"/>
-            <a:r>
-              <a:rPr lang="ko-KR" altLang="en-US" dirty="0" smtClean="0"/>
-              <a:t>파일데이터에 대한 신뢰 향상</a:t>
             </a:r>
             <a:endParaRPr lang="ko-KR" altLang="en-US" dirty="0"/>
           </a:p>
@@ -32064,7 +34017,7 @@
     </p:spTree>
     <p:extLst>
       <p:ext uri="{BB962C8B-B14F-4D97-AF65-F5344CB8AC3E}">
-        <p14:creationId xmlns:p14="http://schemas.microsoft.com/office/powerpoint/2010/main" val="3189885262"/>
+        <p14:creationId xmlns:p14="http://schemas.microsoft.com/office/powerpoint/2010/main" val="1801071818"/>
       </p:ext>
     </p:extLst>
   </p:cSld>
@@ -32107,20 +34060,8 @@
           <a:lstStyle/>
           <a:p>
             <a:r>
-              <a:rPr lang="en-US" altLang="ko-KR" dirty="0" smtClean="0"/>
-              <a:t>IPC </a:t>
-            </a:r>
-            <a:r>
-              <a:rPr lang="en-US" altLang="ko-KR" sz="2400" dirty="0"/>
-              <a:t>(Inter Process </a:t>
-            </a:r>
-            <a:r>
-              <a:rPr lang="en-US" altLang="ko-KR" sz="2400" dirty="0" smtClean="0"/>
-              <a:t>Communication) </a:t>
-            </a:r>
-            <a:r>
               <a:rPr lang="ko-KR" altLang="en-US" dirty="0" smtClean="0"/>
-              <a:t>검토</a:t>
+              <a:t>파일처리 프로시저</a:t>
             </a:r>
             <a:endParaRPr lang="ko-KR" altLang="en-US" dirty="0"/>
           </a:p>
@@ -32142,210 +34083,69 @@
           <a:lstStyle/>
           <a:p>
             <a:r>
-              <a:rPr lang="ko-KR" altLang="en-US" b="1" dirty="0"/>
-              <a:t>파이프</a:t>
-            </a:r>
-            <a:r>
-              <a:rPr lang="en-US" altLang="ko-KR" b="1" dirty="0"/>
-              <a:t>(Pipes</a:t>
-            </a:r>
-            <a:r>
-              <a:rPr lang="en-US" altLang="ko-KR" b="1" dirty="0" smtClean="0"/>
-              <a:t>) </a:t>
-            </a:r>
-            <a:r>
-              <a:rPr lang="ko-KR" altLang="en-US" dirty="0"/>
-              <a:t>통신</a:t>
-            </a:r>
-            <a:endParaRPr lang="en-US" altLang="ko-KR" b="1" dirty="0" smtClean="0"/>
-          </a:p>
-          <a:p>
-            <a:r>
-              <a:rPr lang="ko-KR" altLang="en-US" b="1" dirty="0"/>
-              <a:t>명명된 파이프</a:t>
-            </a:r>
-            <a:r>
-              <a:rPr lang="en-US" altLang="ko-KR" b="1" dirty="0"/>
-              <a:t>(Named Pipes</a:t>
-            </a:r>
-            <a:r>
-              <a:rPr lang="en-US" altLang="ko-KR" b="1" dirty="0" smtClean="0"/>
-              <a:t>) </a:t>
-            </a:r>
-            <a:r>
-              <a:rPr lang="ko-KR" altLang="en-US" dirty="0"/>
-              <a:t>통신</a:t>
-            </a:r>
-            <a:endParaRPr lang="en-US" altLang="ko-KR" b="1" dirty="0" smtClean="0"/>
-          </a:p>
-          <a:p>
-            <a:r>
-              <a:rPr lang="ko-KR" altLang="en-US" b="1" dirty="0" smtClean="0"/>
-              <a:t>메시지</a:t>
-            </a:r>
-            <a:r>
-              <a:rPr lang="ko-KR" altLang="en-US" b="1" dirty="0"/>
-              <a:t> 큐</a:t>
-            </a:r>
-            <a:r>
-              <a:rPr lang="en-US" altLang="ko-KR" b="1" dirty="0"/>
-              <a:t>(Message Queues</a:t>
-            </a:r>
-            <a:r>
-              <a:rPr lang="en-US" altLang="ko-KR" b="1" dirty="0" smtClean="0"/>
+              <a:rPr lang="ko-KR" altLang="en-US" dirty="0" smtClean="0"/>
+              <a:t>프로그램의 실행에서 파일처리</a:t>
+            </a:r>
+            <a:r>
+              <a:rPr lang="en-US" altLang="ko-KR" dirty="0" smtClean="0"/>
+              <a:t>(</a:t>
+            </a:r>
+            <a:r>
+              <a:rPr lang="ko-KR" altLang="en-US" dirty="0" err="1" smtClean="0"/>
+              <a:t>릴맵</a:t>
+            </a:r>
+            <a:r>
+              <a:rPr lang="en-US" altLang="ko-KR" smtClean="0"/>
               <a:t>)</a:t>
             </a:r>
             <a:r>
-              <a:rPr lang="ko-KR" altLang="en-US" dirty="0"/>
-              <a:t> 통신</a:t>
-            </a:r>
-            <a:endParaRPr lang="en-US" altLang="ko-KR" b="1" dirty="0" smtClean="0"/>
-          </a:p>
-          <a:p>
-            <a:r>
-              <a:rPr lang="ko-KR" altLang="en-US" b="1" dirty="0"/>
-              <a:t>공유 메모리</a:t>
-            </a:r>
-            <a:r>
-              <a:rPr lang="en-US" altLang="ko-KR" b="1" dirty="0"/>
-              <a:t>(Shared Memory</a:t>
-            </a:r>
-            <a:r>
-              <a:rPr lang="en-US" altLang="ko-KR" b="1" dirty="0" smtClean="0"/>
-              <a:t>)</a:t>
-            </a:r>
-            <a:r>
-              <a:rPr lang="ko-KR" altLang="en-US" dirty="0"/>
-              <a:t> 통신</a:t>
-            </a:r>
-            <a:endParaRPr lang="en-US" altLang="ko-KR" b="1" dirty="0" smtClean="0"/>
-          </a:p>
-          <a:p>
-            <a:r>
-              <a:rPr lang="ko-KR" altLang="en-US" b="1" dirty="0"/>
-              <a:t>소켓</a:t>
-            </a:r>
-            <a:r>
-              <a:rPr lang="en-US" altLang="ko-KR" b="1" dirty="0"/>
-              <a:t>(</a:t>
-            </a:r>
-            <a:r>
-              <a:rPr lang="en-US" altLang="ko-KR" b="1" dirty="0">
-                <a:solidFill>
-                  <a:srgbClr val="FF0000"/>
-                </a:solidFill>
-              </a:rPr>
-              <a:t>Socket</a:t>
-            </a:r>
-            <a:r>
-              <a:rPr lang="en-US" altLang="ko-KR" b="1" dirty="0"/>
-              <a:t>s</a:t>
-            </a:r>
-            <a:r>
-              <a:rPr lang="en-US" altLang="ko-KR" b="1" dirty="0" smtClean="0"/>
-              <a:t>)</a:t>
-            </a:r>
-            <a:r>
-              <a:rPr lang="ko-KR" altLang="en-US" dirty="0"/>
-              <a:t> 통신</a:t>
-            </a:r>
-            <a:endParaRPr lang="en-US" altLang="ko-KR" b="1" dirty="0" smtClean="0"/>
-          </a:p>
-          <a:p>
-            <a:r>
-              <a:rPr lang="en-US" altLang="ko-KR" b="1" dirty="0">
-                <a:solidFill>
-                  <a:schemeClr val="tx1">
-                    <a:lumMod val="50000"/>
-                    <a:lumOff val="50000"/>
-                  </a:schemeClr>
-                </a:solidFill>
-              </a:rPr>
-              <a:t>RPC(Remote Procedure Call</a:t>
-            </a:r>
-            <a:r>
-              <a:rPr lang="en-US" altLang="ko-KR" b="1" dirty="0" smtClean="0">
-                <a:solidFill>
-                  <a:schemeClr val="tx1">
-                    <a:lumMod val="50000"/>
-                    <a:lumOff val="50000"/>
-                  </a:schemeClr>
-                </a:solidFill>
-              </a:rPr>
-              <a:t>)</a:t>
-            </a:r>
-            <a:r>
-              <a:rPr lang="ko-KR" altLang="en-US" dirty="0">
-                <a:solidFill>
-                  <a:schemeClr val="tx1">
-                    <a:lumMod val="50000"/>
-                    <a:lumOff val="50000"/>
-                  </a:schemeClr>
-                </a:solidFill>
-              </a:rPr>
-              <a:t> 통신</a:t>
-            </a:r>
-            <a:endParaRPr lang="en-US" altLang="ko-KR" b="1" dirty="0" smtClean="0">
-              <a:solidFill>
-                <a:schemeClr val="tx1">
-                  <a:lumMod val="50000"/>
-                  <a:lumOff val="50000"/>
-                </a:schemeClr>
-              </a:solidFill>
-            </a:endParaRPr>
-          </a:p>
-          <a:p>
-            <a:r>
-              <a:rPr lang="ko-KR" altLang="en-US" b="1" dirty="0">
-                <a:solidFill>
-                  <a:schemeClr val="tx1">
-                    <a:lumMod val="50000"/>
-                    <a:lumOff val="50000"/>
-                  </a:schemeClr>
-                </a:solidFill>
-              </a:rPr>
-              <a:t>파일</a:t>
-            </a:r>
-            <a:r>
-              <a:rPr lang="en-US" altLang="ko-KR" b="1" dirty="0">
-                <a:solidFill>
-                  <a:schemeClr val="tx1">
-                    <a:lumMod val="50000"/>
-                    <a:lumOff val="50000"/>
-                  </a:schemeClr>
-                </a:solidFill>
-              </a:rPr>
-              <a:t>(Files</a:t>
-            </a:r>
-            <a:r>
-              <a:rPr lang="en-US" altLang="ko-KR" b="1" dirty="0" smtClean="0">
-                <a:solidFill>
-                  <a:schemeClr val="tx1">
-                    <a:lumMod val="50000"/>
-                    <a:lumOff val="50000"/>
-                  </a:schemeClr>
-                </a:solidFill>
-              </a:rPr>
-              <a:t>)</a:t>
-            </a:r>
-            <a:r>
-              <a:rPr lang="ko-KR" altLang="en-US" dirty="0">
-                <a:solidFill>
-                  <a:schemeClr val="tx1">
-                    <a:lumMod val="50000"/>
-                    <a:lumOff val="50000"/>
-                  </a:schemeClr>
-                </a:solidFill>
-              </a:rPr>
-              <a:t> 통신</a:t>
-            </a:r>
+              <a:rPr lang="ko-KR" altLang="en-US" smtClean="0"/>
+              <a:t>를 </a:t>
+            </a:r>
+            <a:r>
+              <a:rPr lang="ko-KR" altLang="en-US" dirty="0" smtClean="0"/>
+              <a:t>독립시킴</a:t>
+            </a:r>
+            <a:endParaRPr lang="en-US" altLang="ko-KR" dirty="0" smtClean="0"/>
+          </a:p>
+          <a:p>
+            <a:pPr lvl="1"/>
+            <a:r>
+              <a:rPr lang="ko-KR" altLang="en-US" dirty="0" smtClean="0"/>
+              <a:t>프로그램 속도 향상</a:t>
+            </a:r>
+            <a:endParaRPr lang="en-US" altLang="ko-KR" dirty="0" smtClean="0"/>
+          </a:p>
+          <a:p>
+            <a:pPr lvl="1"/>
+            <a:r>
+              <a:rPr lang="ko-KR" altLang="en-US" dirty="0" smtClean="0"/>
+              <a:t>프로그램 안정성</a:t>
+            </a:r>
+            <a:endParaRPr lang="en-US" altLang="ko-KR" dirty="0" smtClean="0"/>
+          </a:p>
+          <a:p>
+            <a:pPr lvl="1"/>
+            <a:r>
+              <a:rPr lang="ko-KR" altLang="en-US" dirty="0" smtClean="0"/>
+              <a:t>프로그램 단순화</a:t>
+            </a:r>
+            <a:endParaRPr lang="en-US" altLang="ko-KR" dirty="0" smtClean="0"/>
+          </a:p>
+          <a:p>
+            <a:pPr lvl="1"/>
+            <a:r>
+              <a:rPr lang="ko-KR" altLang="en-US" dirty="0" smtClean="0"/>
+              <a:t>파일데이터에 대한 신뢰 향상</a:t>
+            </a:r>
+            <a:endParaRPr lang="ko-KR" altLang="en-US" dirty="0"/>
           </a:p>
         </p:txBody>
       </p:sp>
     </p:spTree>
     <p:extLst>
       <p:ext uri="{BB962C8B-B14F-4D97-AF65-F5344CB8AC3E}">
-        <p14:creationId xmlns:p14="http://schemas.microsoft.com/office/powerpoint/2010/main" val="513040891"/>
+        <p14:creationId xmlns:p14="http://schemas.microsoft.com/office/powerpoint/2010/main" val="3189885262"/>
       </p:ext>
     </p:extLst>
   </p:cSld>
